--- a/lecons/F3/23_FORM4_LESSON19_Upper_Course.pptx
+++ b/lecons/F3/23_FORM4_LESSON19_Upper_Course.pptx
@@ -51,9 +51,14 @@
     <p:sldId id="299" r:id="rId45"/>
     <p:sldId id="300" r:id="rId46"/>
     <p:sldId id="301" r:id="rId47"/>
+    <p:sldId id="302" r:id="rId48"/>
+    <p:sldId id="303" r:id="rId49"/>
+    <p:sldId id="304" r:id="rId50"/>
+    <p:sldId id="305" r:id="rId51"/>
+    <p:sldId id="306" r:id="rId52"/>
   </p:sldIdLst>
   <p:notesMasterIdLst>
-    <p:notesMasterId r:id="rId48"/>
+    <p:notesMasterId r:id="rId53"/>
   </p:notesMasterIdLst>
   <p:sldSz cx="12192000" cy="6858000"/>
   <p:notesSz cx="6858000" cy="12192000"/>
@@ -635,7 +640,7 @@
           <a:p>
             <a:r>
               <a:rPr lang="en-US" dirty="0"/>
-              <a:t>Listen carefully to this situation from real life. Near Ngaoundéré, the Vina River falls over a cliff of hard rock. The water is fast and noisy, and the valley sides are steep. Bouba compares it with the slow Benue at Garoua. Think about it, because I am going to ask you some questions.</a:t>
+              <a:t>Listen carefully to this situation from real life. Near Ngaoundéré, the Vina River falls over a cliff of hard rock. The water is fast and noisy, and the valley sides are steep, while the Benue at Garoua is wide and slow. Bouba asks: "Why is the valley so different near the source, and how did this waterfall form?" Think about it, because I am going to ask you some questions.</a:t>
             </a:r>
             <a:endParaRPr lang="en-US" dirty="0"/>
           </a:p>
@@ -811,7 +816,7 @@
           <a:p>
             <a:r>
               <a:rPr lang="en-US" dirty="0"/>
-              <a:t>Good. Bouba does not know why the river is so different in two places.</a:t>
+              <a:t>Good. Bouba does not know why the upper course of a river looks so different and how waterfalls form.</a:t>
             </a:r>
             <a:endParaRPr lang="en-US" dirty="0"/>
           </a:p>
@@ -899,7 +904,7 @@
           <a:p>
             <a:r>
               <a:rPr lang="en-US" dirty="0"/>
-              <a:t>Question 2: Describe the Vina near Ngaoundéré. Think for a moment, then raise your hand to answer.</a:t>
+              <a:t>Question 2: Describe the water of the Vina River. Think for a moment, then raise your hand to answer.</a:t>
             </a:r>
             <a:endParaRPr lang="en-US" dirty="0"/>
           </a:p>
@@ -987,7 +992,7 @@
           <a:p>
             <a:r>
               <a:rPr lang="en-US" dirty="0"/>
-              <a:t>Good. Fast, noisy, with a waterfall and steep sides.</a:t>
+              <a:t>Good. Fast and noisy.</a:t>
             </a:r>
             <a:endParaRPr lang="en-US" dirty="0"/>
           </a:p>
@@ -1075,7 +1080,7 @@
           <a:p>
             <a:r>
               <a:rPr lang="en-US" dirty="0"/>
-              <a:t>Question 3: Which course of the river is this? Think for a moment, then raise your hand to answer.</a:t>
+              <a:t>Question 3: Describe the valley sides. Think for a moment, then raise your hand to answer.</a:t>
             </a:r>
             <a:endParaRPr lang="en-US" dirty="0"/>
           </a:p>
@@ -1163,7 +1168,7 @@
           <a:p>
             <a:r>
               <a:rPr lang="en-US" dirty="0"/>
-              <a:t>Good. The upper course.</a:t>
+              <a:t>Good. They are steep.</a:t>
             </a:r>
             <a:endParaRPr lang="en-US" dirty="0"/>
           </a:p>
@@ -1427,7 +1432,7 @@
           <a:p>
             <a:r>
               <a:rPr lang="en-US" dirty="0"/>
-              <a:t>Activity 1. Look carefully at this diagram: a cross-section of a valley in the upper course. Observe every detail before I ask the question.</a:t>
+              <a:t>Activity 1. Look carefully at this diagram: a valley in the upper course. Observe every detail before I ask the question.</a:t>
             </a:r>
             <a:endParaRPr lang="en-US" dirty="0"/>
           </a:p>
@@ -1603,7 +1608,7 @@
           <a:p>
             <a:r>
               <a:rPr lang="en-US" dirty="0"/>
-              <a:t>Here is the question for Activity 1: What is the shape of this valley? Why? Take one minute to think and write your answer in your rough notebook.</a:t>
+              <a:t>Here is the question for Activity 1: What is the shape of this valley? Take one minute to think and write your answer in your rough notebook.</a:t>
             </a:r>
             <a:endParaRPr lang="en-US" dirty="0"/>
           </a:p>
@@ -1691,7 +1696,7 @@
           <a:p>
             <a:r>
               <a:rPr lang="en-US" dirty="0"/>
-              <a:t>Let us check the answer together. A V shape. The river cuts down into its bed.</a:t>
+              <a:t>Let us check the answer together. A V shape.</a:t>
             </a:r>
             <a:endParaRPr lang="en-US" dirty="0"/>
           </a:p>
@@ -1779,7 +1784,7 @@
           <a:p>
             <a:r>
               <a:rPr lang="en-US" dirty="0"/>
-              <a:t>Activity 2. Look carefully at this picture: a waterfall. Observe every detail before I ask the question.</a:t>
+              <a:t>Here is the next question: Why does it have this shape? Take one minute to think and write your answer in your rough notebook.</a:t>
             </a:r>
             <a:endParaRPr lang="en-US" dirty="0"/>
           </a:p>
@@ -1867,7 +1872,7 @@
           <a:p>
             <a:r>
               <a:rPr lang="en-US" dirty="0"/>
-              <a:t>Here is the question for Activity 2: Why does a waterfall form? Take one minute to think and write your answer in your rough notebook.</a:t>
+              <a:t>Let us check the answer together. The river cuts down into its bed.</a:t>
             </a:r>
             <a:endParaRPr lang="en-US" dirty="0"/>
           </a:p>
@@ -1955,7 +1960,7 @@
           <a:p>
             <a:r>
               <a:rPr lang="en-US" dirty="0"/>
-              <a:t>Let us check the answer together. The river flows from hard rock onto soft rock that wears away faster.</a:t>
+              <a:t>Activity 2. Look carefully at this picture: a waterfall. Observe every detail before I ask the question.</a:t>
             </a:r>
             <a:endParaRPr lang="en-US" dirty="0"/>
           </a:p>
@@ -2043,7 +2048,7 @@
           <a:p>
             <a:r>
               <a:rPr lang="en-US" dirty="0"/>
-              <a:t>Activity 3. Look carefully at this animation: animation: a waterfall moves back and makes a gorge. Watch the animation to the end; it will play again.</a:t>
+              <a:t>Here is the question for Activity 2: Why does a waterfall form? Take one minute to think and write your answer in your rough notebook.</a:t>
             </a:r>
             <a:endParaRPr lang="en-US" dirty="0"/>
           </a:p>
@@ -2131,7 +2136,7 @@
           <a:p>
             <a:r>
               <a:rPr lang="en-US" dirty="0"/>
-              <a:t>Here is the question for Activity 3: What happens to the waterfall over many years? Take one minute to think and write your answer in your rough notebook.</a:t>
+              <a:t>Let us check the answer together. The river flows from hard rock onto soft rock that is worn away faster.</a:t>
             </a:r>
             <a:endParaRPr lang="en-US" dirty="0"/>
           </a:p>
@@ -2219,7 +2224,7 @@
           <a:p>
             <a:r>
               <a:rPr lang="en-US" dirty="0"/>
-              <a:t>Let us check the answer together. It moves back and leaves a gorge.</a:t>
+              <a:t>Activity 3. Look carefully at this animation: animation: a waterfall moves back. Watch the animation to the end; it will play again.</a:t>
             </a:r>
             <a:endParaRPr lang="en-US" dirty="0"/>
           </a:p>
@@ -2307,7 +2312,7 @@
           <a:p>
             <a:r>
               <a:rPr lang="en-US" dirty="0"/>
-              <a:t>Now we are going to copy the board summary. Write the title and the headings neatly in your notebooks. I will give you enough time for each slide, so do not rush.</a:t>
+              <a:t>Here is the question for Activity 3: What does the waterfall leave behind as it moves back over many years? Take one minute to think and write your answer in your rough notebook.</a:t>
             </a:r>
             <a:endParaRPr lang="en-US" dirty="0"/>
           </a:p>
@@ -2395,7 +2400,7 @@
           <a:p>
             <a:r>
               <a:rPr lang="en-US" dirty="0"/>
-              <a:t>Let us copy Characteristics of the Upper Course. The upper course has the following characteristics. On this slide we have Slope and Water. Write each point on a new line, with the key term first, and explain it in your own words when we revise. When you finish, we go to the next slide.</a:t>
+              <a:t>Let us check the answer together. A gorge.</a:t>
             </a:r>
             <a:endParaRPr lang="en-US" dirty="0"/>
           </a:p>
@@ -2571,7 +2576,7 @@
           <a:p>
             <a:r>
               <a:rPr lang="en-US" dirty="0"/>
-              <a:t>We continue with Characteristics of the Upper Course. On this slide we have Main process. Write each point on a new line, with the key term first, and explain it in your own words when we revise.</a:t>
+              <a:t>Now we are going to copy the board summary. Write the title and the headings neatly in your notebooks. I will give you enough time for each slide, so do not rush.</a:t>
             </a:r>
             <a:endParaRPr lang="en-US" dirty="0"/>
           </a:p>
@@ -2659,7 +2664,7 @@
           <a:p>
             <a:r>
               <a:rPr lang="en-US" dirty="0"/>
-              <a:t>Let us copy Landforms of the Upper Course. The upper course has the following landforms. On this slide we have V-shaped valley and Interlocking spurs. Write each point on a new line, with the key term first, and explain it in your own words when we revise. When you finish, we go to the next slide.</a:t>
+              <a:t>Let us copy the definitions. The key terms of this lesson are defined as follows. On this slide we have Upper course and Vertical erosion. Write each point on a new line, with the key term first, and explain it in your own words when we revise.</a:t>
             </a:r>
             <a:endParaRPr lang="en-US" dirty="0"/>
           </a:p>
@@ -2747,7 +2752,7 @@
           <a:p>
             <a:r>
               <a:rPr lang="en-US" dirty="0"/>
-              <a:t>We continue with Landforms of the Upper Course. On this slide we have Waterfall, Gorge and Rapids and potholes. Write each point on a new line, with the key term first, and explain it in your own words when we revise.</a:t>
+              <a:t>Let us copy Main Characteristics and Processes of the Upper Course. The upper course has the following characteristics and processes. On this slide we have Steep slope and Fast water. Write each point on a new line, with the key term first, and explain it in your own words when we revise. When you finish, we go to the next slide.</a:t>
             </a:r>
             <a:endParaRPr lang="en-US" dirty="0"/>
           </a:p>
@@ -2835,7 +2840,7 @@
           <a:p>
             <a:r>
               <a:rPr lang="en-US" dirty="0"/>
-              <a:t>Now draw this illustration in your notebook: formation of a waterfall. Give it a title and label it clearly.</a:t>
+              <a:t>We continue with Main Characteristics and Processes of the Upper Course. On this slide we have Big load and Vertical erosion. Write each point on a new line, with the key term first, and explain it in your own words when we revise.</a:t>
             </a:r>
             <a:endParaRPr lang="en-US" dirty="0"/>
           </a:p>
@@ -2923,7 +2928,7 @@
           <a:p>
             <a:r>
               <a:rPr lang="en-US" dirty="0"/>
-              <a:t>Now let us check what you have understood. Question 1: What is the main work of a river in its upper course? Answer in your exercise book.</a:t>
+              <a:t>Let us copy Landforms of the Upper Course. The upper course has the following landforms. Copy the point on V-shaped valley on the left, then draw the diagram on the right: a V-shaped valley. Give it a title and label it clearly.</a:t>
             </a:r>
             <a:endParaRPr lang="en-US" dirty="0"/>
           </a:p>
@@ -3011,7 +3016,7 @@
           <a:p>
             <a:r>
               <a:rPr lang="en-US" dirty="0"/>
-              <a:t>The expected answer is: it cuts down (vertical erosion). If you got it right, well done.</a:t>
+              <a:t>Copy the point on Interlocking spurs on the left, then draw the diagram on the right: interlocking spurs. Give it a title and label it clearly.</a:t>
             </a:r>
             <a:endParaRPr lang="en-US" dirty="0"/>
           </a:p>
@@ -3099,7 +3104,7 @@
           <a:p>
             <a:r>
               <a:rPr lang="en-US" dirty="0"/>
-              <a:t>Now let us check what you have understood. Question 2: How does a gorge form? Answer in your exercise book.</a:t>
+              <a:t>Copy the point on Waterfall on the left, then draw the diagram on the right: formation of a waterfall. Give it a title and label it clearly.</a:t>
             </a:r>
             <a:endParaRPr lang="en-US" dirty="0"/>
           </a:p>
@@ -3187,7 +3192,7 @@
           <a:p>
             <a:r>
               <a:rPr lang="en-US" dirty="0"/>
-              <a:t>The expected answer is: the waterfall moves back and leaves a deep, narrow valley. If you got it right, well done.</a:t>
+              <a:t>We continue with Landforms of the Upper Course. On this slide we have Gorge and Rapids (cataracts). Write each point on a new line, with the key term first, and explain it in your own words when we revise. When you finish, we go to the next slide.</a:t>
             </a:r>
             <a:endParaRPr lang="en-US" dirty="0"/>
           </a:p>
@@ -3275,7 +3280,7 @@
           <a:p>
             <a:r>
               <a:rPr lang="en-US" dirty="0"/>
-              <a:t>Take your time to copy this part; we will continue together.</a:t>
+              <a:t>We continue with Landforms of the Upper Course. On this slide we have Potholes. Write each point on a new line, with the key term first, and explain it in your own words when we revise.</a:t>
             </a:r>
             <a:endParaRPr lang="en-US" dirty="0"/>
           </a:p>
@@ -3363,7 +3368,7 @@
           <a:p>
             <a:r>
               <a:rPr lang="en-US" dirty="0"/>
-              <a:t>For those who need more practice, fill in the blanks in your exercise book. The answers are: number 1, V; number 2, waterfall; number 3, gorge.</a:t>
+              <a:t>Now let us check what you have understood. Question 1: What is the main work of a river in its upper course? Answer in your exercise book.</a:t>
             </a:r>
             <a:endParaRPr lang="en-US" dirty="0"/>
           </a:p>
@@ -3539,7 +3544,7 @@
           <a:p>
             <a:r>
               <a:rPr lang="en-US" dirty="0"/>
-              <a:t>For your homework: Stand on the Benue Bridge in Garoua or look at a photo of it. Draw the river and its bends, and mark where the water seems fastest. We shall correct it at the beginning of our next lesson.</a:t>
+              <a:t>The expected answer is: it cuts down (vertical erosion). If you got it right, well done.</a:t>
             </a:r>
             <a:endParaRPr lang="en-US" dirty="0"/>
           </a:p>
@@ -3627,7 +3632,7 @@
           <a:p>
             <a:r>
               <a:rPr lang="en-US" dirty="0"/>
-              <a:t>Our next lesson will be on Lesson 20: The Middle Course of a River. Thank you for your attention, and see you next time.</a:t>
+              <a:t>Now let us check what you have understood. Question 2: How does a gorge form? Answer in your exercise book.</a:t>
             </a:r>
             <a:endParaRPr lang="en-US" dirty="0"/>
           </a:p>
@@ -3715,7 +3720,7 @@
           <a:p>
             <a:r>
               <a:rPr lang="en-US" dirty="0"/>
-              <a:t>Let us play the bilingual game. I say a word in English, and you give me the French word. Then we do the reverse.</a:t>
+              <a:t>The expected answer is: the waterfall moves back and leaves a deep, narrow valley. If you got it right, well done.</a:t>
             </a:r>
             <a:endParaRPr lang="en-US" dirty="0"/>
           </a:p>
@@ -3803,7 +3808,7 @@
           <a:p>
             <a:r>
               <a:rPr lang="en-US" dirty="0"/>
-              <a:t>I record this information in the official logbook of the class after the lesson.</a:t>
+              <a:t>Take your time to copy this part; we will continue together.</a:t>
             </a:r>
             <a:endParaRPr lang="en-US" dirty="0"/>
           </a:p>
@@ -3891,7 +3896,7 @@
           <a:p>
             <a:r>
               <a:rPr lang="en-US" dirty="0"/>
-              <a:t>I complete the second page of the logbook: the matter taught, the evaluation, the homework and the attendance.</a:t>
+              <a:t>For those who need more practice, fill in the blanks in your exercise book. The answers are: number 1, V; number 2, waterfall; number 3, gorge.</a:t>
             </a:r>
             <a:endParaRPr lang="en-US" dirty="0"/>
           </a:p>
@@ -3979,7 +3984,7 @@
           <a:p>
             <a:r>
               <a:rPr lang="en-US" dirty="0"/>
-              <a:t>This slide is for me, the teacher: it gives the timing of the lesson and what to do if the projector is not available.</a:t>
+              <a:t>For your homework: Stand on the Benue Bridge in Garoua or look at a photo of it. Draw the river and its bends, and mark where the water seems fastest. We shall correct it at the beginning of our next lesson.</a:t>
             </a:r>
             <a:endParaRPr lang="en-US" dirty="0"/>
           </a:p>
@@ -4067,7 +4072,7 @@
           <a:p>
             <a:r>
               <a:rPr lang="en-US" dirty="0"/>
-              <a:t>These are the references and picture credits used to prepare this lesson.</a:t>
+              <a:t>Our next lesson will be on Lesson 20: The Middle Course of a River. Thank you for your attention, and see you next time.</a:t>
             </a:r>
             <a:endParaRPr lang="en-US" dirty="0"/>
           </a:p>
@@ -4091,6 +4096,270 @@
             <a:fld id="{F7021451-1387-4CA6-816F-3879F97B5CBC}" type="slidenum">
               <a:rPr lang="en-US"/>
               <a:t>46</a:t>
+            </a:fld>
+            <a:endParaRPr lang="en-US"/>
+          </a:p>
+        </p:txBody>
+      </p:sp>
+    </p:spTree>
+    <p:extLst>
+      <p:ext uri="{BB962C8B-B14F-4D97-AF65-F5344CB8AC3E}">
+        <p14:creationId xmlns:p14="http://schemas.microsoft.com/office/powerpoint/2010/main" val="1024086991"/>
+      </p:ext>
+    </p:extLst>
+  </p:cSld>
+  <p:clrMapOvr>
+    <a:masterClrMapping/>
+  </p:clrMapOvr>
+</p:notes>
+</file>
+
+<file path=ppt/notesSlides/notesSlide47.xml><?xml version="1.0" encoding="utf-8"?>
+<p:notes xmlns:a="http://schemas.openxmlformats.org/drawingml/2006/main" xmlns:r="http://schemas.openxmlformats.org/officeDocument/2006/relationships" xmlns:p="http://schemas.openxmlformats.org/presentationml/2006/main">
+  <p:cSld>
+    <p:spTree>
+      <p:nvGrpSpPr>
+        <p:cNvPr id="1" name=""/>
+        <p:cNvGrpSpPr/>
+        <p:nvPr/>
+      </p:nvGrpSpPr>
+      <p:grpSpPr>
+        <a:xfrm>
+          <a:off x="0" y="0"/>
+          <a:ext cx="0" cy="0"/>
+          <a:chOff x="0" y="0"/>
+          <a:chExt cx="0" cy="0"/>
+        </a:xfrm>
+      </p:grpSpPr>
+      <p:sp>
+        <p:nvSpPr>
+          <p:cNvPr id="2" name="Slide Image Placeholder 1"/>
+          <p:cNvSpPr>
+            <a:spLocks noGrp="1" noRot="1" noChangeAspect="1"/>
+          </p:cNvSpPr>
+          <p:nvPr>
+            <p:ph type="sldImg"/>
+          </p:nvPr>
+        </p:nvSpPr>
+        <p:spPr/>
+      </p:sp>
+      <p:sp>
+        <p:nvSpPr>
+          <p:cNvPr id="3" name="Notes Placeholder 2"/>
+          <p:cNvSpPr>
+            <a:spLocks noGrp="1"/>
+          </p:cNvSpPr>
+          <p:nvPr>
+            <p:ph type="body" idx="1"/>
+          </p:nvPr>
+        </p:nvSpPr>
+        <p:spPr/>
+        <p:txBody>
+          <a:bodyPr/>
+          <a:lstStyle/>
+          <a:p>
+            <a:r>
+              <a:rPr lang="en-US" dirty="0"/>
+              <a:t>Let us play the bilingual game. I say a word in English, and you give me the French word. Then we do the reverse.</a:t>
+            </a:r>
+            <a:endParaRPr lang="en-US" dirty="0"/>
+          </a:p>
+        </p:txBody>
+      </p:sp>
+      <p:sp>
+        <p:nvSpPr>
+          <p:cNvPr id="4" name="Slide Number Placeholder 3"/>
+          <p:cNvSpPr>
+            <a:spLocks noGrp="1"/>
+          </p:cNvSpPr>
+          <p:nvPr>
+            <p:ph type="sldNum" sz="quarter" idx="10"/>
+          </p:nvPr>
+        </p:nvSpPr>
+        <p:spPr/>
+        <p:txBody>
+          <a:bodyPr/>
+          <a:lstStyle/>
+          <a:p>
+            <a:fld id="{F7021451-1387-4CA6-816F-3879F97B5CBC}" type="slidenum">
+              <a:rPr lang="en-US"/>
+              <a:t>47</a:t>
+            </a:fld>
+            <a:endParaRPr lang="en-US"/>
+          </a:p>
+        </p:txBody>
+      </p:sp>
+    </p:spTree>
+    <p:extLst>
+      <p:ext uri="{BB962C8B-B14F-4D97-AF65-F5344CB8AC3E}">
+        <p14:creationId xmlns:p14="http://schemas.microsoft.com/office/powerpoint/2010/main" val="1024086991"/>
+      </p:ext>
+    </p:extLst>
+  </p:cSld>
+  <p:clrMapOvr>
+    <a:masterClrMapping/>
+  </p:clrMapOvr>
+</p:notes>
+</file>
+
+<file path=ppt/notesSlides/notesSlide48.xml><?xml version="1.0" encoding="utf-8"?>
+<p:notes xmlns:a="http://schemas.openxmlformats.org/drawingml/2006/main" xmlns:r="http://schemas.openxmlformats.org/officeDocument/2006/relationships" xmlns:p="http://schemas.openxmlformats.org/presentationml/2006/main">
+  <p:cSld>
+    <p:spTree>
+      <p:nvGrpSpPr>
+        <p:cNvPr id="1" name=""/>
+        <p:cNvGrpSpPr/>
+        <p:nvPr/>
+      </p:nvGrpSpPr>
+      <p:grpSpPr>
+        <a:xfrm>
+          <a:off x="0" y="0"/>
+          <a:ext cx="0" cy="0"/>
+          <a:chOff x="0" y="0"/>
+          <a:chExt cx="0" cy="0"/>
+        </a:xfrm>
+      </p:grpSpPr>
+      <p:sp>
+        <p:nvSpPr>
+          <p:cNvPr id="2" name="Slide Image Placeholder 1"/>
+          <p:cNvSpPr>
+            <a:spLocks noGrp="1" noRot="1" noChangeAspect="1"/>
+          </p:cNvSpPr>
+          <p:nvPr>
+            <p:ph type="sldImg"/>
+          </p:nvPr>
+        </p:nvSpPr>
+        <p:spPr/>
+      </p:sp>
+      <p:sp>
+        <p:nvSpPr>
+          <p:cNvPr id="3" name="Notes Placeholder 2"/>
+          <p:cNvSpPr>
+            <a:spLocks noGrp="1"/>
+          </p:cNvSpPr>
+          <p:nvPr>
+            <p:ph type="body" idx="1"/>
+          </p:nvPr>
+        </p:nvSpPr>
+        <p:spPr/>
+        <p:txBody>
+          <a:bodyPr/>
+          <a:lstStyle/>
+          <a:p>
+            <a:r>
+              <a:rPr lang="en-US" dirty="0"/>
+              <a:t>I record this information in the official logbook of the class after the lesson.</a:t>
+            </a:r>
+            <a:endParaRPr lang="en-US" dirty="0"/>
+          </a:p>
+        </p:txBody>
+      </p:sp>
+      <p:sp>
+        <p:nvSpPr>
+          <p:cNvPr id="4" name="Slide Number Placeholder 3"/>
+          <p:cNvSpPr>
+            <a:spLocks noGrp="1"/>
+          </p:cNvSpPr>
+          <p:nvPr>
+            <p:ph type="sldNum" sz="quarter" idx="10"/>
+          </p:nvPr>
+        </p:nvSpPr>
+        <p:spPr/>
+        <p:txBody>
+          <a:bodyPr/>
+          <a:lstStyle/>
+          <a:p>
+            <a:fld id="{F7021451-1387-4CA6-816F-3879F97B5CBC}" type="slidenum">
+              <a:rPr lang="en-US"/>
+              <a:t>48</a:t>
+            </a:fld>
+            <a:endParaRPr lang="en-US"/>
+          </a:p>
+        </p:txBody>
+      </p:sp>
+    </p:spTree>
+    <p:extLst>
+      <p:ext uri="{BB962C8B-B14F-4D97-AF65-F5344CB8AC3E}">
+        <p14:creationId xmlns:p14="http://schemas.microsoft.com/office/powerpoint/2010/main" val="1024086991"/>
+      </p:ext>
+    </p:extLst>
+  </p:cSld>
+  <p:clrMapOvr>
+    <a:masterClrMapping/>
+  </p:clrMapOvr>
+</p:notes>
+</file>
+
+<file path=ppt/notesSlides/notesSlide49.xml><?xml version="1.0" encoding="utf-8"?>
+<p:notes xmlns:a="http://schemas.openxmlformats.org/drawingml/2006/main" xmlns:r="http://schemas.openxmlformats.org/officeDocument/2006/relationships" xmlns:p="http://schemas.openxmlformats.org/presentationml/2006/main">
+  <p:cSld>
+    <p:spTree>
+      <p:nvGrpSpPr>
+        <p:cNvPr id="1" name=""/>
+        <p:cNvGrpSpPr/>
+        <p:nvPr/>
+      </p:nvGrpSpPr>
+      <p:grpSpPr>
+        <a:xfrm>
+          <a:off x="0" y="0"/>
+          <a:ext cx="0" cy="0"/>
+          <a:chOff x="0" y="0"/>
+          <a:chExt cx="0" cy="0"/>
+        </a:xfrm>
+      </p:grpSpPr>
+      <p:sp>
+        <p:nvSpPr>
+          <p:cNvPr id="2" name="Slide Image Placeholder 1"/>
+          <p:cNvSpPr>
+            <a:spLocks noGrp="1" noRot="1" noChangeAspect="1"/>
+          </p:cNvSpPr>
+          <p:nvPr>
+            <p:ph type="sldImg"/>
+          </p:nvPr>
+        </p:nvSpPr>
+        <p:spPr/>
+      </p:sp>
+      <p:sp>
+        <p:nvSpPr>
+          <p:cNvPr id="3" name="Notes Placeholder 2"/>
+          <p:cNvSpPr>
+            <a:spLocks noGrp="1"/>
+          </p:cNvSpPr>
+          <p:nvPr>
+            <p:ph type="body" idx="1"/>
+          </p:nvPr>
+        </p:nvSpPr>
+        <p:spPr/>
+        <p:txBody>
+          <a:bodyPr/>
+          <a:lstStyle/>
+          <a:p>
+            <a:r>
+              <a:rPr lang="en-US" dirty="0"/>
+              <a:t>I complete the second page of the logbook: the matter taught, the evaluation, the homework and the attendance.</a:t>
+            </a:r>
+            <a:endParaRPr lang="en-US" dirty="0"/>
+          </a:p>
+        </p:txBody>
+      </p:sp>
+      <p:sp>
+        <p:nvSpPr>
+          <p:cNvPr id="4" name="Slide Number Placeholder 3"/>
+          <p:cNvSpPr>
+            <a:spLocks noGrp="1"/>
+          </p:cNvSpPr>
+          <p:nvPr>
+            <p:ph type="sldNum" sz="quarter" idx="10"/>
+          </p:nvPr>
+        </p:nvSpPr>
+        <p:spPr/>
+        <p:txBody>
+          <a:bodyPr/>
+          <a:lstStyle/>
+          <a:p>
+            <a:fld id="{F7021451-1387-4CA6-816F-3879F97B5CBC}" type="slidenum">
+              <a:rPr lang="en-US"/>
+              <a:t>49</a:t>
             </a:fld>
             <a:endParaRPr lang="en-US"/>
           </a:p>
@@ -4179,6 +4448,182 @@
             <a:fld id="{F7021451-1387-4CA6-816F-3879F97B5CBC}" type="slidenum">
               <a:rPr lang="en-US"/>
               <a:t>5</a:t>
+            </a:fld>
+            <a:endParaRPr lang="en-US"/>
+          </a:p>
+        </p:txBody>
+      </p:sp>
+    </p:spTree>
+    <p:extLst>
+      <p:ext uri="{BB962C8B-B14F-4D97-AF65-F5344CB8AC3E}">
+        <p14:creationId xmlns:p14="http://schemas.microsoft.com/office/powerpoint/2010/main" val="1024086991"/>
+      </p:ext>
+    </p:extLst>
+  </p:cSld>
+  <p:clrMapOvr>
+    <a:masterClrMapping/>
+  </p:clrMapOvr>
+</p:notes>
+</file>
+
+<file path=ppt/notesSlides/notesSlide50.xml><?xml version="1.0" encoding="utf-8"?>
+<p:notes xmlns:a="http://schemas.openxmlformats.org/drawingml/2006/main" xmlns:r="http://schemas.openxmlformats.org/officeDocument/2006/relationships" xmlns:p="http://schemas.openxmlformats.org/presentationml/2006/main">
+  <p:cSld>
+    <p:spTree>
+      <p:nvGrpSpPr>
+        <p:cNvPr id="1" name=""/>
+        <p:cNvGrpSpPr/>
+        <p:nvPr/>
+      </p:nvGrpSpPr>
+      <p:grpSpPr>
+        <a:xfrm>
+          <a:off x="0" y="0"/>
+          <a:ext cx="0" cy="0"/>
+          <a:chOff x="0" y="0"/>
+          <a:chExt cx="0" cy="0"/>
+        </a:xfrm>
+      </p:grpSpPr>
+      <p:sp>
+        <p:nvSpPr>
+          <p:cNvPr id="2" name="Slide Image Placeholder 1"/>
+          <p:cNvSpPr>
+            <a:spLocks noGrp="1" noRot="1" noChangeAspect="1"/>
+          </p:cNvSpPr>
+          <p:nvPr>
+            <p:ph type="sldImg"/>
+          </p:nvPr>
+        </p:nvSpPr>
+        <p:spPr/>
+      </p:sp>
+      <p:sp>
+        <p:nvSpPr>
+          <p:cNvPr id="3" name="Notes Placeholder 2"/>
+          <p:cNvSpPr>
+            <a:spLocks noGrp="1"/>
+          </p:cNvSpPr>
+          <p:nvPr>
+            <p:ph type="body" idx="1"/>
+          </p:nvPr>
+        </p:nvSpPr>
+        <p:spPr/>
+        <p:txBody>
+          <a:bodyPr/>
+          <a:lstStyle/>
+          <a:p>
+            <a:r>
+              <a:rPr lang="en-US" dirty="0"/>
+              <a:t>This slide is for me, the teacher: it gives the timing of the lesson and what to do if the projector is not available.</a:t>
+            </a:r>
+            <a:endParaRPr lang="en-US" dirty="0"/>
+          </a:p>
+        </p:txBody>
+      </p:sp>
+      <p:sp>
+        <p:nvSpPr>
+          <p:cNvPr id="4" name="Slide Number Placeholder 3"/>
+          <p:cNvSpPr>
+            <a:spLocks noGrp="1"/>
+          </p:cNvSpPr>
+          <p:nvPr>
+            <p:ph type="sldNum" sz="quarter" idx="10"/>
+          </p:nvPr>
+        </p:nvSpPr>
+        <p:spPr/>
+        <p:txBody>
+          <a:bodyPr/>
+          <a:lstStyle/>
+          <a:p>
+            <a:fld id="{F7021451-1387-4CA6-816F-3879F97B5CBC}" type="slidenum">
+              <a:rPr lang="en-US"/>
+              <a:t>50</a:t>
+            </a:fld>
+            <a:endParaRPr lang="en-US"/>
+          </a:p>
+        </p:txBody>
+      </p:sp>
+    </p:spTree>
+    <p:extLst>
+      <p:ext uri="{BB962C8B-B14F-4D97-AF65-F5344CB8AC3E}">
+        <p14:creationId xmlns:p14="http://schemas.microsoft.com/office/powerpoint/2010/main" val="1024086991"/>
+      </p:ext>
+    </p:extLst>
+  </p:cSld>
+  <p:clrMapOvr>
+    <a:masterClrMapping/>
+  </p:clrMapOvr>
+</p:notes>
+</file>
+
+<file path=ppt/notesSlides/notesSlide51.xml><?xml version="1.0" encoding="utf-8"?>
+<p:notes xmlns:a="http://schemas.openxmlformats.org/drawingml/2006/main" xmlns:r="http://schemas.openxmlformats.org/officeDocument/2006/relationships" xmlns:p="http://schemas.openxmlformats.org/presentationml/2006/main">
+  <p:cSld>
+    <p:spTree>
+      <p:nvGrpSpPr>
+        <p:cNvPr id="1" name=""/>
+        <p:cNvGrpSpPr/>
+        <p:nvPr/>
+      </p:nvGrpSpPr>
+      <p:grpSpPr>
+        <a:xfrm>
+          <a:off x="0" y="0"/>
+          <a:ext cx="0" cy="0"/>
+          <a:chOff x="0" y="0"/>
+          <a:chExt cx="0" cy="0"/>
+        </a:xfrm>
+      </p:grpSpPr>
+      <p:sp>
+        <p:nvSpPr>
+          <p:cNvPr id="2" name="Slide Image Placeholder 1"/>
+          <p:cNvSpPr>
+            <a:spLocks noGrp="1" noRot="1" noChangeAspect="1"/>
+          </p:cNvSpPr>
+          <p:nvPr>
+            <p:ph type="sldImg"/>
+          </p:nvPr>
+        </p:nvSpPr>
+        <p:spPr/>
+      </p:sp>
+      <p:sp>
+        <p:nvSpPr>
+          <p:cNvPr id="3" name="Notes Placeholder 2"/>
+          <p:cNvSpPr>
+            <a:spLocks noGrp="1"/>
+          </p:cNvSpPr>
+          <p:nvPr>
+            <p:ph type="body" idx="1"/>
+          </p:nvPr>
+        </p:nvSpPr>
+        <p:spPr/>
+        <p:txBody>
+          <a:bodyPr/>
+          <a:lstStyle/>
+          <a:p>
+            <a:r>
+              <a:rPr lang="en-US" dirty="0"/>
+              <a:t>These are the references and picture credits used to prepare this lesson.</a:t>
+            </a:r>
+            <a:endParaRPr lang="en-US" dirty="0"/>
+          </a:p>
+        </p:txBody>
+      </p:sp>
+      <p:sp>
+        <p:nvSpPr>
+          <p:cNvPr id="4" name="Slide Number Placeholder 3"/>
+          <p:cNvSpPr>
+            <a:spLocks noGrp="1"/>
+          </p:cNvSpPr>
+          <p:nvPr>
+            <p:ph type="sldNum" sz="quarter" idx="10"/>
+          </p:nvPr>
+        </p:nvSpPr>
+        <p:spPr/>
+        <p:txBody>
+          <a:bodyPr/>
+          <a:lstStyle/>
+          <a:p>
+            <a:fld id="{F7021451-1387-4CA6-816F-3879F97B5CBC}" type="slidenum">
+              <a:rPr lang="en-US"/>
+              <a:t>51</a:t>
             </a:fld>
             <a:endParaRPr lang="en-US"/>
           </a:p>
@@ -5887,7 +6332,7 @@
         <p:spPr>
           <a:xfrm>
             <a:off x="0" y="658368"/>
-            <a:ext cx="5120640" cy="5833872"/>
+            <a:ext cx="2468880" cy="5833872"/>
           </a:xfrm>
           <a:prstGeom prst="rect">
             <a:avLst/>
@@ -5902,8 +6347,8 @@
         </p:nvSpPr>
         <p:spPr>
           <a:xfrm>
-            <a:off x="5349240" y="1005840"/>
-            <a:ext cx="6522415" cy="731520"/>
+            <a:off x="2697480" y="1005840"/>
+            <a:ext cx="9174175" cy="731520"/>
           </a:xfrm>
           <a:prstGeom prst="rect">
             <a:avLst/>
@@ -5943,8 +6388,8 @@
         </p:nvSpPr>
         <p:spPr>
           <a:xfrm>
-            <a:off x="5349240" y="1783080"/>
-            <a:ext cx="6522415" cy="4663440"/>
+            <a:off x="2697480" y="1783080"/>
+            <a:ext cx="9174175" cy="4663440"/>
           </a:xfrm>
           <a:prstGeom prst="rect">
             <a:avLst/>
@@ -5971,7 +6416,7 @@
                 <a:ea typeface="Times New Roman" pitchFamily="34" charset="-122"/>
                 <a:cs typeface="Times New Roman" pitchFamily="34" charset="-120"/>
               </a:rPr>
-              <a:t>Near Ngaoundéré, the Vina River falls over a cliff of hard rock. The water is fast and noisy, and the valley sides are steep. Bouba compares it with the slow Benue at Garoua.</a:t>
+              <a:t>Near Ngaoundéré, the Vina River falls over a cliff of hard rock. The water is fast and noisy, and the valley sides are steep, while the Benue at Garoua is wide and slow. Bouba asks: "Why is the valley so different near the source, and how did this waterfall form?"</a:t>
             </a:r>
             <a:endParaRPr lang="en-US" sz="4000" dirty="0"/>
           </a:p>
@@ -6409,7 +6854,7 @@
                 <a:ea typeface="Times New Roman" pitchFamily="34" charset="-122"/>
                 <a:cs typeface="Times New Roman" pitchFamily="34" charset="-120"/>
               </a:rPr>
-              <a:t>Bouba does not know why the river is so different in two places.</a:t>
+              <a:t>Bouba does not know why the upper course of a river looks so different and how waterfalls form.</a:t>
             </a:r>
             <a:endParaRPr lang="en-US" sz="4000" dirty="0"/>
           </a:p>
@@ -6628,7 +7073,7 @@
                 <a:ea typeface="Times New Roman" pitchFamily="34" charset="-122"/>
                 <a:cs typeface="Times New Roman" pitchFamily="34" charset="-120"/>
               </a:rPr>
-              <a:t>Describe the Vina near Ngaoundéré.</a:t>
+              <a:t>Describe the water of the Vina River.</a:t>
             </a:r>
             <a:endParaRPr lang="en-US" sz="4000" dirty="0"/>
           </a:p>
@@ -6847,7 +7292,7 @@
                 <a:ea typeface="Times New Roman" pitchFamily="34" charset="-122"/>
                 <a:cs typeface="Times New Roman" pitchFamily="34" charset="-120"/>
               </a:rPr>
-              <a:t>Fast, noisy, with a waterfall and steep sides.</a:t>
+              <a:t>Fast and noisy.</a:t>
             </a:r>
             <a:endParaRPr lang="en-US" sz="4000" dirty="0"/>
           </a:p>
@@ -7066,7 +7511,7 @@
                 <a:ea typeface="Times New Roman" pitchFamily="34" charset="-122"/>
                 <a:cs typeface="Times New Roman" pitchFamily="34" charset="-120"/>
               </a:rPr>
-              <a:t>Which course of the river is this?</a:t>
+              <a:t>Describe the valley sides.</a:t>
             </a:r>
             <a:endParaRPr lang="en-US" sz="4000" dirty="0"/>
           </a:p>
@@ -7285,7 +7730,7 @@
                 <a:ea typeface="Times New Roman" pitchFamily="34" charset="-122"/>
                 <a:cs typeface="Times New Roman" pitchFamily="34" charset="-120"/>
               </a:rPr>
-              <a:t>The upper course.</a:t>
+              <a:t>They are steep.</a:t>
             </a:r>
             <a:endParaRPr lang="en-US" sz="4000" dirty="0"/>
           </a:p>
@@ -7835,7 +8280,7 @@
                 <a:ea typeface="Calibri" pitchFamily="34" charset="-122"/>
                 <a:cs typeface="Calibri" pitchFamily="34" charset="-120"/>
               </a:rPr>
-              <a:t>2. V-SHAPED VALLEY</a:t>
+              <a:t>2. LANDFORMS OF THE UPPER COURSE</a:t>
             </a:r>
             <a:endParaRPr lang="en-US" sz="1400" dirty="0"/>
           </a:p>
@@ -7937,7 +8382,7 @@
                 <a:ea typeface="Times New Roman" pitchFamily="34" charset="-122"/>
                 <a:cs typeface="Times New Roman" pitchFamily="34" charset="-120"/>
               </a:rPr>
-              <a:t>A cross-section of a valley in the upper course.</a:t>
+              <a:t>A valley in the upper course.</a:t>
             </a:r>
             <a:endParaRPr lang="en-US" sz="1800" dirty="0"/>
           </a:p>
@@ -8644,7 +9089,7 @@
                 <a:ea typeface="Calibri" pitchFamily="34" charset="-122"/>
                 <a:cs typeface="Calibri" pitchFamily="34" charset="-120"/>
               </a:rPr>
-              <a:t>2. V-SHAPED VALLEY</a:t>
+              <a:t>2. LANDFORMS OF THE UPPER COURSE</a:t>
             </a:r>
             <a:endParaRPr lang="en-US" sz="1400" dirty="0"/>
           </a:p>
@@ -8709,7 +9154,7 @@
                 <a:ea typeface="Times New Roman" pitchFamily="34" charset="-122"/>
                 <a:cs typeface="Times New Roman" pitchFamily="34" charset="-120"/>
               </a:rPr>
-              <a:t>Activity 1: Question</a:t>
+              <a:t>Activity 1: Question 1</a:t>
             </a:r>
             <a:endParaRPr lang="en-US" sz="3600" dirty="0"/>
           </a:p>
@@ -8751,7 +9196,7 @@
                 <a:ea typeface="Times New Roman" pitchFamily="34" charset="-122"/>
                 <a:cs typeface="Times New Roman" pitchFamily="34" charset="-120"/>
               </a:rPr>
-              <a:t>What is the shape of this valley? Why?</a:t>
+              <a:t>What is the shape of this valley?</a:t>
             </a:r>
             <a:endParaRPr lang="en-US" sz="4000" dirty="0"/>
           </a:p>
@@ -8863,7 +9308,7 @@
                 <a:ea typeface="Calibri" pitchFamily="34" charset="-122"/>
                 <a:cs typeface="Calibri" pitchFamily="34" charset="-120"/>
               </a:rPr>
-              <a:t>2. V-SHAPED VALLEY</a:t>
+              <a:t>2. LANDFORMS OF THE UPPER COURSE</a:t>
             </a:r>
             <a:endParaRPr lang="en-US" sz="1400" dirty="0"/>
           </a:p>
@@ -8928,7 +9373,7 @@
                 <a:ea typeface="Times New Roman" pitchFamily="34" charset="-122"/>
                 <a:cs typeface="Times New Roman" pitchFamily="34" charset="-120"/>
               </a:rPr>
-              <a:t>Activity 1: Answer</a:t>
+              <a:t>Activity 1: Answer 1</a:t>
             </a:r>
             <a:endParaRPr lang="en-US" sz="3600" dirty="0"/>
           </a:p>
@@ -8970,7 +9415,7 @@
                 <a:ea typeface="Times New Roman" pitchFamily="34" charset="-122"/>
                 <a:cs typeface="Times New Roman" pitchFamily="34" charset="-120"/>
               </a:rPr>
-              <a:t>A V shape. The river cuts down into its bed.</a:t>
+              <a:t>A V shape.</a:t>
             </a:r>
             <a:endParaRPr lang="en-US" sz="4000" dirty="0"/>
           </a:p>
@@ -9082,54 +9527,15 @@
                 <a:ea typeface="Calibri" pitchFamily="34" charset="-122"/>
                 <a:cs typeface="Calibri" pitchFamily="34" charset="-120"/>
               </a:rPr>
-              <a:t>2. WATERFALL AND GORGE</a:t>
+              <a:t>2. LANDFORMS OF THE UPPER COURSE</a:t>
             </a:r>
             <a:endParaRPr lang="en-US" sz="1400" dirty="0"/>
-          </a:p>
-        </p:txBody>
-      </p:sp>
-      <p:sp>
-        <p:nvSpPr>
-          <p:cNvPr id="3" name="Text 1"/>
-          <p:cNvSpPr/>
-          <p:nvPr/>
-        </p:nvSpPr>
-        <p:spPr>
-          <a:xfrm>
-            <a:off x="457200" y="1005840"/>
-            <a:ext cx="11277295" cy="731520"/>
-          </a:xfrm>
-          <a:prstGeom prst="rect">
-            <a:avLst/>
-          </a:prstGeom>
-          <a:noFill/>
-          <a:ln/>
-        </p:spPr>
-        <p:txBody>
-          <a:bodyPr wrap="square" lIns="0" tIns="0" rIns="0" bIns="0" rtlCol="0" anchor="ctr"/>
-          <a:lstStyle/>
-          <a:p>
-            <a:pPr algn="ctr" indent="0" marL="0">
-              <a:buNone/>
-            </a:pPr>
-            <a:r>
-              <a:rPr lang="en-US" sz="3600" b="1" dirty="0">
-                <a:solidFill>
-                  <a:srgbClr val="990011"/>
-                </a:solidFill>
-                <a:latin typeface="Times New Roman" pitchFamily="34" charset="0"/>
-                <a:ea typeface="Times New Roman" pitchFamily="34" charset="-122"/>
-                <a:cs typeface="Times New Roman" pitchFamily="34" charset="-120"/>
-              </a:rPr>
-              <a:t>Activity 2</a:t>
-            </a:r>
-            <a:endParaRPr lang="en-US" sz="3600" dirty="0"/>
           </a:p>
         </p:txBody>
       </p:sp>
       <p:pic>
         <p:nvPicPr>
-          <p:cNvPr id="4" name="Image 0" descr="/home/claude/f4/img/v2/f4_waterfall.jpg">    </p:cNvPr>
+          <p:cNvPr id="3" name="Image 0" descr="/home/claude/f4/img/minesec_sheet.png">    </p:cNvPr>
           <p:cNvPicPr>
             <a:picLocks noChangeAspect="1"/>
           </p:cNvPicPr>
@@ -9143,8 +9549,8 @@
         </p:blipFill>
         <p:spPr>
           <a:xfrm>
-            <a:off x="2246610" y="1783080"/>
-            <a:ext cx="7698475" cy="4270248"/>
+            <a:off x="0" y="658368"/>
+            <a:ext cx="5120640" cy="5833872"/>
           </a:xfrm>
           <a:prstGeom prst="rect">
             <a:avLst/>
@@ -9153,14 +9559,14 @@
       </p:pic>
       <p:sp>
         <p:nvSpPr>
-          <p:cNvPr id="5" name="Text 2"/>
+          <p:cNvPr id="4" name="Text 1"/>
           <p:cNvSpPr/>
           <p:nvPr/>
         </p:nvSpPr>
         <p:spPr>
           <a:xfrm>
-            <a:off x="457200" y="6089904"/>
-            <a:ext cx="11277295" cy="347472"/>
+            <a:off x="5349240" y="1005840"/>
+            <a:ext cx="6522415" cy="731520"/>
           </a:xfrm>
           <a:prstGeom prst="rect">
             <a:avLst/>
@@ -9169,24 +9575,68 @@
           <a:ln/>
         </p:spPr>
         <p:txBody>
-          <a:bodyPr wrap="square" lIns="0" tIns="0" rIns="0" bIns="0" rtlCol="0" anchor="ctr"/>
+          <a:bodyPr wrap="square" lIns="0" tIns="0" rIns="0" bIns="0" rtlCol="0" anchor="ctr">
+            <a:normAutofit/>
+          </a:bodyPr>
           <a:lstStyle/>
           <a:p>
             <a:pPr algn="ctr" indent="0" marL="0">
               <a:buNone/>
             </a:pPr>
             <a:r>
-              <a:rPr lang="en-US" sz="1800" i="1" dirty="0">
-                <a:solidFill>
-                  <a:srgbClr val="555555"/>
+              <a:rPr lang="en-US" sz="3600" b="1" dirty="0">
+                <a:solidFill>
+                  <a:srgbClr val="990011"/>
                 </a:solidFill>
                 <a:latin typeface="Times New Roman" pitchFamily="34" charset="0"/>
                 <a:ea typeface="Times New Roman" pitchFamily="34" charset="-122"/>
                 <a:cs typeface="Times New Roman" pitchFamily="34" charset="-120"/>
               </a:rPr>
-              <a:t>A waterfall.</a:t>
-            </a:r>
-            <a:endParaRPr lang="en-US" sz="1800" dirty="0"/>
+              <a:t>Activity 1: Question 2</a:t>
+            </a:r>
+            <a:endParaRPr lang="en-US" sz="3600" dirty="0"/>
+          </a:p>
+        </p:txBody>
+      </p:sp>
+      <p:sp>
+        <p:nvSpPr>
+          <p:cNvPr id="5" name="Text 2"/>
+          <p:cNvSpPr/>
+          <p:nvPr/>
+        </p:nvSpPr>
+        <p:spPr>
+          <a:xfrm>
+            <a:off x="5349240" y="1783080"/>
+            <a:ext cx="6522415" cy="4663440"/>
+          </a:xfrm>
+          <a:prstGeom prst="rect">
+            <a:avLst/>
+          </a:prstGeom>
+          <a:noFill/>
+          <a:ln/>
+        </p:spPr>
+        <p:txBody>
+          <a:bodyPr wrap="square" lIns="0" tIns="0" rIns="0" bIns="0" rtlCol="0" anchor="t"/>
+          <a:lstStyle/>
+          <a:p>
+            <a:pPr algn="l" indent="0" marL="0">
+              <a:spcAft>
+                <a:spcPts val="800"/>
+              </a:spcAft>
+              <a:buNone/>
+            </a:pPr>
+            <a:r>
+              <a:rPr lang="en-US" sz="4000" dirty="0">
+                <a:solidFill>
+                  <a:srgbClr val="111111"/>
+                </a:solidFill>
+                <a:latin typeface="Times New Roman" pitchFamily="34" charset="0"/>
+                <a:ea typeface="Times New Roman" pitchFamily="34" charset="-122"/>
+                <a:cs typeface="Times New Roman" pitchFamily="34" charset="-120"/>
+              </a:rPr>
+              <a:t>Why does it have this shape?</a:t>
+            </a:r>
+            <a:endParaRPr lang="en-US" sz="4000" dirty="0"/>
           </a:p>
         </p:txBody>
       </p:sp>
@@ -9296,7 +9746,7 @@
                 <a:ea typeface="Calibri" pitchFamily="34" charset="-122"/>
                 <a:cs typeface="Calibri" pitchFamily="34" charset="-120"/>
               </a:rPr>
-              <a:t>2. WATERFALL AND GORGE</a:t>
+              <a:t>2. LANDFORMS OF THE UPPER COURSE</a:t>
             </a:r>
             <a:endParaRPr lang="en-US" sz="1400" dirty="0"/>
           </a:p>
@@ -9361,7 +9811,7 @@
                 <a:ea typeface="Times New Roman" pitchFamily="34" charset="-122"/>
                 <a:cs typeface="Times New Roman" pitchFamily="34" charset="-120"/>
               </a:rPr>
-              <a:t>Activity 2: Question</a:t>
+              <a:t>Activity 1: Answer 2</a:t>
             </a:r>
             <a:endParaRPr lang="en-US" sz="3600" dirty="0"/>
           </a:p>
@@ -9403,7 +9853,7 @@
                 <a:ea typeface="Times New Roman" pitchFamily="34" charset="-122"/>
                 <a:cs typeface="Times New Roman" pitchFamily="34" charset="-120"/>
               </a:rPr>
-              <a:t>Why does a waterfall form?</a:t>
+              <a:t>The river cuts down into its bed.</a:t>
             </a:r>
             <a:endParaRPr lang="en-US" sz="4000" dirty="0"/>
           </a:p>
@@ -9515,15 +9965,54 @@
                 <a:ea typeface="Calibri" pitchFamily="34" charset="-122"/>
                 <a:cs typeface="Calibri" pitchFamily="34" charset="-120"/>
               </a:rPr>
-              <a:t>2. WATERFALL AND GORGE</a:t>
+              <a:t>2. LANDFORMS OF THE UPPER COURSE</a:t>
             </a:r>
             <a:endParaRPr lang="en-US" sz="1400" dirty="0"/>
+          </a:p>
+        </p:txBody>
+      </p:sp>
+      <p:sp>
+        <p:nvSpPr>
+          <p:cNvPr id="3" name="Text 1"/>
+          <p:cNvSpPr/>
+          <p:nvPr/>
+        </p:nvSpPr>
+        <p:spPr>
+          <a:xfrm>
+            <a:off x="457200" y="1005840"/>
+            <a:ext cx="11277295" cy="731520"/>
+          </a:xfrm>
+          <a:prstGeom prst="rect">
+            <a:avLst/>
+          </a:prstGeom>
+          <a:noFill/>
+          <a:ln/>
+        </p:spPr>
+        <p:txBody>
+          <a:bodyPr wrap="square" lIns="0" tIns="0" rIns="0" bIns="0" rtlCol="0" anchor="ctr"/>
+          <a:lstStyle/>
+          <a:p>
+            <a:pPr algn="ctr" indent="0" marL="0">
+              <a:buNone/>
+            </a:pPr>
+            <a:r>
+              <a:rPr lang="en-US" sz="3600" b="1" dirty="0">
+                <a:solidFill>
+                  <a:srgbClr val="990011"/>
+                </a:solidFill>
+                <a:latin typeface="Times New Roman" pitchFamily="34" charset="0"/>
+                <a:ea typeface="Times New Roman" pitchFamily="34" charset="-122"/>
+                <a:cs typeface="Times New Roman" pitchFamily="34" charset="-120"/>
+              </a:rPr>
+              <a:t>Activity 2</a:t>
+            </a:r>
+            <a:endParaRPr lang="en-US" sz="3600" dirty="0"/>
           </a:p>
         </p:txBody>
       </p:sp>
       <p:pic>
         <p:nvPicPr>
-          <p:cNvPr id="3" name="Image 0" descr="/home/claude/f4/img/minesec_sheet.png">    </p:cNvPr>
+          <p:cNvPr id="4" name="Image 0" descr="/home/claude/f4/img/v2/f4_waterfall.jpg">    </p:cNvPr>
           <p:cNvPicPr>
             <a:picLocks noChangeAspect="1"/>
           </p:cNvPicPr>
@@ -9537,8 +10026,8 @@
         </p:blipFill>
         <p:spPr>
           <a:xfrm>
-            <a:off x="0" y="658368"/>
-            <a:ext cx="5120640" cy="5833872"/>
+            <a:off x="2246610" y="1783080"/>
+            <a:ext cx="7698475" cy="4270248"/>
           </a:xfrm>
           <a:prstGeom prst="rect">
             <a:avLst/>
@@ -9547,14 +10036,14 @@
       </p:pic>
       <p:sp>
         <p:nvSpPr>
-          <p:cNvPr id="4" name="Text 1"/>
+          <p:cNvPr id="5" name="Text 2"/>
           <p:cNvSpPr/>
           <p:nvPr/>
         </p:nvSpPr>
         <p:spPr>
           <a:xfrm>
-            <a:off x="5349240" y="1005840"/>
-            <a:ext cx="6522415" cy="731520"/>
+            <a:off x="457200" y="6089904"/>
+            <a:ext cx="11277295" cy="347472"/>
           </a:xfrm>
           <a:prstGeom prst="rect">
             <a:avLst/>
@@ -9563,68 +10052,24 @@
           <a:ln/>
         </p:spPr>
         <p:txBody>
-          <a:bodyPr wrap="square" lIns="0" tIns="0" rIns="0" bIns="0" rtlCol="0" anchor="ctr">
-            <a:normAutofit/>
-          </a:bodyPr>
+          <a:bodyPr wrap="square" lIns="0" tIns="0" rIns="0" bIns="0" rtlCol="0" anchor="ctr"/>
           <a:lstStyle/>
           <a:p>
             <a:pPr algn="ctr" indent="0" marL="0">
               <a:buNone/>
             </a:pPr>
             <a:r>
-              <a:rPr lang="en-US" sz="3600" b="1" dirty="0">
-                <a:solidFill>
-                  <a:srgbClr val="990011"/>
+              <a:rPr lang="en-US" sz="1800" i="1" dirty="0">
+                <a:solidFill>
+                  <a:srgbClr val="555555"/>
                 </a:solidFill>
                 <a:latin typeface="Times New Roman" pitchFamily="34" charset="0"/>
                 <a:ea typeface="Times New Roman" pitchFamily="34" charset="-122"/>
                 <a:cs typeface="Times New Roman" pitchFamily="34" charset="-120"/>
               </a:rPr>
-              <a:t>Activity 2: Answer</a:t>
-            </a:r>
-            <a:endParaRPr lang="en-US" sz="3600" dirty="0"/>
-          </a:p>
-        </p:txBody>
-      </p:sp>
-      <p:sp>
-        <p:nvSpPr>
-          <p:cNvPr id="5" name="Text 2"/>
-          <p:cNvSpPr/>
-          <p:nvPr/>
-        </p:nvSpPr>
-        <p:spPr>
-          <a:xfrm>
-            <a:off x="5349240" y="1783080"/>
-            <a:ext cx="6522415" cy="4663440"/>
-          </a:xfrm>
-          <a:prstGeom prst="rect">
-            <a:avLst/>
-          </a:prstGeom>
-          <a:noFill/>
-          <a:ln/>
-        </p:spPr>
-        <p:txBody>
-          <a:bodyPr wrap="square" lIns="0" tIns="0" rIns="0" bIns="0" rtlCol="0" anchor="t"/>
-          <a:lstStyle/>
-          <a:p>
-            <a:pPr algn="l" indent="0" marL="0">
-              <a:spcAft>
-                <a:spcPts val="800"/>
-              </a:spcAft>
-              <a:buNone/>
-            </a:pPr>
-            <a:r>
-              <a:rPr lang="en-US" sz="4000" dirty="0">
-                <a:solidFill>
-                  <a:srgbClr val="111111"/>
-                </a:solidFill>
-                <a:latin typeface="Times New Roman" pitchFamily="34" charset="0"/>
-                <a:ea typeface="Times New Roman" pitchFamily="34" charset="-122"/>
-                <a:cs typeface="Times New Roman" pitchFamily="34" charset="-120"/>
-              </a:rPr>
-              <a:t>The river flows from hard rock onto soft rock that wears away faster.</a:t>
-            </a:r>
-            <a:endParaRPr lang="en-US" sz="4000" dirty="0"/>
+              <a:t>A waterfall.</a:t>
+            </a:r>
+            <a:endParaRPr lang="en-US" sz="1800" dirty="0"/>
           </a:p>
         </p:txBody>
       </p:sp>
@@ -9734,54 +10179,15 @@
                 <a:ea typeface="Calibri" pitchFamily="34" charset="-122"/>
                 <a:cs typeface="Calibri" pitchFamily="34" charset="-120"/>
               </a:rPr>
-              <a:t>2. WATERFALL AND GORGE</a:t>
+              <a:t>2. LANDFORMS OF THE UPPER COURSE</a:t>
             </a:r>
             <a:endParaRPr lang="en-US" sz="1400" dirty="0"/>
-          </a:p>
-        </p:txBody>
-      </p:sp>
-      <p:sp>
-        <p:nvSpPr>
-          <p:cNvPr id="3" name="Text 1"/>
-          <p:cNvSpPr/>
-          <p:nvPr/>
-        </p:nvSpPr>
-        <p:spPr>
-          <a:xfrm>
-            <a:off x="457200" y="1005840"/>
-            <a:ext cx="11277295" cy="731520"/>
-          </a:xfrm>
-          <a:prstGeom prst="rect">
-            <a:avLst/>
-          </a:prstGeom>
-          <a:noFill/>
-          <a:ln/>
-        </p:spPr>
-        <p:txBody>
-          <a:bodyPr wrap="square" lIns="0" tIns="0" rIns="0" bIns="0" rtlCol="0" anchor="ctr"/>
-          <a:lstStyle/>
-          <a:p>
-            <a:pPr algn="ctr" indent="0" marL="0">
-              <a:buNone/>
-            </a:pPr>
-            <a:r>
-              <a:rPr lang="en-US" sz="3600" b="1" dirty="0">
-                <a:solidFill>
-                  <a:srgbClr val="990011"/>
-                </a:solidFill>
-                <a:latin typeface="Times New Roman" pitchFamily="34" charset="0"/>
-                <a:ea typeface="Times New Roman" pitchFamily="34" charset="-122"/>
-                <a:cs typeface="Times New Roman" pitchFamily="34" charset="-120"/>
-              </a:rPr>
-              <a:t>Activity 3</a:t>
-            </a:r>
-            <a:endParaRPr lang="en-US" sz="3600" dirty="0"/>
           </a:p>
         </p:txBody>
       </p:sp>
       <p:pic>
         <p:nvPicPr>
-          <p:cNvPr id="4" name="Image 0" descr="/home/claude/f4/img/v2/waterfall.gif">    </p:cNvPr>
+          <p:cNvPr id="3" name="Image 0" descr="/home/claude/f4/img/minesec_sheet.png">    </p:cNvPr>
           <p:cNvPicPr>
             <a:picLocks noChangeAspect="1"/>
           </p:cNvPicPr>
@@ -9795,8 +10201,8 @@
         </p:blipFill>
         <p:spPr>
           <a:xfrm>
-            <a:off x="629930" y="1783080"/>
-            <a:ext cx="10931835" cy="4270248"/>
+            <a:off x="0" y="658368"/>
+            <a:ext cx="5120640" cy="5833872"/>
           </a:xfrm>
           <a:prstGeom prst="rect">
             <a:avLst/>
@@ -9805,14 +10211,14 @@
       </p:pic>
       <p:sp>
         <p:nvSpPr>
-          <p:cNvPr id="5" name="Text 2"/>
+          <p:cNvPr id="4" name="Text 1"/>
           <p:cNvSpPr/>
           <p:nvPr/>
         </p:nvSpPr>
         <p:spPr>
           <a:xfrm>
-            <a:off x="457200" y="6089904"/>
-            <a:ext cx="11277295" cy="347472"/>
+            <a:off x="5349240" y="1005840"/>
+            <a:ext cx="6522415" cy="731520"/>
           </a:xfrm>
           <a:prstGeom prst="rect">
             <a:avLst/>
@@ -9821,24 +10227,68 @@
           <a:ln/>
         </p:spPr>
         <p:txBody>
-          <a:bodyPr wrap="square" lIns="0" tIns="0" rIns="0" bIns="0" rtlCol="0" anchor="ctr"/>
+          <a:bodyPr wrap="square" lIns="0" tIns="0" rIns="0" bIns="0" rtlCol="0" anchor="ctr">
+            <a:normAutofit/>
+          </a:bodyPr>
           <a:lstStyle/>
           <a:p>
             <a:pPr algn="ctr" indent="0" marL="0">
               <a:buNone/>
             </a:pPr>
             <a:r>
-              <a:rPr lang="en-US" sz="1800" i="1" dirty="0">
-                <a:solidFill>
-                  <a:srgbClr val="555555"/>
+              <a:rPr lang="en-US" sz="3600" b="1" dirty="0">
+                <a:solidFill>
+                  <a:srgbClr val="990011"/>
                 </a:solidFill>
                 <a:latin typeface="Times New Roman" pitchFamily="34" charset="0"/>
                 <a:ea typeface="Times New Roman" pitchFamily="34" charset="-122"/>
                 <a:cs typeface="Times New Roman" pitchFamily="34" charset="-120"/>
               </a:rPr>
-              <a:t>Animation: a waterfall moves back and makes a gorge.</a:t>
-            </a:r>
-            <a:endParaRPr lang="en-US" sz="1800" dirty="0"/>
+              <a:t>Activity 2: Question</a:t>
+            </a:r>
+            <a:endParaRPr lang="en-US" sz="3600" dirty="0"/>
+          </a:p>
+        </p:txBody>
+      </p:sp>
+      <p:sp>
+        <p:nvSpPr>
+          <p:cNvPr id="5" name="Text 2"/>
+          <p:cNvSpPr/>
+          <p:nvPr/>
+        </p:nvSpPr>
+        <p:spPr>
+          <a:xfrm>
+            <a:off x="5349240" y="1783080"/>
+            <a:ext cx="6522415" cy="4663440"/>
+          </a:xfrm>
+          <a:prstGeom prst="rect">
+            <a:avLst/>
+          </a:prstGeom>
+          <a:noFill/>
+          <a:ln/>
+        </p:spPr>
+        <p:txBody>
+          <a:bodyPr wrap="square" lIns="0" tIns="0" rIns="0" bIns="0" rtlCol="0" anchor="t"/>
+          <a:lstStyle/>
+          <a:p>
+            <a:pPr algn="l" indent="0" marL="0">
+              <a:spcAft>
+                <a:spcPts val="800"/>
+              </a:spcAft>
+              <a:buNone/>
+            </a:pPr>
+            <a:r>
+              <a:rPr lang="en-US" sz="4000" dirty="0">
+                <a:solidFill>
+                  <a:srgbClr val="111111"/>
+                </a:solidFill>
+                <a:latin typeface="Times New Roman" pitchFamily="34" charset="0"/>
+                <a:ea typeface="Times New Roman" pitchFamily="34" charset="-122"/>
+                <a:cs typeface="Times New Roman" pitchFamily="34" charset="-120"/>
+              </a:rPr>
+              <a:t>Why does a waterfall form?</a:t>
+            </a:r>
+            <a:endParaRPr lang="en-US" sz="4000" dirty="0"/>
           </a:p>
         </p:txBody>
       </p:sp>
@@ -9948,7 +10398,7 @@
                 <a:ea typeface="Calibri" pitchFamily="34" charset="-122"/>
                 <a:cs typeface="Calibri" pitchFamily="34" charset="-120"/>
               </a:rPr>
-              <a:t>2. WATERFALL AND GORGE</a:t>
+              <a:t>2. LANDFORMS OF THE UPPER COURSE</a:t>
             </a:r>
             <a:endParaRPr lang="en-US" sz="1400" dirty="0"/>
           </a:p>
@@ -10013,7 +10463,7 @@
                 <a:ea typeface="Times New Roman" pitchFamily="34" charset="-122"/>
                 <a:cs typeface="Times New Roman" pitchFamily="34" charset="-120"/>
               </a:rPr>
-              <a:t>Activity 3: Question</a:t>
+              <a:t>Activity 2: Answer</a:t>
             </a:r>
             <a:endParaRPr lang="en-US" sz="3600" dirty="0"/>
           </a:p>
@@ -10055,7 +10505,7 @@
                 <a:ea typeface="Times New Roman" pitchFamily="34" charset="-122"/>
                 <a:cs typeface="Times New Roman" pitchFamily="34" charset="-120"/>
               </a:rPr>
-              <a:t>What happens to the waterfall over many years?</a:t>
+              <a:t>The river flows from hard rock onto soft rock that is worn away faster.</a:t>
             </a:r>
             <a:endParaRPr lang="en-US" sz="4000" dirty="0"/>
           </a:p>
@@ -10167,15 +10617,54 @@
                 <a:ea typeface="Calibri" pitchFamily="34" charset="-122"/>
                 <a:cs typeface="Calibri" pitchFamily="34" charset="-120"/>
               </a:rPr>
-              <a:t>2. WATERFALL AND GORGE</a:t>
+              <a:t>2. LANDFORMS OF THE UPPER COURSE</a:t>
             </a:r>
             <a:endParaRPr lang="en-US" sz="1400" dirty="0"/>
+          </a:p>
+        </p:txBody>
+      </p:sp>
+      <p:sp>
+        <p:nvSpPr>
+          <p:cNvPr id="3" name="Text 1"/>
+          <p:cNvSpPr/>
+          <p:nvPr/>
+        </p:nvSpPr>
+        <p:spPr>
+          <a:xfrm>
+            <a:off x="457200" y="1005840"/>
+            <a:ext cx="11277295" cy="731520"/>
+          </a:xfrm>
+          <a:prstGeom prst="rect">
+            <a:avLst/>
+          </a:prstGeom>
+          <a:noFill/>
+          <a:ln/>
+        </p:spPr>
+        <p:txBody>
+          <a:bodyPr wrap="square" lIns="0" tIns="0" rIns="0" bIns="0" rtlCol="0" anchor="ctr"/>
+          <a:lstStyle/>
+          <a:p>
+            <a:pPr algn="ctr" indent="0" marL="0">
+              <a:buNone/>
+            </a:pPr>
+            <a:r>
+              <a:rPr lang="en-US" sz="3600" b="1" dirty="0">
+                <a:solidFill>
+                  <a:srgbClr val="990011"/>
+                </a:solidFill>
+                <a:latin typeface="Times New Roman" pitchFamily="34" charset="0"/>
+                <a:ea typeface="Times New Roman" pitchFamily="34" charset="-122"/>
+                <a:cs typeface="Times New Roman" pitchFamily="34" charset="-120"/>
+              </a:rPr>
+              <a:t>Activity 3</a:t>
+            </a:r>
+            <a:endParaRPr lang="en-US" sz="3600" dirty="0"/>
           </a:p>
         </p:txBody>
       </p:sp>
       <p:pic>
         <p:nvPicPr>
-          <p:cNvPr id="3" name="Image 0" descr="/home/claude/f4/img/minesec_sheet.png">    </p:cNvPr>
+          <p:cNvPr id="4" name="Image 0" descr="/home/claude/f4/img/v2/waterfall.gif">    </p:cNvPr>
           <p:cNvPicPr>
             <a:picLocks noChangeAspect="1"/>
           </p:cNvPicPr>
@@ -10189,8 +10678,8 @@
         </p:blipFill>
         <p:spPr>
           <a:xfrm>
-            <a:off x="0" y="658368"/>
-            <a:ext cx="5120640" cy="5833872"/>
+            <a:off x="629930" y="1783080"/>
+            <a:ext cx="10931835" cy="4270248"/>
           </a:xfrm>
           <a:prstGeom prst="rect">
             <a:avLst/>
@@ -10199,14 +10688,14 @@
       </p:pic>
       <p:sp>
         <p:nvSpPr>
-          <p:cNvPr id="4" name="Text 1"/>
+          <p:cNvPr id="5" name="Text 2"/>
           <p:cNvSpPr/>
           <p:nvPr/>
         </p:nvSpPr>
         <p:spPr>
           <a:xfrm>
-            <a:off x="5349240" y="1005840"/>
-            <a:ext cx="6522415" cy="731520"/>
+            <a:off x="457200" y="6089904"/>
+            <a:ext cx="11277295" cy="347472"/>
           </a:xfrm>
           <a:prstGeom prst="rect">
             <a:avLst/>
@@ -10215,68 +10704,24 @@
           <a:ln/>
         </p:spPr>
         <p:txBody>
-          <a:bodyPr wrap="square" lIns="0" tIns="0" rIns="0" bIns="0" rtlCol="0" anchor="ctr">
-            <a:normAutofit/>
-          </a:bodyPr>
+          <a:bodyPr wrap="square" lIns="0" tIns="0" rIns="0" bIns="0" rtlCol="0" anchor="ctr"/>
           <a:lstStyle/>
           <a:p>
             <a:pPr algn="ctr" indent="0" marL="0">
               <a:buNone/>
             </a:pPr>
             <a:r>
-              <a:rPr lang="en-US" sz="3600" b="1" dirty="0">
-                <a:solidFill>
-                  <a:srgbClr val="990011"/>
+              <a:rPr lang="en-US" sz="1800" i="1" dirty="0">
+                <a:solidFill>
+                  <a:srgbClr val="555555"/>
                 </a:solidFill>
                 <a:latin typeface="Times New Roman" pitchFamily="34" charset="0"/>
                 <a:ea typeface="Times New Roman" pitchFamily="34" charset="-122"/>
                 <a:cs typeface="Times New Roman" pitchFamily="34" charset="-120"/>
               </a:rPr>
-              <a:t>Activity 3: Answer</a:t>
-            </a:r>
-            <a:endParaRPr lang="en-US" sz="3600" dirty="0"/>
-          </a:p>
-        </p:txBody>
-      </p:sp>
-      <p:sp>
-        <p:nvSpPr>
-          <p:cNvPr id="5" name="Text 2"/>
-          <p:cNvSpPr/>
-          <p:nvPr/>
-        </p:nvSpPr>
-        <p:spPr>
-          <a:xfrm>
-            <a:off x="5349240" y="1783080"/>
-            <a:ext cx="6522415" cy="4663440"/>
-          </a:xfrm>
-          <a:prstGeom prst="rect">
-            <a:avLst/>
-          </a:prstGeom>
-          <a:noFill/>
-          <a:ln/>
-        </p:spPr>
-        <p:txBody>
-          <a:bodyPr wrap="square" lIns="0" tIns="0" rIns="0" bIns="0" rtlCol="0" anchor="t"/>
-          <a:lstStyle/>
-          <a:p>
-            <a:pPr algn="l" indent="0" marL="0">
-              <a:spcAft>
-                <a:spcPts val="800"/>
-              </a:spcAft>
-              <a:buNone/>
-            </a:pPr>
-            <a:r>
-              <a:rPr lang="en-US" sz="4000" dirty="0">
-                <a:solidFill>
-                  <a:srgbClr val="111111"/>
-                </a:solidFill>
-                <a:latin typeface="Times New Roman" pitchFamily="34" charset="0"/>
-                <a:ea typeface="Times New Roman" pitchFamily="34" charset="-122"/>
-                <a:cs typeface="Times New Roman" pitchFamily="34" charset="-120"/>
-              </a:rPr>
-              <a:t>It moves back and leaves a gorge.</a:t>
-            </a:r>
-            <a:endParaRPr lang="en-US" sz="4000" dirty="0"/>
+              <a:t>Animation: a waterfall moves back.</a:t>
+            </a:r>
+            <a:endParaRPr lang="en-US" sz="1800" dirty="0"/>
           </a:p>
         </p:txBody>
       </p:sp>
@@ -10386,7 +10831,7 @@
                 <a:ea typeface="Calibri" pitchFamily="34" charset="-122"/>
                 <a:cs typeface="Calibri" pitchFamily="34" charset="-120"/>
               </a:rPr>
-              <a:t>BOARD SUMMARY</a:t>
+              <a:t>2. LANDFORMS OF THE UPPER COURSE</a:t>
             </a:r>
             <a:endParaRPr lang="en-US" sz="1400" dirty="0"/>
           </a:p>
@@ -10451,7 +10896,7 @@
                 <a:ea typeface="Times New Roman" pitchFamily="34" charset="-122"/>
                 <a:cs typeface="Times New Roman" pitchFamily="34" charset="-120"/>
               </a:rPr>
-              <a:t>Board Summary</a:t>
+              <a:t>Activity 3: Question</a:t>
             </a:r>
             <a:endParaRPr lang="en-US" sz="3600" dirty="0"/>
           </a:p>
@@ -10485,7 +10930,7 @@
               <a:buNone/>
             </a:pPr>
             <a:r>
-              <a:rPr lang="en-US" sz="4000" b="1" dirty="0">
+              <a:rPr lang="en-US" sz="4000" dirty="0">
                 <a:solidFill>
                   <a:srgbClr val="111111"/>
                 </a:solidFill>
@@ -10493,47 +10938,7 @@
                 <a:ea typeface="Times New Roman" pitchFamily="34" charset="-122"/>
                 <a:cs typeface="Times New Roman" pitchFamily="34" charset="-120"/>
               </a:rPr>
-              <a:t>Topic: Denudation Processes, Landforms and Impacts on Man</a:t>
-            </a:r>
-            <a:endParaRPr lang="en-US" sz="4000" dirty="0"/>
-          </a:p>
-          <a:p>
-            <a:pPr algn="l" indent="0" marL="0">
-              <a:spcAft>
-                <a:spcPts val="800"/>
-              </a:spcAft>
-              <a:buNone/>
-            </a:pPr>
-            <a:r>
-              <a:rPr lang="en-US" sz="4000" b="1" dirty="0">
-                <a:solidFill>
-                  <a:srgbClr val="111111"/>
-                </a:solidFill>
-                <a:latin typeface="Times New Roman" pitchFamily="34" charset="0"/>
-                <a:ea typeface="Times New Roman" pitchFamily="34" charset="-122"/>
-                <a:cs typeface="Times New Roman" pitchFamily="34" charset="-120"/>
-              </a:rPr>
-              <a:t>Sub-topic: The Work of Rivers on the Landscape and Impacts on Man</a:t>
-            </a:r>
-            <a:endParaRPr lang="en-US" sz="4000" dirty="0"/>
-          </a:p>
-          <a:p>
-            <a:pPr algn="l" indent="0" marL="0">
-              <a:spcAft>
-                <a:spcPts val="800"/>
-              </a:spcAft>
-              <a:buNone/>
-            </a:pPr>
-            <a:r>
-              <a:rPr lang="en-US" sz="4000" b="1" dirty="0">
-                <a:solidFill>
-                  <a:srgbClr val="990011"/>
-                </a:solidFill>
-                <a:latin typeface="Times New Roman" pitchFamily="34" charset="0"/>
-                <a:ea typeface="Times New Roman" pitchFamily="34" charset="-122"/>
-                <a:cs typeface="Times New Roman" pitchFamily="34" charset="-120"/>
-              </a:rPr>
-              <a:t>Lesson 19: The Upper Course of a River</a:t>
+              <a:t>What does the waterfall leave behind as it moves back over many years?</a:t>
             </a:r>
             <a:endParaRPr lang="en-US" sz="4000" dirty="0"/>
           </a:p>
@@ -10645,7 +11050,7 @@
                 <a:ea typeface="Calibri" pitchFamily="34" charset="-122"/>
                 <a:cs typeface="Calibri" pitchFamily="34" charset="-120"/>
               </a:rPr>
-              <a:t>BOARD SUMMARY</a:t>
+              <a:t>2. LANDFORMS OF THE UPPER COURSE</a:t>
             </a:r>
             <a:endParaRPr lang="en-US" sz="1400" dirty="0"/>
           </a:p>
@@ -10710,7 +11115,7 @@
                 <a:ea typeface="Times New Roman" pitchFamily="34" charset="-122"/>
                 <a:cs typeface="Times New Roman" pitchFamily="34" charset="-120"/>
               </a:rPr>
-              <a:t>1. Characteristics of the Upper Course</a:t>
+              <a:t>Activity 3: Answer</a:t>
             </a:r>
             <a:endParaRPr lang="en-US" sz="3600" dirty="0"/>
           </a:p>
@@ -10744,7 +11149,7 @@
               <a:buNone/>
             </a:pPr>
             <a:r>
-              <a:rPr lang="en-US" sz="4000" i="1" dirty="0">
+              <a:rPr lang="en-US" sz="4000" dirty="0">
                 <a:solidFill>
                   <a:srgbClr val="111111"/>
                 </a:solidFill>
@@ -10752,81 +11157,7 @@
                 <a:ea typeface="Times New Roman" pitchFamily="34" charset="-122"/>
                 <a:cs typeface="Times New Roman" pitchFamily="34" charset="-120"/>
               </a:rPr>
-              <a:t>The upper course has the following characteristics:</a:t>
-            </a:r>
-            <a:endParaRPr lang="en-US" sz="4000" dirty="0"/>
-          </a:p>
-          <a:p>
-            <a:pPr algn="l" indent="0" marL="0">
-              <a:spcAft>
-                <a:spcPts val="800"/>
-              </a:spcAft>
-              <a:buNone/>
-            </a:pPr>
-            <a:r>
-              <a:rPr lang="en-US" sz="4000" b="1" dirty="0">
-                <a:solidFill>
-                  <a:srgbClr val="111111"/>
-                </a:solidFill>
-                <a:latin typeface="Times New Roman" pitchFamily="34" charset="0"/>
-                <a:ea typeface="Times New Roman" pitchFamily="34" charset="-122"/>
-                <a:cs typeface="Times New Roman" pitchFamily="34" charset="-120"/>
-              </a:rPr>
-              <a:t>Slope: </a:t>
-            </a:r>
-            <a:pPr algn="l" indent="0" marL="0">
-              <a:spcAft>
-                <a:spcPts val="800"/>
-              </a:spcAft>
-              <a:buNone/>
-            </a:pPr>
-            <a:r>
-              <a:rPr lang="en-US" sz="4000" dirty="0">
-                <a:solidFill>
-                  <a:srgbClr val="111111"/>
-                </a:solidFill>
-                <a:latin typeface="Times New Roman" pitchFamily="34" charset="0"/>
-                <a:ea typeface="Times New Roman" pitchFamily="34" charset="-122"/>
-                <a:cs typeface="Times New Roman" pitchFamily="34" charset="-120"/>
-              </a:rPr>
-              <a:t>The slope is steep because the river is near its source in the highlands.</a:t>
-            </a:r>
-            <a:endParaRPr lang="en-US" sz="4000" dirty="0"/>
-          </a:p>
-          <a:p>
-            <a:pPr algn="l" indent="0" marL="0">
-              <a:spcAft>
-                <a:spcPts val="800"/>
-              </a:spcAft>
-              <a:buNone/>
-            </a:pPr>
-            <a:r>
-              <a:rPr lang="en-US" sz="4000" b="1" dirty="0">
-                <a:solidFill>
-                  <a:srgbClr val="111111"/>
-                </a:solidFill>
-                <a:latin typeface="Times New Roman" pitchFamily="34" charset="0"/>
-                <a:ea typeface="Times New Roman" pitchFamily="34" charset="-122"/>
-                <a:cs typeface="Times New Roman" pitchFamily="34" charset="-120"/>
-              </a:rPr>
-              <a:t>Water: </a:t>
-            </a:r>
-            <a:pPr algn="l" indent="0" marL="0">
-              <a:spcAft>
-                <a:spcPts val="800"/>
-              </a:spcAft>
-              <a:buNone/>
-            </a:pPr>
-            <a:r>
-              <a:rPr lang="en-US" sz="4000" dirty="0">
-                <a:solidFill>
-                  <a:srgbClr val="111111"/>
-                </a:solidFill>
-                <a:latin typeface="Times New Roman" pitchFamily="34" charset="0"/>
-                <a:ea typeface="Times New Roman" pitchFamily="34" charset="-122"/>
-                <a:cs typeface="Times New Roman" pitchFamily="34" charset="-120"/>
-              </a:rPr>
-              <a:t>The water flows fast and is noisy.</a:t>
+              <a:t>A gorge.</a:t>
             </a:r>
             <a:endParaRPr lang="en-US" sz="4000" dirty="0"/>
           </a:p>
@@ -12012,7 +12343,7 @@
                 <a:ea typeface="Times New Roman" pitchFamily="34" charset="-122"/>
                 <a:cs typeface="Times New Roman" pitchFamily="34" charset="-120"/>
               </a:rPr>
-              <a:t>1. Characteristics of the Upper Course (continued)</a:t>
+              <a:t>Board Summary</a:t>
             </a:r>
             <a:endParaRPr lang="en-US" sz="3600" dirty="0"/>
           </a:p>
@@ -12054,8 +12385,11 @@
                 <a:ea typeface="Times New Roman" pitchFamily="34" charset="-122"/>
                 <a:cs typeface="Times New Roman" pitchFamily="34" charset="-120"/>
               </a:rPr>
-              <a:t>Main process: </a:t>
-            </a:r>
+              <a:t>Topic: Denudation Processes, Landforms and Impacts on Man</a:t>
+            </a:r>
+            <a:endParaRPr lang="en-US" sz="4000" dirty="0"/>
+          </a:p>
+          <a:p>
             <a:pPr algn="l" indent="0" marL="0">
               <a:spcAft>
                 <a:spcPts val="800"/>
@@ -12063,7 +12397,7 @@
               <a:buNone/>
             </a:pPr>
             <a:r>
-              <a:rPr lang="en-US" sz="4000" dirty="0">
+              <a:rPr lang="en-US" sz="4000" b="1" dirty="0">
                 <a:solidFill>
                   <a:srgbClr val="111111"/>
                 </a:solidFill>
@@ -12071,7 +12405,27 @@
                 <a:ea typeface="Times New Roman" pitchFamily="34" charset="-122"/>
                 <a:cs typeface="Times New Roman" pitchFamily="34" charset="-120"/>
               </a:rPr>
-              <a:t>The river cuts down into its bed by vertical erosion.</a:t>
+              <a:t>Sub-topic: The Work of Rivers on the Landscape and Impacts on Man</a:t>
+            </a:r>
+            <a:endParaRPr lang="en-US" sz="4000" dirty="0"/>
+          </a:p>
+          <a:p>
+            <a:pPr algn="l" indent="0" marL="0">
+              <a:spcAft>
+                <a:spcPts val="800"/>
+              </a:spcAft>
+              <a:buNone/>
+            </a:pPr>
+            <a:r>
+              <a:rPr lang="en-US" sz="4000" b="1" dirty="0">
+                <a:solidFill>
+                  <a:srgbClr val="990011"/>
+                </a:solidFill>
+                <a:latin typeface="Times New Roman" pitchFamily="34" charset="0"/>
+                <a:ea typeface="Times New Roman" pitchFamily="34" charset="-122"/>
+                <a:cs typeface="Times New Roman" pitchFamily="34" charset="-120"/>
+              </a:rPr>
+              <a:t>Lesson 19: The Upper Course of a River</a:t>
             </a:r>
             <a:endParaRPr lang="en-US" sz="4000" dirty="0"/>
           </a:p>
@@ -12206,7 +12560,7 @@
         <p:spPr>
           <a:xfrm>
             <a:off x="0" y="658368"/>
-            <a:ext cx="3840480" cy="5833872"/>
+            <a:ext cx="2468880" cy="5833872"/>
           </a:xfrm>
           <a:prstGeom prst="rect">
             <a:avLst/>
@@ -12221,8 +12575,8 @@
         </p:nvSpPr>
         <p:spPr>
           <a:xfrm>
-            <a:off x="4069080" y="1005840"/>
-            <a:ext cx="7802575" cy="731520"/>
+            <a:off x="2697480" y="1005840"/>
+            <a:ext cx="9174175" cy="731520"/>
           </a:xfrm>
           <a:prstGeom prst="rect">
             <a:avLst/>
@@ -12248,7 +12602,7 @@
                 <a:ea typeface="Times New Roman" pitchFamily="34" charset="-122"/>
                 <a:cs typeface="Times New Roman" pitchFamily="34" charset="-120"/>
               </a:rPr>
-              <a:t>2. Landforms of the Upper Course</a:t>
+              <a:t>DEFINITIONS</a:t>
             </a:r>
             <a:endParaRPr lang="en-US" sz="3600" dirty="0"/>
           </a:p>
@@ -12262,8 +12616,8 @@
         </p:nvSpPr>
         <p:spPr>
           <a:xfrm>
-            <a:off x="4069080" y="1783080"/>
-            <a:ext cx="7802575" cy="4663440"/>
+            <a:off x="2697480" y="1783080"/>
+            <a:ext cx="9174175" cy="4663440"/>
           </a:xfrm>
           <a:prstGeom prst="rect">
             <a:avLst/>
@@ -12290,7 +12644,7 @@
                 <a:ea typeface="Times New Roman" pitchFamily="34" charset="-122"/>
                 <a:cs typeface="Times New Roman" pitchFamily="34" charset="-120"/>
               </a:rPr>
-              <a:t>The upper course has the following landforms:</a:t>
+              <a:t>The key terms of this lesson are defined as follows:</a:t>
             </a:r>
             <a:endParaRPr lang="en-US" sz="4000" dirty="0"/>
           </a:p>
@@ -12310,7 +12664,7 @@
                 <a:ea typeface="Times New Roman" pitchFamily="34" charset="-122"/>
                 <a:cs typeface="Times New Roman" pitchFamily="34" charset="-120"/>
               </a:rPr>
-              <a:t>V-shaped valley: </a:t>
+              <a:t>Upper course: </a:t>
             </a:r>
             <a:pPr algn="l" indent="0" marL="0">
               <a:spcAft>
@@ -12327,7 +12681,7 @@
                 <a:ea typeface="Times New Roman" pitchFamily="34" charset="-122"/>
                 <a:cs typeface="Times New Roman" pitchFamily="34" charset="-120"/>
               </a:rPr>
-              <a:t>It is a narrow valley with steep sides.</a:t>
+              <a:t>It is the part of a river near its source, in the highlands.</a:t>
             </a:r>
             <a:endParaRPr lang="en-US" sz="4000" dirty="0"/>
           </a:p>
@@ -12347,7 +12701,7 @@
                 <a:ea typeface="Times New Roman" pitchFamily="34" charset="-122"/>
                 <a:cs typeface="Times New Roman" pitchFamily="34" charset="-120"/>
               </a:rPr>
-              <a:t>Interlocking spurs: </a:t>
+              <a:t>Vertical erosion: </a:t>
             </a:r>
             <a:pPr algn="l" indent="0" marL="0">
               <a:spcAft>
@@ -12364,7 +12718,7 @@
                 <a:ea typeface="Times New Roman" pitchFamily="34" charset="-122"/>
                 <a:cs typeface="Times New Roman" pitchFamily="34" charset="-120"/>
               </a:rPr>
-              <a:t>They are hills around which the river winds.</a:t>
+              <a:t>It is the downward cutting of a river into its bed.</a:t>
             </a:r>
             <a:endParaRPr lang="en-US" sz="4000" dirty="0"/>
           </a:p>
@@ -12541,7 +12895,7 @@
                 <a:ea typeface="Times New Roman" pitchFamily="34" charset="-122"/>
                 <a:cs typeface="Times New Roman" pitchFamily="34" charset="-120"/>
               </a:rPr>
-              <a:t>2. Landforms of the Upper Course (continued)</a:t>
+              <a:t>1. Main Characteristics and Processes of the Upper Course</a:t>
             </a:r>
             <a:endParaRPr lang="en-US" sz="3600" dirty="0"/>
           </a:p>
@@ -12575,7 +12929,7 @@
               <a:buNone/>
             </a:pPr>
             <a:r>
-              <a:rPr lang="en-US" sz="4000" b="1" dirty="0">
+              <a:rPr lang="en-US" sz="4000" i="1" dirty="0">
                 <a:solidFill>
                   <a:srgbClr val="111111"/>
                 </a:solidFill>
@@ -12583,8 +12937,11 @@
                 <a:ea typeface="Times New Roman" pitchFamily="34" charset="-122"/>
                 <a:cs typeface="Times New Roman" pitchFamily="34" charset="-120"/>
               </a:rPr>
-              <a:t>Waterfall: </a:t>
-            </a:r>
+              <a:t>The upper course has the following characteristics and processes:</a:t>
+            </a:r>
+            <a:endParaRPr lang="en-US" sz="4000" dirty="0"/>
+          </a:p>
+          <a:p>
             <a:pPr algn="l" indent="0" marL="0">
               <a:spcAft>
                 <a:spcPts val="800"/>
@@ -12592,7 +12949,7 @@
               <a:buNone/>
             </a:pPr>
             <a:r>
-              <a:rPr lang="en-US" sz="4000" dirty="0">
+              <a:rPr lang="en-US" sz="4000" b="1" dirty="0">
                 <a:solidFill>
                   <a:srgbClr val="111111"/>
                 </a:solidFill>
@@ -12600,11 +12957,8 @@
                 <a:ea typeface="Times New Roman" pitchFamily="34" charset="-122"/>
                 <a:cs typeface="Times New Roman" pitchFamily="34" charset="-120"/>
               </a:rPr>
-              <a:t>It forms where a river falls over a band of hard rock lying on soft rock.</a:t>
-            </a:r>
-            <a:endParaRPr lang="en-US" sz="4000" dirty="0"/>
-          </a:p>
-          <a:p>
+              <a:t>Steep slope: </a:t>
+            </a:r>
             <a:pPr algn="l" indent="0" marL="0">
               <a:spcAft>
                 <a:spcPts val="800"/>
@@ -12612,7 +12966,7 @@
               <a:buNone/>
             </a:pPr>
             <a:r>
-              <a:rPr lang="en-US" sz="4000" b="1" dirty="0">
+              <a:rPr lang="en-US" sz="4000" dirty="0">
                 <a:solidFill>
                   <a:srgbClr val="111111"/>
                 </a:solidFill>
@@ -12620,8 +12974,11 @@
                 <a:ea typeface="Times New Roman" pitchFamily="34" charset="-122"/>
                 <a:cs typeface="Times New Roman" pitchFamily="34" charset="-120"/>
               </a:rPr>
-              <a:t>Gorge: </a:t>
-            </a:r>
+              <a:t>The river is near its source in the highlands, so its slope is steep.</a:t>
+            </a:r>
+            <a:endParaRPr lang="en-US" sz="4000" dirty="0"/>
+          </a:p>
+          <a:p>
             <a:pPr algn="l" indent="0" marL="0">
               <a:spcAft>
                 <a:spcPts val="800"/>
@@ -12629,7 +12986,7 @@
               <a:buNone/>
             </a:pPr>
             <a:r>
-              <a:rPr lang="en-US" sz="4000" dirty="0">
+              <a:rPr lang="en-US" sz="4000" b="1" dirty="0">
                 <a:solidFill>
                   <a:srgbClr val="111111"/>
                 </a:solidFill>
@@ -12637,11 +12994,8 @@
                 <a:ea typeface="Times New Roman" pitchFamily="34" charset="-122"/>
                 <a:cs typeface="Times New Roman" pitchFamily="34" charset="-120"/>
               </a:rPr>
-              <a:t>It is a deep, narrow valley formed as a waterfall moves back.</a:t>
-            </a:r>
-            <a:endParaRPr lang="en-US" sz="4000" dirty="0"/>
-          </a:p>
-          <a:p>
+              <a:t>Fast water: </a:t>
+            </a:r>
             <a:pPr algn="l" indent="0" marL="0">
               <a:spcAft>
                 <a:spcPts val="800"/>
@@ -12649,7 +13003,7 @@
               <a:buNone/>
             </a:pPr>
             <a:r>
-              <a:rPr lang="en-US" sz="4000" b="1" dirty="0">
+              <a:rPr lang="en-US" sz="4000" dirty="0">
                 <a:solidFill>
                   <a:srgbClr val="111111"/>
                 </a:solidFill>
@@ -12657,24 +13011,7 @@
                 <a:ea typeface="Times New Roman" pitchFamily="34" charset="-122"/>
                 <a:cs typeface="Times New Roman" pitchFamily="34" charset="-120"/>
               </a:rPr>
-              <a:t>Rapids and potholes: </a:t>
-            </a:r>
-            <a:pPr algn="l" indent="0" marL="0">
-              <a:spcAft>
-                <a:spcPts val="800"/>
-              </a:spcAft>
-              <a:buNone/>
-            </a:pPr>
-            <a:r>
-              <a:rPr lang="en-US" sz="4000" dirty="0">
-                <a:solidFill>
-                  <a:srgbClr val="111111"/>
-                </a:solidFill>
-                <a:latin typeface="Times New Roman" pitchFamily="34" charset="0"/>
-                <a:ea typeface="Times New Roman" pitchFamily="34" charset="-122"/>
-                <a:cs typeface="Times New Roman" pitchFamily="34" charset="-120"/>
-              </a:rPr>
-              <a:t>They form where fast water flows over and swirls on rocks.</a:t>
+              <a:t>The water flows fast and is noisy, but the channel is narrow and shallow.</a:t>
             </a:r>
             <a:endParaRPr lang="en-US" sz="4000" dirty="0"/>
           </a:p>
@@ -12792,48 +13129,9 @@
           </a:p>
         </p:txBody>
       </p:sp>
-      <p:sp>
-        <p:nvSpPr>
-          <p:cNvPr id="3" name="Text 1"/>
-          <p:cNvSpPr/>
-          <p:nvPr/>
-        </p:nvSpPr>
-        <p:spPr>
-          <a:xfrm>
-            <a:off x="457200" y="1005840"/>
-            <a:ext cx="11277295" cy="731520"/>
-          </a:xfrm>
-          <a:prstGeom prst="rect">
-            <a:avLst/>
-          </a:prstGeom>
-          <a:noFill/>
-          <a:ln/>
-        </p:spPr>
-        <p:txBody>
-          <a:bodyPr wrap="square" lIns="0" tIns="0" rIns="0" bIns="0" rtlCol="0" anchor="ctr"/>
-          <a:lstStyle/>
-          <a:p>
-            <a:pPr algn="ctr" indent="0" marL="0">
-              <a:buNone/>
-            </a:pPr>
-            <a:r>
-              <a:rPr lang="en-US" sz="3600" b="1" dirty="0">
-                <a:solidFill>
-                  <a:srgbClr val="990011"/>
-                </a:solidFill>
-                <a:latin typeface="Times New Roman" pitchFamily="34" charset="0"/>
-                <a:ea typeface="Times New Roman" pitchFamily="34" charset="-122"/>
-                <a:cs typeface="Times New Roman" pitchFamily="34" charset="-120"/>
-              </a:rPr>
-              <a:t>2. Landforms of the Upper Course</a:t>
-            </a:r>
-            <a:endParaRPr lang="en-US" sz="3600" dirty="0"/>
-          </a:p>
-        </p:txBody>
-      </p:sp>
       <p:pic>
         <p:nvPicPr>
-          <p:cNvPr id="4" name="Image 0" descr="/home/claude/f4/img/v2/waterfall_last.png">    </p:cNvPr>
+          <p:cNvPr id="3" name="Image 0" descr="/home/claude/f4/img/minesec_sheet.png">    </p:cNvPr>
           <p:cNvPicPr>
             <a:picLocks noChangeAspect="1"/>
           </p:cNvPicPr>
@@ -12847,8 +13145,8 @@
         </p:blipFill>
         <p:spPr>
           <a:xfrm>
-            <a:off x="629930" y="1783080"/>
-            <a:ext cx="10931835" cy="4270248"/>
+            <a:off x="0" y="658368"/>
+            <a:ext cx="5120640" cy="5833872"/>
           </a:xfrm>
           <a:prstGeom prst="rect">
             <a:avLst/>
@@ -12857,14 +13155,14 @@
       </p:pic>
       <p:sp>
         <p:nvSpPr>
-          <p:cNvPr id="5" name="Text 2"/>
+          <p:cNvPr id="4" name="Text 1"/>
           <p:cNvSpPr/>
           <p:nvPr/>
         </p:nvSpPr>
         <p:spPr>
           <a:xfrm>
-            <a:off x="457200" y="6089904"/>
-            <a:ext cx="11277295" cy="347472"/>
+            <a:off x="5349240" y="1005840"/>
+            <a:ext cx="6522415" cy="731520"/>
           </a:xfrm>
           <a:prstGeom prst="rect">
             <a:avLst/>
@@ -12873,24 +13171,122 @@
           <a:ln/>
         </p:spPr>
         <p:txBody>
-          <a:bodyPr wrap="square" lIns="0" tIns="0" rIns="0" bIns="0" rtlCol="0" anchor="ctr"/>
+          <a:bodyPr wrap="square" lIns="0" tIns="0" rIns="0" bIns="0" rtlCol="0" anchor="ctr">
+            <a:normAutofit/>
+          </a:bodyPr>
           <a:lstStyle/>
           <a:p>
             <a:pPr algn="ctr" indent="0" marL="0">
               <a:buNone/>
             </a:pPr>
             <a:r>
-              <a:rPr lang="en-US" sz="1800" i="1" dirty="0">
-                <a:solidFill>
-                  <a:srgbClr val="555555"/>
+              <a:rPr lang="en-US" sz="3600" b="1" dirty="0">
+                <a:solidFill>
+                  <a:srgbClr val="990011"/>
                 </a:solidFill>
                 <a:latin typeface="Times New Roman" pitchFamily="34" charset="0"/>
                 <a:ea typeface="Times New Roman" pitchFamily="34" charset="-122"/>
                 <a:cs typeface="Times New Roman" pitchFamily="34" charset="-120"/>
               </a:rPr>
-              <a:t>Illustration: formation of a waterfall</a:t>
-            </a:r>
-            <a:endParaRPr lang="en-US" sz="1800" dirty="0"/>
+              <a:t>1. Main Characteristics and Processes of the Upper Course (continued)</a:t>
+            </a:r>
+            <a:endParaRPr lang="en-US" sz="3600" dirty="0"/>
+          </a:p>
+        </p:txBody>
+      </p:sp>
+      <p:sp>
+        <p:nvSpPr>
+          <p:cNvPr id="5" name="Text 2"/>
+          <p:cNvSpPr/>
+          <p:nvPr/>
+        </p:nvSpPr>
+        <p:spPr>
+          <a:xfrm>
+            <a:off x="5349240" y="1783080"/>
+            <a:ext cx="6522415" cy="4663440"/>
+          </a:xfrm>
+          <a:prstGeom prst="rect">
+            <a:avLst/>
+          </a:prstGeom>
+          <a:noFill/>
+          <a:ln/>
+        </p:spPr>
+        <p:txBody>
+          <a:bodyPr wrap="square" lIns="0" tIns="0" rIns="0" bIns="0" rtlCol="0" anchor="t"/>
+          <a:lstStyle/>
+          <a:p>
+            <a:pPr algn="l" indent="0" marL="0">
+              <a:spcAft>
+                <a:spcPts val="800"/>
+              </a:spcAft>
+              <a:buNone/>
+            </a:pPr>
+            <a:r>
+              <a:rPr lang="en-US" sz="4000" b="1" dirty="0">
+                <a:solidFill>
+                  <a:srgbClr val="111111"/>
+                </a:solidFill>
+                <a:latin typeface="Times New Roman" pitchFamily="34" charset="0"/>
+                <a:ea typeface="Times New Roman" pitchFamily="34" charset="-122"/>
+                <a:cs typeface="Times New Roman" pitchFamily="34" charset="-120"/>
+              </a:rPr>
+              <a:t>Big load: </a:t>
+            </a:r>
+            <a:pPr algn="l" indent="0" marL="0">
+              <a:spcAft>
+                <a:spcPts val="800"/>
+              </a:spcAft>
+              <a:buNone/>
+            </a:pPr>
+            <a:r>
+              <a:rPr lang="en-US" sz="4000" dirty="0">
+                <a:solidFill>
+                  <a:srgbClr val="111111"/>
+                </a:solidFill>
+                <a:latin typeface="Times New Roman" pitchFamily="34" charset="0"/>
+                <a:ea typeface="Times New Roman" pitchFamily="34" charset="-122"/>
+                <a:cs typeface="Times New Roman" pitchFamily="34" charset="-120"/>
+              </a:rPr>
+              <a:t>The river carries large stones and boulders, mainly rolled along its bed.</a:t>
+            </a:r>
+            <a:endParaRPr lang="en-US" sz="4000" dirty="0"/>
+          </a:p>
+          <a:p>
+            <a:pPr algn="l" indent="0" marL="0">
+              <a:spcAft>
+                <a:spcPts val="800"/>
+              </a:spcAft>
+              <a:buNone/>
+            </a:pPr>
+            <a:r>
+              <a:rPr lang="en-US" sz="4000" b="1" dirty="0">
+                <a:solidFill>
+                  <a:srgbClr val="111111"/>
+                </a:solidFill>
+                <a:latin typeface="Times New Roman" pitchFamily="34" charset="0"/>
+                <a:ea typeface="Times New Roman" pitchFamily="34" charset="-122"/>
+                <a:cs typeface="Times New Roman" pitchFamily="34" charset="-120"/>
+              </a:rPr>
+              <a:t>Vertical erosion: </a:t>
+            </a:r>
+            <a:pPr algn="l" indent="0" marL="0">
+              <a:spcAft>
+                <a:spcPts val="800"/>
+              </a:spcAft>
+              <a:buNone/>
+            </a:pPr>
+            <a:r>
+              <a:rPr lang="en-US" sz="4000" dirty="0">
+                <a:solidFill>
+                  <a:srgbClr val="111111"/>
+                </a:solidFill>
+                <a:latin typeface="Times New Roman" pitchFamily="34" charset="0"/>
+                <a:ea typeface="Times New Roman" pitchFamily="34" charset="-122"/>
+                <a:cs typeface="Times New Roman" pitchFamily="34" charset="-120"/>
+              </a:rPr>
+              <a:t>The river cuts down into its bed by hydraulic action and abrasion.</a:t>
+            </a:r>
+            <a:endParaRPr lang="en-US" sz="4000" dirty="0"/>
           </a:p>
         </p:txBody>
       </p:sp>
@@ -13000,15 +13396,135 @@
                 <a:ea typeface="Calibri" pitchFamily="34" charset="-122"/>
                 <a:cs typeface="Calibri" pitchFamily="34" charset="-120"/>
               </a:rPr>
-              <a:t>FORMATIVE EVALUATION</a:t>
+              <a:t>BOARD SUMMARY</a:t>
             </a:r>
             <a:endParaRPr lang="en-US" sz="1400" dirty="0"/>
+          </a:p>
+        </p:txBody>
+      </p:sp>
+      <p:sp>
+        <p:nvSpPr>
+          <p:cNvPr id="3" name="Text 1"/>
+          <p:cNvSpPr/>
+          <p:nvPr/>
+        </p:nvSpPr>
+        <p:spPr>
+          <a:xfrm>
+            <a:off x="365760" y="1005840"/>
+            <a:ext cx="11460175" cy="731520"/>
+          </a:xfrm>
+          <a:prstGeom prst="rect">
+            <a:avLst/>
+          </a:prstGeom>
+          <a:noFill/>
+          <a:ln/>
+        </p:spPr>
+        <p:txBody>
+          <a:bodyPr wrap="square" lIns="0" tIns="0" rIns="0" bIns="0" rtlCol="0" anchor="ctr">
+            <a:normAutofit/>
+          </a:bodyPr>
+          <a:lstStyle/>
+          <a:p>
+            <a:pPr algn="ctr" indent="0" marL="0">
+              <a:buNone/>
+            </a:pPr>
+            <a:r>
+              <a:rPr lang="en-US" sz="3600" b="1" dirty="0">
+                <a:solidFill>
+                  <a:srgbClr val="990011"/>
+                </a:solidFill>
+                <a:latin typeface="Times New Roman" pitchFamily="34" charset="0"/>
+                <a:ea typeface="Times New Roman" pitchFamily="34" charset="-122"/>
+                <a:cs typeface="Times New Roman" pitchFamily="34" charset="-120"/>
+              </a:rPr>
+              <a:t>2. Landforms of the Upper Course</a:t>
+            </a:r>
+            <a:endParaRPr lang="en-US" sz="3600" dirty="0"/>
+          </a:p>
+        </p:txBody>
+      </p:sp>
+      <p:sp>
+        <p:nvSpPr>
+          <p:cNvPr id="4" name="Text 2"/>
+          <p:cNvSpPr/>
+          <p:nvPr/>
+        </p:nvSpPr>
+        <p:spPr>
+          <a:xfrm>
+            <a:off x="365760" y="1783080"/>
+            <a:ext cx="4846320" cy="4617720"/>
+          </a:xfrm>
+          <a:prstGeom prst="rect">
+            <a:avLst/>
+          </a:prstGeom>
+          <a:noFill/>
+          <a:ln/>
+        </p:spPr>
+        <p:txBody>
+          <a:bodyPr wrap="square" lIns="0" tIns="0" rIns="0" bIns="0" rtlCol="0" anchor="t"/>
+          <a:lstStyle/>
+          <a:p>
+            <a:pPr algn="l" indent="0" marL="0">
+              <a:spcAft>
+                <a:spcPts val="800"/>
+              </a:spcAft>
+              <a:buNone/>
+            </a:pPr>
+            <a:r>
+              <a:rPr lang="en-US" sz="3400" i="1" dirty="0">
+                <a:solidFill>
+                  <a:srgbClr val="111111"/>
+                </a:solidFill>
+                <a:latin typeface="Times New Roman" pitchFamily="34" charset="0"/>
+                <a:ea typeface="Times New Roman" pitchFamily="34" charset="-122"/>
+                <a:cs typeface="Times New Roman" pitchFamily="34" charset="-120"/>
+              </a:rPr>
+              <a:t>The upper course has the following landforms:</a:t>
+            </a:r>
+            <a:endParaRPr lang="en-US" sz="3400" dirty="0"/>
+          </a:p>
+          <a:p>
+            <a:pPr algn="l" indent="0" marL="0">
+              <a:spcAft>
+                <a:spcPts val="800"/>
+              </a:spcAft>
+              <a:buNone/>
+            </a:pPr>
+            <a:r>
+              <a:rPr lang="en-US" sz="3400" b="1" dirty="0">
+                <a:solidFill>
+                  <a:srgbClr val="111111"/>
+                </a:solidFill>
+                <a:latin typeface="Times New Roman" pitchFamily="34" charset="0"/>
+                <a:ea typeface="Times New Roman" pitchFamily="34" charset="-122"/>
+                <a:cs typeface="Times New Roman" pitchFamily="34" charset="-120"/>
+              </a:rPr>
+              <a:t>V-shaped valley: </a:t>
+            </a:r>
+            <a:pPr algn="l" indent="0" marL="0">
+              <a:spcAft>
+                <a:spcPts val="800"/>
+              </a:spcAft>
+              <a:buNone/>
+            </a:pPr>
+            <a:r>
+              <a:rPr lang="en-US" sz="3400" dirty="0">
+                <a:solidFill>
+                  <a:srgbClr val="111111"/>
+                </a:solidFill>
+                <a:latin typeface="Times New Roman" pitchFamily="34" charset="0"/>
+                <a:ea typeface="Times New Roman" pitchFamily="34" charset="-122"/>
+                <a:cs typeface="Times New Roman" pitchFamily="34" charset="-120"/>
+              </a:rPr>
+              <a:t>The river cuts down while weathering wears back the sides, giving a narrow, steep-sided valley.</a:t>
+            </a:r>
+            <a:endParaRPr lang="en-US" sz="3400" dirty="0"/>
           </a:p>
         </p:txBody>
       </p:sp>
       <p:pic>
         <p:nvPicPr>
-          <p:cNvPr id="3" name="Image 0" descr="/home/claude/f4/img/minesec_sheet.png">    </p:cNvPr>
+          <p:cNvPr id="5" name="Image 0" descr="/home/claude/f4/img/v2/vvalley_big.png">    </p:cNvPr>
           <p:cNvPicPr>
             <a:picLocks noChangeAspect="1"/>
           </p:cNvPicPr>
@@ -13022,8 +13538,8 @@
         </p:blipFill>
         <p:spPr>
           <a:xfrm>
-            <a:off x="0" y="658368"/>
-            <a:ext cx="5120640" cy="5833872"/>
+            <a:off x="5349240" y="2617506"/>
+            <a:ext cx="6659575" cy="2601397"/>
           </a:xfrm>
           <a:prstGeom prst="rect">
             <a:avLst/>
@@ -13032,14 +13548,14 @@
       </p:pic>
       <p:sp>
         <p:nvSpPr>
-          <p:cNvPr id="4" name="Text 1"/>
+          <p:cNvPr id="6" name="Text 3"/>
           <p:cNvSpPr/>
           <p:nvPr/>
         </p:nvSpPr>
         <p:spPr>
           <a:xfrm>
-            <a:off x="5349240" y="1005840"/>
-            <a:ext cx="6522415" cy="731520"/>
+            <a:off x="5349240" y="6089904"/>
+            <a:ext cx="6659575" cy="347472"/>
           </a:xfrm>
           <a:prstGeom prst="rect">
             <a:avLst/>
@@ -13048,68 +13564,24 @@
           <a:ln/>
         </p:spPr>
         <p:txBody>
-          <a:bodyPr wrap="square" lIns="0" tIns="0" rIns="0" bIns="0" rtlCol="0" anchor="ctr">
-            <a:normAutofit/>
-          </a:bodyPr>
+          <a:bodyPr wrap="square" lIns="0" tIns="0" rIns="0" bIns="0" rtlCol="0" anchor="ctr"/>
           <a:lstStyle/>
           <a:p>
             <a:pPr algn="ctr" indent="0" marL="0">
               <a:buNone/>
             </a:pPr>
             <a:r>
-              <a:rPr lang="en-US" sz="3600" b="1" dirty="0">
-                <a:solidFill>
-                  <a:srgbClr val="990011"/>
+              <a:rPr lang="en-US" sz="1600" i="1" dirty="0">
+                <a:solidFill>
+                  <a:srgbClr val="555555"/>
                 </a:solidFill>
                 <a:latin typeface="Times New Roman" pitchFamily="34" charset="0"/>
                 <a:ea typeface="Times New Roman" pitchFamily="34" charset="-122"/>
                 <a:cs typeface="Times New Roman" pitchFamily="34" charset="-120"/>
               </a:rPr>
-              <a:t>Evaluation 1</a:t>
-            </a:r>
-            <a:endParaRPr lang="en-US" sz="3600" dirty="0"/>
-          </a:p>
-        </p:txBody>
-      </p:sp>
-      <p:sp>
-        <p:nvSpPr>
-          <p:cNvPr id="5" name="Text 2"/>
-          <p:cNvSpPr/>
-          <p:nvPr/>
-        </p:nvSpPr>
-        <p:spPr>
-          <a:xfrm>
-            <a:off x="5349240" y="1783080"/>
-            <a:ext cx="6522415" cy="4663440"/>
-          </a:xfrm>
-          <a:prstGeom prst="rect">
-            <a:avLst/>
-          </a:prstGeom>
-          <a:noFill/>
-          <a:ln/>
-        </p:spPr>
-        <p:txBody>
-          <a:bodyPr wrap="square" lIns="0" tIns="0" rIns="0" bIns="0" rtlCol="0" anchor="t"/>
-          <a:lstStyle/>
-          <a:p>
-            <a:pPr algn="l" indent="0" marL="0">
-              <a:spcAft>
-                <a:spcPts val="800"/>
-              </a:spcAft>
-              <a:buNone/>
-            </a:pPr>
-            <a:r>
-              <a:rPr lang="en-US" sz="4000" dirty="0">
-                <a:solidFill>
-                  <a:srgbClr val="111111"/>
-                </a:solidFill>
-                <a:latin typeface="Times New Roman" pitchFamily="34" charset="0"/>
-                <a:ea typeface="Times New Roman" pitchFamily="34" charset="-122"/>
-                <a:cs typeface="Times New Roman" pitchFamily="34" charset="-120"/>
-              </a:rPr>
-              <a:t>What is the main work of a river in its upper course?</a:t>
-            </a:r>
-            <a:endParaRPr lang="en-US" sz="4000" dirty="0"/>
+              <a:t>Illustration: a V-shaped valley</a:t>
+            </a:r>
+            <a:endParaRPr lang="en-US" sz="1600" dirty="0"/>
           </a:p>
         </p:txBody>
       </p:sp>
@@ -13219,15 +13691,115 @@
                 <a:ea typeface="Calibri" pitchFamily="34" charset="-122"/>
                 <a:cs typeface="Calibri" pitchFamily="34" charset="-120"/>
               </a:rPr>
-              <a:t>FORMATIVE EVALUATION</a:t>
+              <a:t>BOARD SUMMARY</a:t>
             </a:r>
             <a:endParaRPr lang="en-US" sz="1400" dirty="0"/>
+          </a:p>
+        </p:txBody>
+      </p:sp>
+      <p:sp>
+        <p:nvSpPr>
+          <p:cNvPr id="3" name="Text 1"/>
+          <p:cNvSpPr/>
+          <p:nvPr/>
+        </p:nvSpPr>
+        <p:spPr>
+          <a:xfrm>
+            <a:off x="365760" y="1005840"/>
+            <a:ext cx="11460175" cy="731520"/>
+          </a:xfrm>
+          <a:prstGeom prst="rect">
+            <a:avLst/>
+          </a:prstGeom>
+          <a:noFill/>
+          <a:ln/>
+        </p:spPr>
+        <p:txBody>
+          <a:bodyPr wrap="square" lIns="0" tIns="0" rIns="0" bIns="0" rtlCol="0" anchor="ctr">
+            <a:normAutofit/>
+          </a:bodyPr>
+          <a:lstStyle/>
+          <a:p>
+            <a:pPr algn="ctr" indent="0" marL="0">
+              <a:buNone/>
+            </a:pPr>
+            <a:r>
+              <a:rPr lang="en-US" sz="3600" b="1" dirty="0">
+                <a:solidFill>
+                  <a:srgbClr val="990011"/>
+                </a:solidFill>
+                <a:latin typeface="Times New Roman" pitchFamily="34" charset="0"/>
+                <a:ea typeface="Times New Roman" pitchFamily="34" charset="-122"/>
+                <a:cs typeface="Times New Roman" pitchFamily="34" charset="-120"/>
+              </a:rPr>
+              <a:t>2. Landforms of the Upper Course</a:t>
+            </a:r>
+            <a:endParaRPr lang="en-US" sz="3600" dirty="0"/>
+          </a:p>
+        </p:txBody>
+      </p:sp>
+      <p:sp>
+        <p:nvSpPr>
+          <p:cNvPr id="4" name="Text 2"/>
+          <p:cNvSpPr/>
+          <p:nvPr/>
+        </p:nvSpPr>
+        <p:spPr>
+          <a:xfrm>
+            <a:off x="365760" y="1783080"/>
+            <a:ext cx="4846320" cy="4617720"/>
+          </a:xfrm>
+          <a:prstGeom prst="rect">
+            <a:avLst/>
+          </a:prstGeom>
+          <a:noFill/>
+          <a:ln/>
+        </p:spPr>
+        <p:txBody>
+          <a:bodyPr wrap="square" lIns="0" tIns="0" rIns="0" bIns="0" rtlCol="0" anchor="t"/>
+          <a:lstStyle/>
+          <a:p>
+            <a:pPr algn="l" indent="0" marL="0">
+              <a:spcAft>
+                <a:spcPts val="800"/>
+              </a:spcAft>
+              <a:buNone/>
+            </a:pPr>
+            <a:r>
+              <a:rPr lang="en-US" sz="3600" b="1" dirty="0">
+                <a:solidFill>
+                  <a:srgbClr val="111111"/>
+                </a:solidFill>
+                <a:latin typeface="Times New Roman" pitchFamily="34" charset="0"/>
+                <a:ea typeface="Times New Roman" pitchFamily="34" charset="-122"/>
+                <a:cs typeface="Times New Roman" pitchFamily="34" charset="-120"/>
+              </a:rPr>
+              <a:t>Interlocking spurs: </a:t>
+            </a:r>
+            <a:pPr algn="l" indent="0" marL="0">
+              <a:spcAft>
+                <a:spcPts val="800"/>
+              </a:spcAft>
+              <a:buNone/>
+            </a:pPr>
+            <a:r>
+              <a:rPr lang="en-US" sz="3600" dirty="0">
+                <a:solidFill>
+                  <a:srgbClr val="111111"/>
+                </a:solidFill>
+                <a:latin typeface="Times New Roman" pitchFamily="34" charset="0"/>
+                <a:ea typeface="Times New Roman" pitchFamily="34" charset="-122"/>
+                <a:cs typeface="Times New Roman" pitchFamily="34" charset="-120"/>
+              </a:rPr>
+              <a:t>They are ridges of hard rock around which the river winds.</a:t>
+            </a:r>
+            <a:endParaRPr lang="en-US" sz="3600" dirty="0"/>
           </a:p>
         </p:txBody>
       </p:sp>
       <p:pic>
         <p:nvPicPr>
-          <p:cNvPr id="3" name="Image 0" descr="/home/claude/f4/img/minesec_sheet.png">    </p:cNvPr>
+          <p:cNvPr id="5" name="Image 0" descr="/home/claude/f4/img/interlocking_spurs.png">    </p:cNvPr>
           <p:cNvPicPr>
             <a:picLocks noChangeAspect="1"/>
           </p:cNvPicPr>
@@ -13241,8 +13813,8 @@
         </p:blipFill>
         <p:spPr>
           <a:xfrm>
-            <a:off x="0" y="658368"/>
-            <a:ext cx="5120640" cy="5833872"/>
+            <a:off x="5349240" y="1904679"/>
+            <a:ext cx="6659575" cy="4027051"/>
           </a:xfrm>
           <a:prstGeom prst="rect">
             <a:avLst/>
@@ -13251,14 +13823,14 @@
       </p:pic>
       <p:sp>
         <p:nvSpPr>
-          <p:cNvPr id="4" name="Text 1"/>
+          <p:cNvPr id="6" name="Text 3"/>
           <p:cNvSpPr/>
           <p:nvPr/>
         </p:nvSpPr>
         <p:spPr>
           <a:xfrm>
-            <a:off x="5349240" y="1005840"/>
-            <a:ext cx="6522415" cy="731520"/>
+            <a:off x="5349240" y="6089904"/>
+            <a:ext cx="6659575" cy="347472"/>
           </a:xfrm>
           <a:prstGeom prst="rect">
             <a:avLst/>
@@ -13267,68 +13839,24 @@
           <a:ln/>
         </p:spPr>
         <p:txBody>
-          <a:bodyPr wrap="square" lIns="0" tIns="0" rIns="0" bIns="0" rtlCol="0" anchor="ctr">
-            <a:normAutofit/>
-          </a:bodyPr>
+          <a:bodyPr wrap="square" lIns="0" tIns="0" rIns="0" bIns="0" rtlCol="0" anchor="ctr"/>
           <a:lstStyle/>
           <a:p>
             <a:pPr algn="ctr" indent="0" marL="0">
               <a:buNone/>
             </a:pPr>
             <a:r>
-              <a:rPr lang="en-US" sz="3600" b="1" dirty="0">
-                <a:solidFill>
-                  <a:srgbClr val="990011"/>
+              <a:rPr lang="en-US" sz="1600" i="1" dirty="0">
+                <a:solidFill>
+                  <a:srgbClr val="555555"/>
                 </a:solidFill>
                 <a:latin typeface="Times New Roman" pitchFamily="34" charset="0"/>
                 <a:ea typeface="Times New Roman" pitchFamily="34" charset="-122"/>
                 <a:cs typeface="Times New Roman" pitchFamily="34" charset="-120"/>
               </a:rPr>
-              <a:t>Expected Answer</a:t>
-            </a:r>
-            <a:endParaRPr lang="en-US" sz="3600" dirty="0"/>
-          </a:p>
-        </p:txBody>
-      </p:sp>
-      <p:sp>
-        <p:nvSpPr>
-          <p:cNvPr id="5" name="Text 2"/>
-          <p:cNvSpPr/>
-          <p:nvPr/>
-        </p:nvSpPr>
-        <p:spPr>
-          <a:xfrm>
-            <a:off x="5349240" y="1783080"/>
-            <a:ext cx="6522415" cy="4663440"/>
-          </a:xfrm>
-          <a:prstGeom prst="rect">
-            <a:avLst/>
-          </a:prstGeom>
-          <a:noFill/>
-          <a:ln/>
-        </p:spPr>
-        <p:txBody>
-          <a:bodyPr wrap="square" lIns="0" tIns="0" rIns="0" bIns="0" rtlCol="0" anchor="t"/>
-          <a:lstStyle/>
-          <a:p>
-            <a:pPr algn="l" indent="0" marL="0">
-              <a:spcAft>
-                <a:spcPts val="800"/>
-              </a:spcAft>
-              <a:buNone/>
-            </a:pPr>
-            <a:r>
-              <a:rPr lang="en-US" sz="4000" dirty="0">
-                <a:solidFill>
-                  <a:srgbClr val="111111"/>
-                </a:solidFill>
-                <a:latin typeface="Times New Roman" pitchFamily="34" charset="0"/>
-                <a:ea typeface="Times New Roman" pitchFamily="34" charset="-122"/>
-                <a:cs typeface="Times New Roman" pitchFamily="34" charset="-120"/>
-              </a:rPr>
-              <a:t>It cuts down (vertical erosion).</a:t>
-            </a:r>
-            <a:endParaRPr lang="en-US" sz="4000" dirty="0"/>
+              <a:t>Illustration: interlocking spurs</a:t>
+            </a:r>
+            <a:endParaRPr lang="en-US" sz="1600" dirty="0"/>
           </a:p>
         </p:txBody>
       </p:sp>
@@ -13438,15 +13966,115 @@
                 <a:ea typeface="Calibri" pitchFamily="34" charset="-122"/>
                 <a:cs typeface="Calibri" pitchFamily="34" charset="-120"/>
               </a:rPr>
-              <a:t>FORMATIVE EVALUATION</a:t>
+              <a:t>BOARD SUMMARY</a:t>
             </a:r>
             <a:endParaRPr lang="en-US" sz="1400" dirty="0"/>
+          </a:p>
+        </p:txBody>
+      </p:sp>
+      <p:sp>
+        <p:nvSpPr>
+          <p:cNvPr id="3" name="Text 1"/>
+          <p:cNvSpPr/>
+          <p:nvPr/>
+        </p:nvSpPr>
+        <p:spPr>
+          <a:xfrm>
+            <a:off x="365760" y="1005840"/>
+            <a:ext cx="11460175" cy="731520"/>
+          </a:xfrm>
+          <a:prstGeom prst="rect">
+            <a:avLst/>
+          </a:prstGeom>
+          <a:noFill/>
+          <a:ln/>
+        </p:spPr>
+        <p:txBody>
+          <a:bodyPr wrap="square" lIns="0" tIns="0" rIns="0" bIns="0" rtlCol="0" anchor="ctr">
+            <a:normAutofit/>
+          </a:bodyPr>
+          <a:lstStyle/>
+          <a:p>
+            <a:pPr algn="ctr" indent="0" marL="0">
+              <a:buNone/>
+            </a:pPr>
+            <a:r>
+              <a:rPr lang="en-US" sz="3600" b="1" dirty="0">
+                <a:solidFill>
+                  <a:srgbClr val="990011"/>
+                </a:solidFill>
+                <a:latin typeface="Times New Roman" pitchFamily="34" charset="0"/>
+                <a:ea typeface="Times New Roman" pitchFamily="34" charset="-122"/>
+                <a:cs typeface="Times New Roman" pitchFamily="34" charset="-120"/>
+              </a:rPr>
+              <a:t>2. Landforms of the Upper Course</a:t>
+            </a:r>
+            <a:endParaRPr lang="en-US" sz="3600" dirty="0"/>
+          </a:p>
+        </p:txBody>
+      </p:sp>
+      <p:sp>
+        <p:nvSpPr>
+          <p:cNvPr id="4" name="Text 2"/>
+          <p:cNvSpPr/>
+          <p:nvPr/>
+        </p:nvSpPr>
+        <p:spPr>
+          <a:xfrm>
+            <a:off x="365760" y="1783080"/>
+            <a:ext cx="4846320" cy="4617720"/>
+          </a:xfrm>
+          <a:prstGeom prst="rect">
+            <a:avLst/>
+          </a:prstGeom>
+          <a:noFill/>
+          <a:ln/>
+        </p:spPr>
+        <p:txBody>
+          <a:bodyPr wrap="square" lIns="0" tIns="0" rIns="0" bIns="0" rtlCol="0" anchor="t"/>
+          <a:lstStyle/>
+          <a:p>
+            <a:pPr algn="l" indent="0" marL="0">
+              <a:spcAft>
+                <a:spcPts val="800"/>
+              </a:spcAft>
+              <a:buNone/>
+            </a:pPr>
+            <a:r>
+              <a:rPr lang="en-US" sz="3600" b="1" dirty="0">
+                <a:solidFill>
+                  <a:srgbClr val="111111"/>
+                </a:solidFill>
+                <a:latin typeface="Times New Roman" pitchFamily="34" charset="0"/>
+                <a:ea typeface="Times New Roman" pitchFamily="34" charset="-122"/>
+                <a:cs typeface="Times New Roman" pitchFamily="34" charset="-120"/>
+              </a:rPr>
+              <a:t>Waterfall: </a:t>
+            </a:r>
+            <a:pPr algn="l" indent="0" marL="0">
+              <a:spcAft>
+                <a:spcPts val="800"/>
+              </a:spcAft>
+              <a:buNone/>
+            </a:pPr>
+            <a:r>
+              <a:rPr lang="en-US" sz="3600" dirty="0">
+                <a:solidFill>
+                  <a:srgbClr val="111111"/>
+                </a:solidFill>
+                <a:latin typeface="Times New Roman" pitchFamily="34" charset="0"/>
+                <a:ea typeface="Times New Roman" pitchFamily="34" charset="-122"/>
+                <a:cs typeface="Times New Roman" pitchFamily="34" charset="-120"/>
+              </a:rPr>
+              <a:t>It forms where a river falls over a band of hard rock lying on soft rock, as at the Vina and Tello Falls.</a:t>
+            </a:r>
+            <a:endParaRPr lang="en-US" sz="3600" dirty="0"/>
           </a:p>
         </p:txBody>
       </p:sp>
       <p:pic>
         <p:nvPicPr>
-          <p:cNvPr id="3" name="Image 0" descr="/home/claude/f4/img/minesec_sheet.png">    </p:cNvPr>
+          <p:cNvPr id="5" name="Image 0" descr="/home/claude/f4/img/v2/waterfall_last.png">    </p:cNvPr>
           <p:cNvPicPr>
             <a:picLocks noChangeAspect="1"/>
           </p:cNvPicPr>
@@ -13460,8 +14088,8 @@
         </p:blipFill>
         <p:spPr>
           <a:xfrm>
-            <a:off x="0" y="658368"/>
-            <a:ext cx="5120640" cy="5833872"/>
+            <a:off x="5349240" y="2617506"/>
+            <a:ext cx="6659575" cy="2601397"/>
           </a:xfrm>
           <a:prstGeom prst="rect">
             <a:avLst/>
@@ -13470,14 +14098,14 @@
       </p:pic>
       <p:sp>
         <p:nvSpPr>
-          <p:cNvPr id="4" name="Text 1"/>
+          <p:cNvPr id="6" name="Text 3"/>
           <p:cNvSpPr/>
           <p:nvPr/>
         </p:nvSpPr>
         <p:spPr>
           <a:xfrm>
-            <a:off x="5349240" y="1005840"/>
-            <a:ext cx="6522415" cy="731520"/>
+            <a:off x="5349240" y="6089904"/>
+            <a:ext cx="6659575" cy="347472"/>
           </a:xfrm>
           <a:prstGeom prst="rect">
             <a:avLst/>
@@ -13486,68 +14114,24 @@
           <a:ln/>
         </p:spPr>
         <p:txBody>
-          <a:bodyPr wrap="square" lIns="0" tIns="0" rIns="0" bIns="0" rtlCol="0" anchor="ctr">
-            <a:normAutofit/>
-          </a:bodyPr>
+          <a:bodyPr wrap="square" lIns="0" tIns="0" rIns="0" bIns="0" rtlCol="0" anchor="ctr"/>
           <a:lstStyle/>
           <a:p>
             <a:pPr algn="ctr" indent="0" marL="0">
               <a:buNone/>
             </a:pPr>
             <a:r>
-              <a:rPr lang="en-US" sz="3600" b="1" dirty="0">
-                <a:solidFill>
-                  <a:srgbClr val="990011"/>
+              <a:rPr lang="en-US" sz="1600" i="1" dirty="0">
+                <a:solidFill>
+                  <a:srgbClr val="555555"/>
                 </a:solidFill>
                 <a:latin typeface="Times New Roman" pitchFamily="34" charset="0"/>
                 <a:ea typeface="Times New Roman" pitchFamily="34" charset="-122"/>
                 <a:cs typeface="Times New Roman" pitchFamily="34" charset="-120"/>
               </a:rPr>
-              <a:t>Evaluation 2</a:t>
-            </a:r>
-            <a:endParaRPr lang="en-US" sz="3600" dirty="0"/>
-          </a:p>
-        </p:txBody>
-      </p:sp>
-      <p:sp>
-        <p:nvSpPr>
-          <p:cNvPr id="5" name="Text 2"/>
-          <p:cNvSpPr/>
-          <p:nvPr/>
-        </p:nvSpPr>
-        <p:spPr>
-          <a:xfrm>
-            <a:off x="5349240" y="1783080"/>
-            <a:ext cx="6522415" cy="4663440"/>
-          </a:xfrm>
-          <a:prstGeom prst="rect">
-            <a:avLst/>
-          </a:prstGeom>
-          <a:noFill/>
-          <a:ln/>
-        </p:spPr>
-        <p:txBody>
-          <a:bodyPr wrap="square" lIns="0" tIns="0" rIns="0" bIns="0" rtlCol="0" anchor="t"/>
-          <a:lstStyle/>
-          <a:p>
-            <a:pPr algn="l" indent="0" marL="0">
-              <a:spcAft>
-                <a:spcPts val="800"/>
-              </a:spcAft>
-              <a:buNone/>
-            </a:pPr>
-            <a:r>
-              <a:rPr lang="en-US" sz="4000" dirty="0">
-                <a:solidFill>
-                  <a:srgbClr val="111111"/>
-                </a:solidFill>
-                <a:latin typeface="Times New Roman" pitchFamily="34" charset="0"/>
-                <a:ea typeface="Times New Roman" pitchFamily="34" charset="-122"/>
-                <a:cs typeface="Times New Roman" pitchFamily="34" charset="-120"/>
-              </a:rPr>
-              <a:t>How does a gorge form?</a:t>
-            </a:r>
-            <a:endParaRPr lang="en-US" sz="4000" dirty="0"/>
+              <a:t>Illustration: formation of a waterfall</a:t>
+            </a:r>
+            <a:endParaRPr lang="en-US" sz="1600" dirty="0"/>
           </a:p>
         </p:txBody>
       </p:sp>
@@ -13657,7 +14241,7 @@
                 <a:ea typeface="Calibri" pitchFamily="34" charset="-122"/>
                 <a:cs typeface="Calibri" pitchFamily="34" charset="-120"/>
               </a:rPr>
-              <a:t>FORMATIVE EVALUATION</a:t>
+              <a:t>BOARD SUMMARY</a:t>
             </a:r>
             <a:endParaRPr lang="en-US" sz="1400" dirty="0"/>
           </a:p>
@@ -13680,7 +14264,7 @@
         <p:spPr>
           <a:xfrm>
             <a:off x="0" y="658368"/>
-            <a:ext cx="5120640" cy="5833872"/>
+            <a:ext cx="2468880" cy="5833872"/>
           </a:xfrm>
           <a:prstGeom prst="rect">
             <a:avLst/>
@@ -13695,8 +14279,8 @@
         </p:nvSpPr>
         <p:spPr>
           <a:xfrm>
-            <a:off x="5349240" y="1005840"/>
-            <a:ext cx="6522415" cy="731520"/>
+            <a:off x="2697480" y="1005840"/>
+            <a:ext cx="9174175" cy="731520"/>
           </a:xfrm>
           <a:prstGeom prst="rect">
             <a:avLst/>
@@ -13722,7 +14306,7 @@
                 <a:ea typeface="Times New Roman" pitchFamily="34" charset="-122"/>
                 <a:cs typeface="Times New Roman" pitchFamily="34" charset="-120"/>
               </a:rPr>
-              <a:t>Expected Answer</a:t>
+              <a:t>2. Landforms of the Upper Course</a:t>
             </a:r>
             <a:endParaRPr lang="en-US" sz="3600" dirty="0"/>
           </a:p>
@@ -13736,8 +14320,8 @@
         </p:nvSpPr>
         <p:spPr>
           <a:xfrm>
-            <a:off x="5349240" y="1783080"/>
-            <a:ext cx="6522415" cy="4663440"/>
+            <a:off x="2697480" y="1783080"/>
+            <a:ext cx="9174175" cy="4663440"/>
           </a:xfrm>
           <a:prstGeom prst="rect">
             <a:avLst/>
@@ -13756,7 +14340,7 @@
               <a:buNone/>
             </a:pPr>
             <a:r>
-              <a:rPr lang="en-US" sz="4000" dirty="0">
+              <a:rPr lang="en-US" sz="4000" b="1" dirty="0">
                 <a:solidFill>
                   <a:srgbClr val="111111"/>
                 </a:solidFill>
@@ -13764,7 +14348,61 @@
                 <a:ea typeface="Times New Roman" pitchFamily="34" charset="-122"/>
                 <a:cs typeface="Times New Roman" pitchFamily="34" charset="-120"/>
               </a:rPr>
-              <a:t>The waterfall moves back and leaves a deep, narrow valley.</a:t>
+              <a:t>Gorge: </a:t>
+            </a:r>
+            <a:pPr algn="l" indent="0" marL="0">
+              <a:spcAft>
+                <a:spcPts val="800"/>
+              </a:spcAft>
+              <a:buNone/>
+            </a:pPr>
+            <a:r>
+              <a:rPr lang="en-US" sz="4000" dirty="0">
+                <a:solidFill>
+                  <a:srgbClr val="111111"/>
+                </a:solidFill>
+                <a:latin typeface="Times New Roman" pitchFamily="34" charset="0"/>
+                <a:ea typeface="Times New Roman" pitchFamily="34" charset="-122"/>
+                <a:cs typeface="Times New Roman" pitchFamily="34" charset="-120"/>
+              </a:rPr>
+              <a:t>It is a deep, narrow, steep-sided valley left as a waterfall moves back, as at the Kola Gorges near Guider.</a:t>
+            </a:r>
+            <a:endParaRPr lang="en-US" sz="4000" dirty="0"/>
+          </a:p>
+          <a:p>
+            <a:pPr algn="l" indent="0" marL="0">
+              <a:spcAft>
+                <a:spcPts val="800"/>
+              </a:spcAft>
+              <a:buNone/>
+            </a:pPr>
+            <a:r>
+              <a:rPr lang="en-US" sz="4000" b="1" dirty="0">
+                <a:solidFill>
+                  <a:srgbClr val="111111"/>
+                </a:solidFill>
+                <a:latin typeface="Times New Roman" pitchFamily="34" charset="0"/>
+                <a:ea typeface="Times New Roman" pitchFamily="34" charset="-122"/>
+                <a:cs typeface="Times New Roman" pitchFamily="34" charset="-120"/>
+              </a:rPr>
+              <a:t>Rapids (cataracts): </a:t>
+            </a:r>
+            <a:pPr algn="l" indent="0" marL="0">
+              <a:spcAft>
+                <a:spcPts val="800"/>
+              </a:spcAft>
+              <a:buNone/>
+            </a:pPr>
+            <a:r>
+              <a:rPr lang="en-US" sz="4000" dirty="0">
+                <a:solidFill>
+                  <a:srgbClr val="111111"/>
+                </a:solidFill>
+                <a:latin typeface="Times New Roman" pitchFamily="34" charset="0"/>
+                <a:ea typeface="Times New Roman" pitchFamily="34" charset="-122"/>
+                <a:cs typeface="Times New Roman" pitchFamily="34" charset="-120"/>
+              </a:rPr>
+              <a:t>They are stretches of fast, rough water where hard and soft rocks alternate on the river bed.</a:t>
             </a:r>
             <a:endParaRPr lang="en-US" sz="4000" dirty="0"/>
           </a:p>
@@ -13876,7 +14514,7 @@
                 <a:ea typeface="Calibri" pitchFamily="34" charset="-122"/>
                 <a:cs typeface="Calibri" pitchFamily="34" charset="-120"/>
               </a:rPr>
-              <a:t>REMEDIATION</a:t>
+              <a:t>BOARD SUMMARY</a:t>
             </a:r>
             <a:endParaRPr lang="en-US" sz="1400" dirty="0"/>
           </a:p>
@@ -13941,7 +14579,7 @@
                 <a:ea typeface="Times New Roman" pitchFamily="34" charset="-122"/>
                 <a:cs typeface="Times New Roman" pitchFamily="34" charset="-120"/>
               </a:rPr>
-              <a:t>Remediation</a:t>
+              <a:t>2. Landforms of the Upper Course (continued)</a:t>
             </a:r>
             <a:endParaRPr lang="en-US" sz="3600" dirty="0"/>
           </a:p>
@@ -13983,18 +14621,13 @@
                 <a:ea typeface="Times New Roman" pitchFamily="34" charset="-122"/>
                 <a:cs typeface="Times New Roman" pitchFamily="34" charset="-120"/>
               </a:rPr>
-              <a:t>Fill in the blanks:</a:t>
-            </a:r>
-            <a:endParaRPr lang="en-US" sz="4000" dirty="0"/>
-          </a:p>
-          <a:p>
-            <a:pPr algn="l" marL="342900" indent="-342900">
+              <a:t>Potholes: </a:t>
+            </a:r>
+            <a:pPr algn="l" indent="0" marL="0">
               <a:spcAft>
                 <a:spcPts val="800"/>
               </a:spcAft>
-              <a:buSzPct val="100000"/>
-              <a:buFont typeface="+mj-lt"/>
-              <a:buAutoNum type="arabicPeriod" startAt="1"/>
+              <a:buNone/>
             </a:pPr>
             <a:r>
               <a:rPr lang="en-US" sz="4000" dirty="0">
@@ -14005,29 +14638,7 @@
                 <a:ea typeface="Times New Roman" pitchFamily="34" charset="-122"/>
                 <a:cs typeface="Times New Roman" pitchFamily="34" charset="-120"/>
               </a:rPr>
-              <a:t>In the upper course, the valley is ______-shaped.</a:t>
-            </a:r>
-            <a:endParaRPr lang="en-US" sz="4000" dirty="0"/>
-          </a:p>
-          <a:p>
-            <a:pPr algn="l" marL="342900" indent="-342900">
-              <a:spcAft>
-                <a:spcPts val="800"/>
-              </a:spcAft>
-              <a:buSzPct val="100000"/>
-              <a:buFont typeface="+mj-lt"/>
-              <a:buAutoNum type="arabicPeriod" startAt="1"/>
-            </a:pPr>
-            <a:r>
-              <a:rPr lang="en-US" sz="4000" dirty="0">
-                <a:solidFill>
-                  <a:srgbClr val="111111"/>
-                </a:solidFill>
-                <a:latin typeface="Times New Roman" pitchFamily="34" charset="0"/>
-                <a:ea typeface="Times New Roman" pitchFamily="34" charset="-122"/>
-                <a:cs typeface="Times New Roman" pitchFamily="34" charset="-120"/>
-              </a:rPr>
-              <a:t>A river falling over a cliff forms a ______.</a:t>
+              <a:t>They are round holes drilled in the river bed by stones swirled by the water.</a:t>
             </a:r>
             <a:endParaRPr lang="en-US" sz="4000" dirty="0"/>
           </a:p>
@@ -14139,7 +14750,7 @@
                 <a:ea typeface="Calibri" pitchFamily="34" charset="-122"/>
                 <a:cs typeface="Calibri" pitchFamily="34" charset="-120"/>
               </a:rPr>
-              <a:t>REMEDIATION</a:t>
+              <a:t>FORMATIVE EVALUATION</a:t>
             </a:r>
             <a:endParaRPr lang="en-US" sz="1400" dirty="0"/>
           </a:p>
@@ -14204,7 +14815,7 @@
                 <a:ea typeface="Times New Roman" pitchFamily="34" charset="-122"/>
                 <a:cs typeface="Times New Roman" pitchFamily="34" charset="-120"/>
               </a:rPr>
-              <a:t>Remediation (continued)</a:t>
+              <a:t>Evaluation 1</a:t>
             </a:r>
             <a:endParaRPr lang="en-US" sz="3600" dirty="0"/>
           </a:p>
@@ -14231,13 +14842,11 @@
           <a:bodyPr wrap="square" lIns="0" tIns="0" rIns="0" bIns="0" rtlCol="0" anchor="t"/>
           <a:lstStyle/>
           <a:p>
-            <a:pPr algn="l" marL="342900" indent="-342900">
+            <a:pPr algn="l" indent="0" marL="0">
               <a:spcAft>
                 <a:spcPts val="800"/>
               </a:spcAft>
-              <a:buSzPct val="100000"/>
-              <a:buFont typeface="+mj-lt"/>
-              <a:buAutoNum type="arabicPeriod" startAt="1"/>
+              <a:buNone/>
             </a:pPr>
             <a:r>
               <a:rPr lang="en-US" sz="4000" dirty="0">
@@ -14248,7 +14857,7 @@
                 <a:ea typeface="Times New Roman" pitchFamily="34" charset="-122"/>
                 <a:cs typeface="Times New Roman" pitchFamily="34" charset="-120"/>
               </a:rPr>
-              <a:t>The deep valley below a waterfall is a ______.</a:t>
+              <a:t>What is the main work of a river in its upper course?</a:t>
             </a:r>
             <a:endParaRPr lang="en-US" sz="4000" dirty="0"/>
           </a:p>
@@ -14599,7 +15208,7 @@
                 <a:ea typeface="Calibri" pitchFamily="34" charset="-122"/>
                 <a:cs typeface="Calibri" pitchFamily="34" charset="-120"/>
               </a:rPr>
-              <a:t>HOMEWORK</a:t>
+              <a:t>FORMATIVE EVALUATION</a:t>
             </a:r>
             <a:endParaRPr lang="en-US" sz="1400" dirty="0"/>
           </a:p>
@@ -14664,7 +15273,7 @@
                 <a:ea typeface="Times New Roman" pitchFamily="34" charset="-122"/>
                 <a:cs typeface="Times New Roman" pitchFamily="34" charset="-120"/>
               </a:rPr>
-              <a:t>Homework</a:t>
+              <a:t>Expected Answer</a:t>
             </a:r>
             <a:endParaRPr lang="en-US" sz="3600" dirty="0"/>
           </a:p>
@@ -14706,7 +15315,7 @@
                 <a:ea typeface="Times New Roman" pitchFamily="34" charset="-122"/>
                 <a:cs typeface="Times New Roman" pitchFamily="34" charset="-120"/>
               </a:rPr>
-              <a:t>Stand on the Benue Bridge in Garoua or look at a photo of it. Draw the river and its bends, and mark where the water seems fastest.</a:t>
+              <a:t>It cuts down (vertical erosion).</a:t>
             </a:r>
             <a:endParaRPr lang="en-US" sz="4000" dirty="0"/>
           </a:p>
@@ -14818,7 +15427,7 @@
                 <a:ea typeface="Calibri" pitchFamily="34" charset="-122"/>
                 <a:cs typeface="Calibri" pitchFamily="34" charset="-120"/>
               </a:rPr>
-              <a:t>NEXT LESSON</a:t>
+              <a:t>FORMATIVE EVALUATION</a:t>
             </a:r>
             <a:endParaRPr lang="en-US" sz="1400" dirty="0"/>
           </a:p>
@@ -14883,7 +15492,7 @@
                 <a:ea typeface="Times New Roman" pitchFamily="34" charset="-122"/>
                 <a:cs typeface="Times New Roman" pitchFamily="34" charset="-120"/>
               </a:rPr>
-              <a:t>Next Lesson</a:t>
+              <a:t>Evaluation 2</a:t>
             </a:r>
             <a:endParaRPr lang="en-US" sz="3600" dirty="0"/>
           </a:p>
@@ -14907,17 +15516,17 @@
           <a:ln/>
         </p:spPr>
         <p:txBody>
-          <a:bodyPr wrap="square" lIns="0" tIns="0" rIns="0" bIns="0" rtlCol="0" anchor="ctr"/>
-          <a:lstStyle/>
-          <a:p>
-            <a:pPr algn="ctr" indent="0" marL="0">
+          <a:bodyPr wrap="square" lIns="0" tIns="0" rIns="0" bIns="0" rtlCol="0" anchor="t"/>
+          <a:lstStyle/>
+          <a:p>
+            <a:pPr algn="l" indent="0" marL="0">
               <a:spcAft>
                 <a:spcPts val="800"/>
               </a:spcAft>
               <a:buNone/>
             </a:pPr>
             <a:r>
-              <a:rPr lang="en-US" sz="4000" b="1" dirty="0">
+              <a:rPr lang="en-US" sz="4000" dirty="0">
                 <a:solidFill>
                   <a:srgbClr val="111111"/>
                 </a:solidFill>
@@ -14925,27 +15534,7 @@
                 <a:ea typeface="Times New Roman" pitchFamily="34" charset="-122"/>
                 <a:cs typeface="Times New Roman" pitchFamily="34" charset="-120"/>
               </a:rPr>
-              <a:t>Our next lesson will be on:</a:t>
-            </a:r>
-            <a:endParaRPr lang="en-US" sz="4000" dirty="0"/>
-          </a:p>
-          <a:p>
-            <a:pPr algn="ctr" indent="0" marL="0">
-              <a:spcAft>
-                <a:spcPts val="800"/>
-              </a:spcAft>
-              <a:buNone/>
-            </a:pPr>
-            <a:r>
-              <a:rPr lang="en-US" sz="4000" b="1" dirty="0">
-                <a:solidFill>
-                  <a:srgbClr val="990011"/>
-                </a:solidFill>
-                <a:latin typeface="Times New Roman" pitchFamily="34" charset="0"/>
-                <a:ea typeface="Times New Roman" pitchFamily="34" charset="-122"/>
-                <a:cs typeface="Times New Roman" pitchFamily="34" charset="-120"/>
-              </a:rPr>
-              <a:t>Lesson 20: The Middle Course of a River</a:t>
+              <a:t>How does a gorge form?</a:t>
             </a:r>
             <a:endParaRPr lang="en-US" sz="4000" dirty="0"/>
           </a:p>
@@ -15057,6 +15646,1167 @@
                 <a:ea typeface="Calibri" pitchFamily="34" charset="-122"/>
                 <a:cs typeface="Calibri" pitchFamily="34" charset="-120"/>
               </a:rPr>
+              <a:t>FORMATIVE EVALUATION</a:t>
+            </a:r>
+            <a:endParaRPr lang="en-US" sz="1400" dirty="0"/>
+          </a:p>
+        </p:txBody>
+      </p:sp>
+      <p:pic>
+        <p:nvPicPr>
+          <p:cNvPr id="3" name="Image 0" descr="/home/claude/f4/img/minesec_sheet.png">    </p:cNvPr>
+          <p:cNvPicPr>
+            <a:picLocks noChangeAspect="1"/>
+          </p:cNvPicPr>
+          <p:nvPr/>
+        </p:nvPicPr>
+        <p:blipFill>
+          <a:blip r:embed="rId1"/>
+          <a:stretch>
+            <a:fillRect/>
+          </a:stretch>
+        </p:blipFill>
+        <p:spPr>
+          <a:xfrm>
+            <a:off x="0" y="658368"/>
+            <a:ext cx="5120640" cy="5833872"/>
+          </a:xfrm>
+          <a:prstGeom prst="rect">
+            <a:avLst/>
+          </a:prstGeom>
+        </p:spPr>
+      </p:pic>
+      <p:sp>
+        <p:nvSpPr>
+          <p:cNvPr id="4" name="Text 1"/>
+          <p:cNvSpPr/>
+          <p:nvPr/>
+        </p:nvSpPr>
+        <p:spPr>
+          <a:xfrm>
+            <a:off x="5349240" y="1005840"/>
+            <a:ext cx="6522415" cy="731520"/>
+          </a:xfrm>
+          <a:prstGeom prst="rect">
+            <a:avLst/>
+          </a:prstGeom>
+          <a:noFill/>
+          <a:ln/>
+        </p:spPr>
+        <p:txBody>
+          <a:bodyPr wrap="square" lIns="0" tIns="0" rIns="0" bIns="0" rtlCol="0" anchor="ctr">
+            <a:normAutofit/>
+          </a:bodyPr>
+          <a:lstStyle/>
+          <a:p>
+            <a:pPr algn="ctr" indent="0" marL="0">
+              <a:buNone/>
+            </a:pPr>
+            <a:r>
+              <a:rPr lang="en-US" sz="3600" b="1" dirty="0">
+                <a:solidFill>
+                  <a:srgbClr val="990011"/>
+                </a:solidFill>
+                <a:latin typeface="Times New Roman" pitchFamily="34" charset="0"/>
+                <a:ea typeface="Times New Roman" pitchFamily="34" charset="-122"/>
+                <a:cs typeface="Times New Roman" pitchFamily="34" charset="-120"/>
+              </a:rPr>
+              <a:t>Expected Answer</a:t>
+            </a:r>
+            <a:endParaRPr lang="en-US" sz="3600" dirty="0"/>
+          </a:p>
+        </p:txBody>
+      </p:sp>
+      <p:sp>
+        <p:nvSpPr>
+          <p:cNvPr id="5" name="Text 2"/>
+          <p:cNvSpPr/>
+          <p:nvPr/>
+        </p:nvSpPr>
+        <p:spPr>
+          <a:xfrm>
+            <a:off x="5349240" y="1783080"/>
+            <a:ext cx="6522415" cy="4663440"/>
+          </a:xfrm>
+          <a:prstGeom prst="rect">
+            <a:avLst/>
+          </a:prstGeom>
+          <a:noFill/>
+          <a:ln/>
+        </p:spPr>
+        <p:txBody>
+          <a:bodyPr wrap="square" lIns="0" tIns="0" rIns="0" bIns="0" rtlCol="0" anchor="t"/>
+          <a:lstStyle/>
+          <a:p>
+            <a:pPr algn="l" indent="0" marL="0">
+              <a:spcAft>
+                <a:spcPts val="800"/>
+              </a:spcAft>
+              <a:buNone/>
+            </a:pPr>
+            <a:r>
+              <a:rPr lang="en-US" sz="4000" dirty="0">
+                <a:solidFill>
+                  <a:srgbClr val="111111"/>
+                </a:solidFill>
+                <a:latin typeface="Times New Roman" pitchFamily="34" charset="0"/>
+                <a:ea typeface="Times New Roman" pitchFamily="34" charset="-122"/>
+                <a:cs typeface="Times New Roman" pitchFamily="34" charset="-120"/>
+              </a:rPr>
+              <a:t>The waterfall moves back and leaves a deep, narrow valley.</a:t>
+            </a:r>
+            <a:endParaRPr lang="en-US" sz="4000" dirty="0"/>
+          </a:p>
+        </p:txBody>
+      </p:sp>
+      <p:sp>
+        <p:nvSpPr>
+          <p:cNvPr id="25" name="Slide Number Placeholder 0"/>
+          <p:cNvSpPr>
+            <a:spLocks noGrp="1"/>
+          </p:cNvSpPr>
+          <p:nvPr>
+            <p:ph type="sldNum" sz="quarter" idx="4294967295"/>
+          </p:nvPr>
+        </p:nvSpPr>
+        <p:spPr>
+          <a:xfrm>
+            <a:off x="27432" y="91440"/>
+            <a:ext cx="585216" cy="475488"/>
+          </a:xfrm>
+          <a:prstGeom prst="rect">
+            <a:avLst/>
+          </a:prstGeom>
+          <a:extLst>
+            <a:ext uri="{C572A759-6A51-4108-AA02-DFA0A04FC94B}">
+              <ma14:wrappingTextBoxFlag xmlns:ma14="http://schemas.microsoft.com/office/mac/drawingml/2011/main" val="0"/>
+            </a:ext>
+          </a:extLst>
+        </p:spPr>
+        <p:txBody>
+          <a:bodyPr/>
+          <a:lstStyle>
+            <a:lvl1pPr>
+              <a:defRPr sz="2000">
+                <a:solidFill>
+                  <a:srgbClr val="FFFFFF"/>
+                </a:solidFill>
+                <a:latin typeface="Calibri"/>
+                <a:ea typeface="Calibri"/>
+                <a:cs typeface="Calibri"/>
+              </a:defRPr>
+            </a:lvl1pPr>
+          </a:lstStyle>
+          <a:p>
+            <a:pPr algn="ctr"/>
+            <a:fld id="{F7021451-1387-4CA6-816F-3879F97B5CBC}" type="slidenum">
+              <a:rPr b="1" lang="en-US"/>
+              <a:t>42</a:t>
+            </a:fld>
+            <a:endParaRPr lang="en-US"/>
+          </a:p>
+        </p:txBody>
+      </p:sp>
+    </p:spTree>
+  </p:cSld>
+  <p:clrMapOvr>
+    <a:masterClrMapping/>
+  </p:clrMapOvr>
+</p:sld>
+</file>
+
+<file path=ppt/slides/slide43.xml><?xml version="1.0" encoding="utf-8"?>
+<p:sld xmlns:a="http://schemas.openxmlformats.org/drawingml/2006/main" xmlns:r="http://schemas.openxmlformats.org/officeDocument/2006/relationships" xmlns:p="http://schemas.openxmlformats.org/presentationml/2006/main">
+  <p:cSld name="Slide 43">
+    <p:spTree>
+      <p:nvGrpSpPr>
+        <p:cNvPr id="1" name=""/>
+        <p:cNvGrpSpPr/>
+        <p:nvPr/>
+      </p:nvGrpSpPr>
+      <p:grpSpPr>
+        <a:xfrm>
+          <a:off x="0" y="0"/>
+          <a:ext cx="0" cy="0"/>
+          <a:chOff x="0" y="0"/>
+          <a:chExt cx="0" cy="0"/>
+        </a:xfrm>
+      </p:grpSpPr>
+      <p:sp>
+        <p:nvSpPr>
+          <p:cNvPr id="2" name="Text 0"/>
+          <p:cNvSpPr/>
+          <p:nvPr/>
+        </p:nvSpPr>
+        <p:spPr>
+          <a:xfrm>
+            <a:off x="457200" y="713232"/>
+            <a:ext cx="11368735" cy="274320"/>
+          </a:xfrm>
+          <a:prstGeom prst="rect">
+            <a:avLst/>
+          </a:prstGeom>
+          <a:noFill/>
+          <a:ln/>
+        </p:spPr>
+        <p:txBody>
+          <a:bodyPr wrap="square" lIns="0" tIns="0" rIns="0" bIns="0" rtlCol="0" anchor="ctr"/>
+          <a:lstStyle/>
+          <a:p>
+            <a:pPr algn="r" indent="0" marL="0">
+              <a:buNone/>
+            </a:pPr>
+            <a:r>
+              <a:rPr lang="en-US" sz="1400" b="1" dirty="0">
+                <a:solidFill>
+                  <a:srgbClr val="1C3F6E"/>
+                </a:solidFill>
+                <a:latin typeface="Calibri" pitchFamily="34" charset="0"/>
+                <a:ea typeface="Calibri" pitchFamily="34" charset="-122"/>
+                <a:cs typeface="Calibri" pitchFamily="34" charset="-120"/>
+              </a:rPr>
+              <a:t>REMEDIATION</a:t>
+            </a:r>
+            <a:endParaRPr lang="en-US" sz="1400" dirty="0"/>
+          </a:p>
+        </p:txBody>
+      </p:sp>
+      <p:pic>
+        <p:nvPicPr>
+          <p:cNvPr id="3" name="Image 0" descr="/home/claude/f4/img/minesec_sheet.png">    </p:cNvPr>
+          <p:cNvPicPr>
+            <a:picLocks noChangeAspect="1"/>
+          </p:cNvPicPr>
+          <p:nvPr/>
+        </p:nvPicPr>
+        <p:blipFill>
+          <a:blip r:embed="rId1"/>
+          <a:stretch>
+            <a:fillRect/>
+          </a:stretch>
+        </p:blipFill>
+        <p:spPr>
+          <a:xfrm>
+            <a:off x="0" y="658368"/>
+            <a:ext cx="5120640" cy="5833872"/>
+          </a:xfrm>
+          <a:prstGeom prst="rect">
+            <a:avLst/>
+          </a:prstGeom>
+        </p:spPr>
+      </p:pic>
+      <p:sp>
+        <p:nvSpPr>
+          <p:cNvPr id="4" name="Text 1"/>
+          <p:cNvSpPr/>
+          <p:nvPr/>
+        </p:nvSpPr>
+        <p:spPr>
+          <a:xfrm>
+            <a:off x="5349240" y="1005840"/>
+            <a:ext cx="6522415" cy="731520"/>
+          </a:xfrm>
+          <a:prstGeom prst="rect">
+            <a:avLst/>
+          </a:prstGeom>
+          <a:noFill/>
+          <a:ln/>
+        </p:spPr>
+        <p:txBody>
+          <a:bodyPr wrap="square" lIns="0" tIns="0" rIns="0" bIns="0" rtlCol="0" anchor="ctr">
+            <a:normAutofit/>
+          </a:bodyPr>
+          <a:lstStyle/>
+          <a:p>
+            <a:pPr algn="ctr" indent="0" marL="0">
+              <a:buNone/>
+            </a:pPr>
+            <a:r>
+              <a:rPr lang="en-US" sz="3600" b="1" dirty="0">
+                <a:solidFill>
+                  <a:srgbClr val="990011"/>
+                </a:solidFill>
+                <a:latin typeface="Times New Roman" pitchFamily="34" charset="0"/>
+                <a:ea typeface="Times New Roman" pitchFamily="34" charset="-122"/>
+                <a:cs typeface="Times New Roman" pitchFamily="34" charset="-120"/>
+              </a:rPr>
+              <a:t>Remediation</a:t>
+            </a:r>
+            <a:endParaRPr lang="en-US" sz="3600" dirty="0"/>
+          </a:p>
+        </p:txBody>
+      </p:sp>
+      <p:sp>
+        <p:nvSpPr>
+          <p:cNvPr id="5" name="Text 2"/>
+          <p:cNvSpPr/>
+          <p:nvPr/>
+        </p:nvSpPr>
+        <p:spPr>
+          <a:xfrm>
+            <a:off x="5349240" y="1783080"/>
+            <a:ext cx="6522415" cy="4663440"/>
+          </a:xfrm>
+          <a:prstGeom prst="rect">
+            <a:avLst/>
+          </a:prstGeom>
+          <a:noFill/>
+          <a:ln/>
+        </p:spPr>
+        <p:txBody>
+          <a:bodyPr wrap="square" lIns="0" tIns="0" rIns="0" bIns="0" rtlCol="0" anchor="t"/>
+          <a:lstStyle/>
+          <a:p>
+            <a:pPr algn="l" indent="0" marL="0">
+              <a:spcAft>
+                <a:spcPts val="800"/>
+              </a:spcAft>
+              <a:buNone/>
+            </a:pPr>
+            <a:r>
+              <a:rPr lang="en-US" sz="4000" b="1" dirty="0">
+                <a:solidFill>
+                  <a:srgbClr val="111111"/>
+                </a:solidFill>
+                <a:latin typeface="Times New Roman" pitchFamily="34" charset="0"/>
+                <a:ea typeface="Times New Roman" pitchFamily="34" charset="-122"/>
+                <a:cs typeface="Times New Roman" pitchFamily="34" charset="-120"/>
+              </a:rPr>
+              <a:t>Fill in the blanks:</a:t>
+            </a:r>
+            <a:endParaRPr lang="en-US" sz="4000" dirty="0"/>
+          </a:p>
+          <a:p>
+            <a:pPr algn="l" marL="342900" indent="-342900">
+              <a:spcAft>
+                <a:spcPts val="800"/>
+              </a:spcAft>
+              <a:buSzPct val="100000"/>
+              <a:buFont typeface="+mj-lt"/>
+              <a:buAutoNum type="arabicPeriod" startAt="1"/>
+            </a:pPr>
+            <a:r>
+              <a:rPr lang="en-US" sz="4000" dirty="0">
+                <a:solidFill>
+                  <a:srgbClr val="111111"/>
+                </a:solidFill>
+                <a:latin typeface="Times New Roman" pitchFamily="34" charset="0"/>
+                <a:ea typeface="Times New Roman" pitchFamily="34" charset="-122"/>
+                <a:cs typeface="Times New Roman" pitchFamily="34" charset="-120"/>
+              </a:rPr>
+              <a:t>In the upper course, the valley is ______-shaped.</a:t>
+            </a:r>
+            <a:endParaRPr lang="en-US" sz="4000" dirty="0"/>
+          </a:p>
+          <a:p>
+            <a:pPr algn="l" marL="342900" indent="-342900">
+              <a:spcAft>
+                <a:spcPts val="800"/>
+              </a:spcAft>
+              <a:buSzPct val="100000"/>
+              <a:buFont typeface="+mj-lt"/>
+              <a:buAutoNum type="arabicPeriod" startAt="1"/>
+            </a:pPr>
+            <a:r>
+              <a:rPr lang="en-US" sz="4000" dirty="0">
+                <a:solidFill>
+                  <a:srgbClr val="111111"/>
+                </a:solidFill>
+                <a:latin typeface="Times New Roman" pitchFamily="34" charset="0"/>
+                <a:ea typeface="Times New Roman" pitchFamily="34" charset="-122"/>
+                <a:cs typeface="Times New Roman" pitchFamily="34" charset="-120"/>
+              </a:rPr>
+              <a:t>A river falling over a cliff forms a ______.</a:t>
+            </a:r>
+            <a:endParaRPr lang="en-US" sz="4000" dirty="0"/>
+          </a:p>
+        </p:txBody>
+      </p:sp>
+      <p:sp>
+        <p:nvSpPr>
+          <p:cNvPr id="25" name="Slide Number Placeholder 0"/>
+          <p:cNvSpPr>
+            <a:spLocks noGrp="1"/>
+          </p:cNvSpPr>
+          <p:nvPr>
+            <p:ph type="sldNum" sz="quarter" idx="4294967295"/>
+          </p:nvPr>
+        </p:nvSpPr>
+        <p:spPr>
+          <a:xfrm>
+            <a:off x="27432" y="91440"/>
+            <a:ext cx="585216" cy="475488"/>
+          </a:xfrm>
+          <a:prstGeom prst="rect">
+            <a:avLst/>
+          </a:prstGeom>
+          <a:extLst>
+            <a:ext uri="{C572A759-6A51-4108-AA02-DFA0A04FC94B}">
+              <ma14:wrappingTextBoxFlag xmlns:ma14="http://schemas.microsoft.com/office/mac/drawingml/2011/main" val="0"/>
+            </a:ext>
+          </a:extLst>
+        </p:spPr>
+        <p:txBody>
+          <a:bodyPr/>
+          <a:lstStyle>
+            <a:lvl1pPr>
+              <a:defRPr sz="2000">
+                <a:solidFill>
+                  <a:srgbClr val="FFFFFF"/>
+                </a:solidFill>
+                <a:latin typeface="Calibri"/>
+                <a:ea typeface="Calibri"/>
+                <a:cs typeface="Calibri"/>
+              </a:defRPr>
+            </a:lvl1pPr>
+          </a:lstStyle>
+          <a:p>
+            <a:pPr algn="ctr"/>
+            <a:fld id="{F7021451-1387-4CA6-816F-3879F97B5CBC}" type="slidenum">
+              <a:rPr b="1" lang="en-US"/>
+              <a:t>43</a:t>
+            </a:fld>
+            <a:endParaRPr lang="en-US"/>
+          </a:p>
+        </p:txBody>
+      </p:sp>
+    </p:spTree>
+  </p:cSld>
+  <p:clrMapOvr>
+    <a:masterClrMapping/>
+  </p:clrMapOvr>
+</p:sld>
+</file>
+
+<file path=ppt/slides/slide44.xml><?xml version="1.0" encoding="utf-8"?>
+<p:sld xmlns:a="http://schemas.openxmlformats.org/drawingml/2006/main" xmlns:r="http://schemas.openxmlformats.org/officeDocument/2006/relationships" xmlns:p="http://schemas.openxmlformats.org/presentationml/2006/main">
+  <p:cSld name="Slide 44">
+    <p:spTree>
+      <p:nvGrpSpPr>
+        <p:cNvPr id="1" name=""/>
+        <p:cNvGrpSpPr/>
+        <p:nvPr/>
+      </p:nvGrpSpPr>
+      <p:grpSpPr>
+        <a:xfrm>
+          <a:off x="0" y="0"/>
+          <a:ext cx="0" cy="0"/>
+          <a:chOff x="0" y="0"/>
+          <a:chExt cx="0" cy="0"/>
+        </a:xfrm>
+      </p:grpSpPr>
+      <p:sp>
+        <p:nvSpPr>
+          <p:cNvPr id="2" name="Text 0"/>
+          <p:cNvSpPr/>
+          <p:nvPr/>
+        </p:nvSpPr>
+        <p:spPr>
+          <a:xfrm>
+            <a:off x="457200" y="713232"/>
+            <a:ext cx="11368735" cy="274320"/>
+          </a:xfrm>
+          <a:prstGeom prst="rect">
+            <a:avLst/>
+          </a:prstGeom>
+          <a:noFill/>
+          <a:ln/>
+        </p:spPr>
+        <p:txBody>
+          <a:bodyPr wrap="square" lIns="0" tIns="0" rIns="0" bIns="0" rtlCol="0" anchor="ctr"/>
+          <a:lstStyle/>
+          <a:p>
+            <a:pPr algn="r" indent="0" marL="0">
+              <a:buNone/>
+            </a:pPr>
+            <a:r>
+              <a:rPr lang="en-US" sz="1400" b="1" dirty="0">
+                <a:solidFill>
+                  <a:srgbClr val="1C3F6E"/>
+                </a:solidFill>
+                <a:latin typeface="Calibri" pitchFamily="34" charset="0"/>
+                <a:ea typeface="Calibri" pitchFamily="34" charset="-122"/>
+                <a:cs typeface="Calibri" pitchFamily="34" charset="-120"/>
+              </a:rPr>
+              <a:t>REMEDIATION</a:t>
+            </a:r>
+            <a:endParaRPr lang="en-US" sz="1400" dirty="0"/>
+          </a:p>
+        </p:txBody>
+      </p:sp>
+      <p:pic>
+        <p:nvPicPr>
+          <p:cNvPr id="3" name="Image 0" descr="/home/claude/f4/img/minesec_sheet.png">    </p:cNvPr>
+          <p:cNvPicPr>
+            <a:picLocks noChangeAspect="1"/>
+          </p:cNvPicPr>
+          <p:nvPr/>
+        </p:nvPicPr>
+        <p:blipFill>
+          <a:blip r:embed="rId1"/>
+          <a:stretch>
+            <a:fillRect/>
+          </a:stretch>
+        </p:blipFill>
+        <p:spPr>
+          <a:xfrm>
+            <a:off x="0" y="658368"/>
+            <a:ext cx="5120640" cy="5833872"/>
+          </a:xfrm>
+          <a:prstGeom prst="rect">
+            <a:avLst/>
+          </a:prstGeom>
+        </p:spPr>
+      </p:pic>
+      <p:sp>
+        <p:nvSpPr>
+          <p:cNvPr id="4" name="Text 1"/>
+          <p:cNvSpPr/>
+          <p:nvPr/>
+        </p:nvSpPr>
+        <p:spPr>
+          <a:xfrm>
+            <a:off x="5349240" y="1005840"/>
+            <a:ext cx="6522415" cy="731520"/>
+          </a:xfrm>
+          <a:prstGeom prst="rect">
+            <a:avLst/>
+          </a:prstGeom>
+          <a:noFill/>
+          <a:ln/>
+        </p:spPr>
+        <p:txBody>
+          <a:bodyPr wrap="square" lIns="0" tIns="0" rIns="0" bIns="0" rtlCol="0" anchor="ctr">
+            <a:normAutofit/>
+          </a:bodyPr>
+          <a:lstStyle/>
+          <a:p>
+            <a:pPr algn="ctr" indent="0" marL="0">
+              <a:buNone/>
+            </a:pPr>
+            <a:r>
+              <a:rPr lang="en-US" sz="3600" b="1" dirty="0">
+                <a:solidFill>
+                  <a:srgbClr val="990011"/>
+                </a:solidFill>
+                <a:latin typeface="Times New Roman" pitchFamily="34" charset="0"/>
+                <a:ea typeface="Times New Roman" pitchFamily="34" charset="-122"/>
+                <a:cs typeface="Times New Roman" pitchFamily="34" charset="-120"/>
+              </a:rPr>
+              <a:t>Remediation (continued)</a:t>
+            </a:r>
+            <a:endParaRPr lang="en-US" sz="3600" dirty="0"/>
+          </a:p>
+        </p:txBody>
+      </p:sp>
+      <p:sp>
+        <p:nvSpPr>
+          <p:cNvPr id="5" name="Text 2"/>
+          <p:cNvSpPr/>
+          <p:nvPr/>
+        </p:nvSpPr>
+        <p:spPr>
+          <a:xfrm>
+            <a:off x="5349240" y="1783080"/>
+            <a:ext cx="6522415" cy="4663440"/>
+          </a:xfrm>
+          <a:prstGeom prst="rect">
+            <a:avLst/>
+          </a:prstGeom>
+          <a:noFill/>
+          <a:ln/>
+        </p:spPr>
+        <p:txBody>
+          <a:bodyPr wrap="square" lIns="0" tIns="0" rIns="0" bIns="0" rtlCol="0" anchor="t"/>
+          <a:lstStyle/>
+          <a:p>
+            <a:pPr algn="l" marL="342900" indent="-342900">
+              <a:spcAft>
+                <a:spcPts val="800"/>
+              </a:spcAft>
+              <a:buSzPct val="100000"/>
+              <a:buFont typeface="+mj-lt"/>
+              <a:buAutoNum type="arabicPeriod" startAt="1"/>
+            </a:pPr>
+            <a:r>
+              <a:rPr lang="en-US" sz="4000" dirty="0">
+                <a:solidFill>
+                  <a:srgbClr val="111111"/>
+                </a:solidFill>
+                <a:latin typeface="Times New Roman" pitchFamily="34" charset="0"/>
+                <a:ea typeface="Times New Roman" pitchFamily="34" charset="-122"/>
+                <a:cs typeface="Times New Roman" pitchFamily="34" charset="-120"/>
+              </a:rPr>
+              <a:t>The deep valley below a waterfall is a ______.</a:t>
+            </a:r>
+            <a:endParaRPr lang="en-US" sz="4000" dirty="0"/>
+          </a:p>
+        </p:txBody>
+      </p:sp>
+      <p:sp>
+        <p:nvSpPr>
+          <p:cNvPr id="25" name="Slide Number Placeholder 0"/>
+          <p:cNvSpPr>
+            <a:spLocks noGrp="1"/>
+          </p:cNvSpPr>
+          <p:nvPr>
+            <p:ph type="sldNum" sz="quarter" idx="4294967295"/>
+          </p:nvPr>
+        </p:nvSpPr>
+        <p:spPr>
+          <a:xfrm>
+            <a:off x="27432" y="91440"/>
+            <a:ext cx="585216" cy="475488"/>
+          </a:xfrm>
+          <a:prstGeom prst="rect">
+            <a:avLst/>
+          </a:prstGeom>
+          <a:extLst>
+            <a:ext uri="{C572A759-6A51-4108-AA02-DFA0A04FC94B}">
+              <ma14:wrappingTextBoxFlag xmlns:ma14="http://schemas.microsoft.com/office/mac/drawingml/2011/main" val="0"/>
+            </a:ext>
+          </a:extLst>
+        </p:spPr>
+        <p:txBody>
+          <a:bodyPr/>
+          <a:lstStyle>
+            <a:lvl1pPr>
+              <a:defRPr sz="2000">
+                <a:solidFill>
+                  <a:srgbClr val="FFFFFF"/>
+                </a:solidFill>
+                <a:latin typeface="Calibri"/>
+                <a:ea typeface="Calibri"/>
+                <a:cs typeface="Calibri"/>
+              </a:defRPr>
+            </a:lvl1pPr>
+          </a:lstStyle>
+          <a:p>
+            <a:pPr algn="ctr"/>
+            <a:fld id="{F7021451-1387-4CA6-816F-3879F97B5CBC}" type="slidenum">
+              <a:rPr b="1" lang="en-US"/>
+              <a:t>44</a:t>
+            </a:fld>
+            <a:endParaRPr lang="en-US"/>
+          </a:p>
+        </p:txBody>
+      </p:sp>
+    </p:spTree>
+  </p:cSld>
+  <p:clrMapOvr>
+    <a:masterClrMapping/>
+  </p:clrMapOvr>
+</p:sld>
+</file>
+
+<file path=ppt/slides/slide45.xml><?xml version="1.0" encoding="utf-8"?>
+<p:sld xmlns:a="http://schemas.openxmlformats.org/drawingml/2006/main" xmlns:r="http://schemas.openxmlformats.org/officeDocument/2006/relationships" xmlns:p="http://schemas.openxmlformats.org/presentationml/2006/main">
+  <p:cSld name="Slide 45">
+    <p:spTree>
+      <p:nvGrpSpPr>
+        <p:cNvPr id="1" name=""/>
+        <p:cNvGrpSpPr/>
+        <p:nvPr/>
+      </p:nvGrpSpPr>
+      <p:grpSpPr>
+        <a:xfrm>
+          <a:off x="0" y="0"/>
+          <a:ext cx="0" cy="0"/>
+          <a:chOff x="0" y="0"/>
+          <a:chExt cx="0" cy="0"/>
+        </a:xfrm>
+      </p:grpSpPr>
+      <p:sp>
+        <p:nvSpPr>
+          <p:cNvPr id="2" name="Text 0"/>
+          <p:cNvSpPr/>
+          <p:nvPr/>
+        </p:nvSpPr>
+        <p:spPr>
+          <a:xfrm>
+            <a:off x="457200" y="713232"/>
+            <a:ext cx="11368735" cy="274320"/>
+          </a:xfrm>
+          <a:prstGeom prst="rect">
+            <a:avLst/>
+          </a:prstGeom>
+          <a:noFill/>
+          <a:ln/>
+        </p:spPr>
+        <p:txBody>
+          <a:bodyPr wrap="square" lIns="0" tIns="0" rIns="0" bIns="0" rtlCol="0" anchor="ctr"/>
+          <a:lstStyle/>
+          <a:p>
+            <a:pPr algn="r" indent="0" marL="0">
+              <a:buNone/>
+            </a:pPr>
+            <a:r>
+              <a:rPr lang="en-US" sz="1400" b="1" dirty="0">
+                <a:solidFill>
+                  <a:srgbClr val="1C3F6E"/>
+                </a:solidFill>
+                <a:latin typeface="Calibri" pitchFamily="34" charset="0"/>
+                <a:ea typeface="Calibri" pitchFamily="34" charset="-122"/>
+                <a:cs typeface="Calibri" pitchFamily="34" charset="-120"/>
+              </a:rPr>
+              <a:t>HOMEWORK</a:t>
+            </a:r>
+            <a:endParaRPr lang="en-US" sz="1400" dirty="0"/>
+          </a:p>
+        </p:txBody>
+      </p:sp>
+      <p:pic>
+        <p:nvPicPr>
+          <p:cNvPr id="3" name="Image 0" descr="/home/claude/f4/img/minesec_sheet.png">    </p:cNvPr>
+          <p:cNvPicPr>
+            <a:picLocks noChangeAspect="1"/>
+          </p:cNvPicPr>
+          <p:nvPr/>
+        </p:nvPicPr>
+        <p:blipFill>
+          <a:blip r:embed="rId1"/>
+          <a:stretch>
+            <a:fillRect/>
+          </a:stretch>
+        </p:blipFill>
+        <p:spPr>
+          <a:xfrm>
+            <a:off x="0" y="658368"/>
+            <a:ext cx="5120640" cy="5833872"/>
+          </a:xfrm>
+          <a:prstGeom prst="rect">
+            <a:avLst/>
+          </a:prstGeom>
+        </p:spPr>
+      </p:pic>
+      <p:sp>
+        <p:nvSpPr>
+          <p:cNvPr id="4" name="Text 1"/>
+          <p:cNvSpPr/>
+          <p:nvPr/>
+        </p:nvSpPr>
+        <p:spPr>
+          <a:xfrm>
+            <a:off x="5349240" y="1005840"/>
+            <a:ext cx="6522415" cy="731520"/>
+          </a:xfrm>
+          <a:prstGeom prst="rect">
+            <a:avLst/>
+          </a:prstGeom>
+          <a:noFill/>
+          <a:ln/>
+        </p:spPr>
+        <p:txBody>
+          <a:bodyPr wrap="square" lIns="0" tIns="0" rIns="0" bIns="0" rtlCol="0" anchor="ctr">
+            <a:normAutofit/>
+          </a:bodyPr>
+          <a:lstStyle/>
+          <a:p>
+            <a:pPr algn="ctr" indent="0" marL="0">
+              <a:buNone/>
+            </a:pPr>
+            <a:r>
+              <a:rPr lang="en-US" sz="3600" b="1" dirty="0">
+                <a:solidFill>
+                  <a:srgbClr val="990011"/>
+                </a:solidFill>
+                <a:latin typeface="Times New Roman" pitchFamily="34" charset="0"/>
+                <a:ea typeface="Times New Roman" pitchFamily="34" charset="-122"/>
+                <a:cs typeface="Times New Roman" pitchFamily="34" charset="-120"/>
+              </a:rPr>
+              <a:t>Homework</a:t>
+            </a:r>
+            <a:endParaRPr lang="en-US" sz="3600" dirty="0"/>
+          </a:p>
+        </p:txBody>
+      </p:sp>
+      <p:sp>
+        <p:nvSpPr>
+          <p:cNvPr id="5" name="Text 2"/>
+          <p:cNvSpPr/>
+          <p:nvPr/>
+        </p:nvSpPr>
+        <p:spPr>
+          <a:xfrm>
+            <a:off x="5349240" y="1783080"/>
+            <a:ext cx="6522415" cy="4663440"/>
+          </a:xfrm>
+          <a:prstGeom prst="rect">
+            <a:avLst/>
+          </a:prstGeom>
+          <a:noFill/>
+          <a:ln/>
+        </p:spPr>
+        <p:txBody>
+          <a:bodyPr wrap="square" lIns="0" tIns="0" rIns="0" bIns="0" rtlCol="0" anchor="t"/>
+          <a:lstStyle/>
+          <a:p>
+            <a:pPr algn="l" indent="0" marL="0">
+              <a:spcAft>
+                <a:spcPts val="800"/>
+              </a:spcAft>
+              <a:buNone/>
+            </a:pPr>
+            <a:r>
+              <a:rPr lang="en-US" sz="4000" dirty="0">
+                <a:solidFill>
+                  <a:srgbClr val="111111"/>
+                </a:solidFill>
+                <a:latin typeface="Times New Roman" pitchFamily="34" charset="0"/>
+                <a:ea typeface="Times New Roman" pitchFamily="34" charset="-122"/>
+                <a:cs typeface="Times New Roman" pitchFamily="34" charset="-120"/>
+              </a:rPr>
+              <a:t>Stand on the Benue Bridge in Garoua or look at a photo of it. Draw the river and its bends, and mark where the water seems fastest.</a:t>
+            </a:r>
+            <a:endParaRPr lang="en-US" sz="4000" dirty="0"/>
+          </a:p>
+        </p:txBody>
+      </p:sp>
+      <p:sp>
+        <p:nvSpPr>
+          <p:cNvPr id="25" name="Slide Number Placeholder 0"/>
+          <p:cNvSpPr>
+            <a:spLocks noGrp="1"/>
+          </p:cNvSpPr>
+          <p:nvPr>
+            <p:ph type="sldNum" sz="quarter" idx="4294967295"/>
+          </p:nvPr>
+        </p:nvSpPr>
+        <p:spPr>
+          <a:xfrm>
+            <a:off x="27432" y="91440"/>
+            <a:ext cx="585216" cy="475488"/>
+          </a:xfrm>
+          <a:prstGeom prst="rect">
+            <a:avLst/>
+          </a:prstGeom>
+          <a:extLst>
+            <a:ext uri="{C572A759-6A51-4108-AA02-DFA0A04FC94B}">
+              <ma14:wrappingTextBoxFlag xmlns:ma14="http://schemas.microsoft.com/office/mac/drawingml/2011/main" val="0"/>
+            </a:ext>
+          </a:extLst>
+        </p:spPr>
+        <p:txBody>
+          <a:bodyPr/>
+          <a:lstStyle>
+            <a:lvl1pPr>
+              <a:defRPr sz="2000">
+                <a:solidFill>
+                  <a:srgbClr val="FFFFFF"/>
+                </a:solidFill>
+                <a:latin typeface="Calibri"/>
+                <a:ea typeface="Calibri"/>
+                <a:cs typeface="Calibri"/>
+              </a:defRPr>
+            </a:lvl1pPr>
+          </a:lstStyle>
+          <a:p>
+            <a:pPr algn="ctr"/>
+            <a:fld id="{F7021451-1387-4CA6-816F-3879F97B5CBC}" type="slidenum">
+              <a:rPr b="1" lang="en-US"/>
+              <a:t>45</a:t>
+            </a:fld>
+            <a:endParaRPr lang="en-US"/>
+          </a:p>
+        </p:txBody>
+      </p:sp>
+    </p:spTree>
+  </p:cSld>
+  <p:clrMapOvr>
+    <a:masterClrMapping/>
+  </p:clrMapOvr>
+</p:sld>
+</file>
+
+<file path=ppt/slides/slide46.xml><?xml version="1.0" encoding="utf-8"?>
+<p:sld xmlns:a="http://schemas.openxmlformats.org/drawingml/2006/main" xmlns:r="http://schemas.openxmlformats.org/officeDocument/2006/relationships" xmlns:p="http://schemas.openxmlformats.org/presentationml/2006/main">
+  <p:cSld name="Slide 46">
+    <p:spTree>
+      <p:nvGrpSpPr>
+        <p:cNvPr id="1" name=""/>
+        <p:cNvGrpSpPr/>
+        <p:nvPr/>
+      </p:nvGrpSpPr>
+      <p:grpSpPr>
+        <a:xfrm>
+          <a:off x="0" y="0"/>
+          <a:ext cx="0" cy="0"/>
+          <a:chOff x="0" y="0"/>
+          <a:chExt cx="0" cy="0"/>
+        </a:xfrm>
+      </p:grpSpPr>
+      <p:sp>
+        <p:nvSpPr>
+          <p:cNvPr id="2" name="Text 0"/>
+          <p:cNvSpPr/>
+          <p:nvPr/>
+        </p:nvSpPr>
+        <p:spPr>
+          <a:xfrm>
+            <a:off x="457200" y="713232"/>
+            <a:ext cx="11368735" cy="274320"/>
+          </a:xfrm>
+          <a:prstGeom prst="rect">
+            <a:avLst/>
+          </a:prstGeom>
+          <a:noFill/>
+          <a:ln/>
+        </p:spPr>
+        <p:txBody>
+          <a:bodyPr wrap="square" lIns="0" tIns="0" rIns="0" bIns="0" rtlCol="0" anchor="ctr"/>
+          <a:lstStyle/>
+          <a:p>
+            <a:pPr algn="r" indent="0" marL="0">
+              <a:buNone/>
+            </a:pPr>
+            <a:r>
+              <a:rPr lang="en-US" sz="1400" b="1" dirty="0">
+                <a:solidFill>
+                  <a:srgbClr val="1C3F6E"/>
+                </a:solidFill>
+                <a:latin typeface="Calibri" pitchFamily="34" charset="0"/>
+                <a:ea typeface="Calibri" pitchFamily="34" charset="-122"/>
+                <a:cs typeface="Calibri" pitchFamily="34" charset="-120"/>
+              </a:rPr>
+              <a:t>NEXT LESSON</a:t>
+            </a:r>
+            <a:endParaRPr lang="en-US" sz="1400" dirty="0"/>
+          </a:p>
+        </p:txBody>
+      </p:sp>
+      <p:pic>
+        <p:nvPicPr>
+          <p:cNvPr id="3" name="Image 0" descr="/home/claude/f4/img/minesec_sheet.png">    </p:cNvPr>
+          <p:cNvPicPr>
+            <a:picLocks noChangeAspect="1"/>
+          </p:cNvPicPr>
+          <p:nvPr/>
+        </p:nvPicPr>
+        <p:blipFill>
+          <a:blip r:embed="rId1"/>
+          <a:stretch>
+            <a:fillRect/>
+          </a:stretch>
+        </p:blipFill>
+        <p:spPr>
+          <a:xfrm>
+            <a:off x="0" y="658368"/>
+            <a:ext cx="5120640" cy="5833872"/>
+          </a:xfrm>
+          <a:prstGeom prst="rect">
+            <a:avLst/>
+          </a:prstGeom>
+        </p:spPr>
+      </p:pic>
+      <p:sp>
+        <p:nvSpPr>
+          <p:cNvPr id="4" name="Text 1"/>
+          <p:cNvSpPr/>
+          <p:nvPr/>
+        </p:nvSpPr>
+        <p:spPr>
+          <a:xfrm>
+            <a:off x="5349240" y="1005840"/>
+            <a:ext cx="6522415" cy="731520"/>
+          </a:xfrm>
+          <a:prstGeom prst="rect">
+            <a:avLst/>
+          </a:prstGeom>
+          <a:noFill/>
+          <a:ln/>
+        </p:spPr>
+        <p:txBody>
+          <a:bodyPr wrap="square" lIns="0" tIns="0" rIns="0" bIns="0" rtlCol="0" anchor="ctr">
+            <a:normAutofit/>
+          </a:bodyPr>
+          <a:lstStyle/>
+          <a:p>
+            <a:pPr algn="ctr" indent="0" marL="0">
+              <a:buNone/>
+            </a:pPr>
+            <a:r>
+              <a:rPr lang="en-US" sz="3600" b="1" dirty="0">
+                <a:solidFill>
+                  <a:srgbClr val="990011"/>
+                </a:solidFill>
+                <a:latin typeface="Times New Roman" pitchFamily="34" charset="0"/>
+                <a:ea typeface="Times New Roman" pitchFamily="34" charset="-122"/>
+                <a:cs typeface="Times New Roman" pitchFamily="34" charset="-120"/>
+              </a:rPr>
+              <a:t>Next Lesson</a:t>
+            </a:r>
+            <a:endParaRPr lang="en-US" sz="3600" dirty="0"/>
+          </a:p>
+        </p:txBody>
+      </p:sp>
+      <p:sp>
+        <p:nvSpPr>
+          <p:cNvPr id="5" name="Text 2"/>
+          <p:cNvSpPr/>
+          <p:nvPr/>
+        </p:nvSpPr>
+        <p:spPr>
+          <a:xfrm>
+            <a:off x="5349240" y="1783080"/>
+            <a:ext cx="6522415" cy="4663440"/>
+          </a:xfrm>
+          <a:prstGeom prst="rect">
+            <a:avLst/>
+          </a:prstGeom>
+          <a:noFill/>
+          <a:ln/>
+        </p:spPr>
+        <p:txBody>
+          <a:bodyPr wrap="square" lIns="0" tIns="0" rIns="0" bIns="0" rtlCol="0" anchor="ctr"/>
+          <a:lstStyle/>
+          <a:p>
+            <a:pPr algn="ctr" indent="0" marL="0">
+              <a:spcAft>
+                <a:spcPts val="800"/>
+              </a:spcAft>
+              <a:buNone/>
+            </a:pPr>
+            <a:r>
+              <a:rPr lang="en-US" sz="4000" b="1" dirty="0">
+                <a:solidFill>
+                  <a:srgbClr val="111111"/>
+                </a:solidFill>
+                <a:latin typeface="Times New Roman" pitchFamily="34" charset="0"/>
+                <a:ea typeface="Times New Roman" pitchFamily="34" charset="-122"/>
+                <a:cs typeface="Times New Roman" pitchFamily="34" charset="-120"/>
+              </a:rPr>
+              <a:t>Our next lesson will be on:</a:t>
+            </a:r>
+            <a:endParaRPr lang="en-US" sz="4000" dirty="0"/>
+          </a:p>
+          <a:p>
+            <a:pPr algn="ctr" indent="0" marL="0">
+              <a:spcAft>
+                <a:spcPts val="800"/>
+              </a:spcAft>
+              <a:buNone/>
+            </a:pPr>
+            <a:r>
+              <a:rPr lang="en-US" sz="4000" b="1" dirty="0">
+                <a:solidFill>
+                  <a:srgbClr val="990011"/>
+                </a:solidFill>
+                <a:latin typeface="Times New Roman" pitchFamily="34" charset="0"/>
+                <a:ea typeface="Times New Roman" pitchFamily="34" charset="-122"/>
+                <a:cs typeface="Times New Roman" pitchFamily="34" charset="-120"/>
+              </a:rPr>
+              <a:t>Lesson 20: The Middle Course of a River</a:t>
+            </a:r>
+            <a:endParaRPr lang="en-US" sz="4000" dirty="0"/>
+          </a:p>
+        </p:txBody>
+      </p:sp>
+      <p:sp>
+        <p:nvSpPr>
+          <p:cNvPr id="25" name="Slide Number Placeholder 0"/>
+          <p:cNvSpPr>
+            <a:spLocks noGrp="1"/>
+          </p:cNvSpPr>
+          <p:nvPr>
+            <p:ph type="sldNum" sz="quarter" idx="4294967295"/>
+          </p:nvPr>
+        </p:nvSpPr>
+        <p:spPr>
+          <a:xfrm>
+            <a:off x="27432" y="91440"/>
+            <a:ext cx="585216" cy="475488"/>
+          </a:xfrm>
+          <a:prstGeom prst="rect">
+            <a:avLst/>
+          </a:prstGeom>
+          <a:extLst>
+            <a:ext uri="{C572A759-6A51-4108-AA02-DFA0A04FC94B}">
+              <ma14:wrappingTextBoxFlag xmlns:ma14="http://schemas.microsoft.com/office/mac/drawingml/2011/main" val="0"/>
+            </a:ext>
+          </a:extLst>
+        </p:spPr>
+        <p:txBody>
+          <a:bodyPr/>
+          <a:lstStyle>
+            <a:lvl1pPr>
+              <a:defRPr sz="2000">
+                <a:solidFill>
+                  <a:srgbClr val="FFFFFF"/>
+                </a:solidFill>
+                <a:latin typeface="Calibri"/>
+                <a:ea typeface="Calibri"/>
+                <a:cs typeface="Calibri"/>
+              </a:defRPr>
+            </a:lvl1pPr>
+          </a:lstStyle>
+          <a:p>
+            <a:pPr algn="ctr"/>
+            <a:fld id="{F7021451-1387-4CA6-816F-3879F97B5CBC}" type="slidenum">
+              <a:rPr b="1" lang="en-US"/>
+              <a:t>46</a:t>
+            </a:fld>
+            <a:endParaRPr lang="en-US"/>
+          </a:p>
+        </p:txBody>
+      </p:sp>
+    </p:spTree>
+  </p:cSld>
+  <p:clrMapOvr>
+    <a:masterClrMapping/>
+  </p:clrMapOvr>
+</p:sld>
+</file>
+
+<file path=ppt/slides/slide47.xml><?xml version="1.0" encoding="utf-8"?>
+<p:sld xmlns:a="http://schemas.openxmlformats.org/drawingml/2006/main" xmlns:r="http://schemas.openxmlformats.org/officeDocument/2006/relationships" xmlns:p="http://schemas.openxmlformats.org/presentationml/2006/main">
+  <p:cSld name="Slide 47">
+    <p:spTree>
+      <p:nvGrpSpPr>
+        <p:cNvPr id="1" name=""/>
+        <p:cNvGrpSpPr/>
+        <p:nvPr/>
+      </p:nvGrpSpPr>
+      <p:grpSpPr>
+        <a:xfrm>
+          <a:off x="0" y="0"/>
+          <a:ext cx="0" cy="0"/>
+          <a:chOff x="0" y="0"/>
+          <a:chExt cx="0" cy="0"/>
+        </a:xfrm>
+      </p:grpSpPr>
+      <p:sp>
+        <p:nvSpPr>
+          <p:cNvPr id="2" name="Text 0"/>
+          <p:cNvSpPr/>
+          <p:nvPr/>
+        </p:nvSpPr>
+        <p:spPr>
+          <a:xfrm>
+            <a:off x="457200" y="713232"/>
+            <a:ext cx="11368735" cy="274320"/>
+          </a:xfrm>
+          <a:prstGeom prst="rect">
+            <a:avLst/>
+          </a:prstGeom>
+          <a:noFill/>
+          <a:ln/>
+        </p:spPr>
+        <p:txBody>
+          <a:bodyPr wrap="square" lIns="0" tIns="0" rIns="0" bIns="0" rtlCol="0" anchor="ctr"/>
+          <a:lstStyle/>
+          <a:p>
+            <a:pPr algn="r" indent="0" marL="0">
+              <a:buNone/>
+            </a:pPr>
+            <a:r>
+              <a:rPr lang="en-US" sz="1400" b="1" dirty="0">
+                <a:solidFill>
+                  <a:srgbClr val="1C3F6E"/>
+                </a:solidFill>
+                <a:latin typeface="Calibri" pitchFamily="34" charset="0"/>
+                <a:ea typeface="Calibri" pitchFamily="34" charset="-122"/>
+                <a:cs typeface="Calibri" pitchFamily="34" charset="-120"/>
+              </a:rPr>
               <a:t>BILINGUAL GAME</a:t>
             </a:r>
             <a:endParaRPr lang="en-US" sz="1400" dirty="0"/>
@@ -15104,7 +16854,7 @@
       </p:sp>
       <p:graphicFrame>
         <p:nvGraphicFramePr>
-          <p:cNvPr id="43" name="Table 0"/>
+          <p:cNvPr id="48" name="Table 0"/>
           <p:cNvGraphicFramePr>
             <a:graphicFrameLocks noGrp="1"/>
           </p:cNvGraphicFramePr>
@@ -16416,7 +18166,7 @@
             <a:pPr algn="ctr"/>
             <a:fld id="{F7021451-1387-4CA6-816F-3879F97B5CBC}" type="slidenum">
               <a:rPr b="1" lang="en-US"/>
-              <a:t>42</a:t>
+              <a:t>47</a:t>
             </a:fld>
             <a:endParaRPr lang="en-US"/>
           </a:p>
@@ -16430,9 +18180,9 @@
 </p:sld>
 </file>
 
-<file path=ppt/slides/slide43.xml><?xml version="1.0" encoding="utf-8"?>
+<file path=ppt/slides/slide48.xml><?xml version="1.0" encoding="utf-8"?>
 <p:sld xmlns:a="http://schemas.openxmlformats.org/drawingml/2006/main" xmlns:r="http://schemas.openxmlformats.org/officeDocument/2006/relationships" xmlns:p="http://schemas.openxmlformats.org/presentationml/2006/main">
-  <p:cSld name="Slide 43">
+  <p:cSld name="Slide 48">
     <p:spTree>
       <p:nvGrpSpPr>
         <p:cNvPr id="1" name=""/>
@@ -16527,7 +18277,7 @@
       </p:sp>
       <p:graphicFrame>
         <p:nvGraphicFramePr>
-          <p:cNvPr id="44" name="Table 0"/>
+          <p:cNvPr id="49" name="Table 0"/>
           <p:cNvGraphicFramePr>
             <a:graphicFrameLocks noGrp="1"/>
           </p:cNvGraphicFramePr>
@@ -17149,7 +18899,7 @@
             <a:pPr algn="ctr"/>
             <a:fld id="{F7021451-1387-4CA6-816F-3879F97B5CBC}" type="slidenum">
               <a:rPr b="1" lang="en-US"/>
-              <a:t>43</a:t>
+              <a:t>48</a:t>
             </a:fld>
             <a:endParaRPr lang="en-US"/>
           </a:p>
@@ -17163,9 +18913,9 @@
 </p:sld>
 </file>
 
-<file path=ppt/slides/slide44.xml><?xml version="1.0" encoding="utf-8"?>
+<file path=ppt/slides/slide49.xml><?xml version="1.0" encoding="utf-8"?>
 <p:sld xmlns:a="http://schemas.openxmlformats.org/drawingml/2006/main" xmlns:r="http://schemas.openxmlformats.org/officeDocument/2006/relationships" xmlns:p="http://schemas.openxmlformats.org/presentationml/2006/main">
-  <p:cSld name="Slide 44">
+  <p:cSld name="Slide 49">
     <p:spTree>
       <p:nvGrpSpPr>
         <p:cNvPr id="1" name=""/>
@@ -17260,7 +19010,7 @@
       </p:sp>
       <p:graphicFrame>
         <p:nvGraphicFramePr>
-          <p:cNvPr id="45" name="Table 0"/>
+          <p:cNvPr id="50" name="Table 0"/>
           <p:cNvGraphicFramePr>
             <a:graphicFrameLocks noGrp="1"/>
           </p:cNvGraphicFramePr>
@@ -17370,7 +19120,7 @@
                           <a:ea typeface="Calibri" pitchFamily="34" charset="-122"/>
                           <a:cs typeface="Calibri" pitchFamily="34" charset="-120"/>
                         </a:rPr>
-                        <a:t>Characteristics of the Upper Course; Landforms of the Upper Course.</a:t>
+                        <a:t>DEFINITIONS; Main Characteristics and Processes of the Upper Course; Landforms of the Upper Course.</a:t>
                       </a:r>
                       <a:endParaRPr lang="en-US" sz="1600" dirty="0">
                         <a:latin typeface="Calibri" charset="0"/>
@@ -18020,594 +19770,7 @@
             <a:pPr algn="ctr"/>
             <a:fld id="{F7021451-1387-4CA6-816F-3879F97B5CBC}" type="slidenum">
               <a:rPr b="1" lang="en-US"/>
-              <a:t>44</a:t>
-            </a:fld>
-            <a:endParaRPr lang="en-US"/>
-          </a:p>
-        </p:txBody>
-      </p:sp>
-    </p:spTree>
-  </p:cSld>
-  <p:clrMapOvr>
-    <a:masterClrMapping/>
-  </p:clrMapOvr>
-</p:sld>
-</file>
-
-<file path=ppt/slides/slide45.xml><?xml version="1.0" encoding="utf-8"?>
-<p:sld xmlns:a="http://schemas.openxmlformats.org/drawingml/2006/main" xmlns:r="http://schemas.openxmlformats.org/officeDocument/2006/relationships" xmlns:p="http://schemas.openxmlformats.org/presentationml/2006/main">
-  <p:cSld name="Slide 45">
-    <p:spTree>
-      <p:nvGrpSpPr>
-        <p:cNvPr id="1" name=""/>
-        <p:cNvGrpSpPr/>
-        <p:nvPr/>
-      </p:nvGrpSpPr>
-      <p:grpSpPr>
-        <a:xfrm>
-          <a:off x="0" y="0"/>
-          <a:ext cx="0" cy="0"/>
-          <a:chOff x="0" y="0"/>
-          <a:chExt cx="0" cy="0"/>
-        </a:xfrm>
-      </p:grpSpPr>
-      <p:sp>
-        <p:nvSpPr>
-          <p:cNvPr id="2" name="Text 0"/>
-          <p:cNvSpPr/>
-          <p:nvPr/>
-        </p:nvSpPr>
-        <p:spPr>
-          <a:xfrm>
-            <a:off x="457200" y="713232"/>
-            <a:ext cx="11368735" cy="274320"/>
-          </a:xfrm>
-          <a:prstGeom prst="rect">
-            <a:avLst/>
-          </a:prstGeom>
-          <a:noFill/>
-          <a:ln/>
-        </p:spPr>
-        <p:txBody>
-          <a:bodyPr wrap="square" lIns="0" tIns="0" rIns="0" bIns="0" rtlCol="0" anchor="ctr"/>
-          <a:lstStyle/>
-          <a:p>
-            <a:pPr algn="r" indent="0" marL="0">
-              <a:buNone/>
-            </a:pPr>
-            <a:r>
-              <a:rPr lang="en-US" sz="1400" b="1" dirty="0">
-                <a:solidFill>
-                  <a:srgbClr val="1C3F6E"/>
-                </a:solidFill>
-                <a:latin typeface="Calibri" pitchFamily="34" charset="0"/>
-                <a:ea typeface="Calibri" pitchFamily="34" charset="-122"/>
-                <a:cs typeface="Calibri" pitchFamily="34" charset="-120"/>
-              </a:rPr>
-              <a:t>TEACHER'S NOTE</a:t>
-            </a:r>
-            <a:endParaRPr lang="en-US" sz="1400" dirty="0"/>
-          </a:p>
-        </p:txBody>
-      </p:sp>
-      <p:pic>
-        <p:nvPicPr>
-          <p:cNvPr id="3" name="Image 0" descr="/home/claude/f4/img/minesec_sheet.png">    </p:cNvPr>
-          <p:cNvPicPr>
-            <a:picLocks noChangeAspect="1"/>
-          </p:cNvPicPr>
-          <p:nvPr/>
-        </p:nvPicPr>
-        <p:blipFill>
-          <a:blip r:embed="rId1"/>
-          <a:stretch>
-            <a:fillRect/>
-          </a:stretch>
-        </p:blipFill>
-        <p:spPr>
-          <a:xfrm>
-            <a:off x="0" y="658368"/>
-            <a:ext cx="5120640" cy="5833872"/>
-          </a:xfrm>
-          <a:prstGeom prst="rect">
-            <a:avLst/>
-          </a:prstGeom>
-        </p:spPr>
-      </p:pic>
-      <p:sp>
-        <p:nvSpPr>
-          <p:cNvPr id="4" name="Text 1"/>
-          <p:cNvSpPr/>
-          <p:nvPr/>
-        </p:nvSpPr>
-        <p:spPr>
-          <a:xfrm>
-            <a:off x="5349240" y="1005840"/>
-            <a:ext cx="6522415" cy="731520"/>
-          </a:xfrm>
-          <a:prstGeom prst="rect">
-            <a:avLst/>
-          </a:prstGeom>
-          <a:noFill/>
-          <a:ln/>
-        </p:spPr>
-        <p:txBody>
-          <a:bodyPr wrap="square" lIns="0" tIns="0" rIns="0" bIns="0" rtlCol="0" anchor="ctr">
-            <a:normAutofit/>
-          </a:bodyPr>
-          <a:lstStyle/>
-          <a:p>
-            <a:pPr algn="ctr" indent="0" marL="0">
-              <a:buNone/>
-            </a:pPr>
-            <a:r>
-              <a:rPr lang="en-US" sz="3600" b="1" dirty="0">
-                <a:solidFill>
-                  <a:srgbClr val="990011"/>
-                </a:solidFill>
-                <a:latin typeface="Times New Roman" pitchFamily="34" charset="0"/>
-                <a:ea typeface="Times New Roman" pitchFamily="34" charset="-122"/>
-                <a:cs typeface="Times New Roman" pitchFamily="34" charset="-120"/>
-              </a:rPr>
-              <a:t>Teacher's Note</a:t>
-            </a:r>
-            <a:endParaRPr lang="en-US" sz="3600" dirty="0"/>
-          </a:p>
-        </p:txBody>
-      </p:sp>
-      <p:sp>
-        <p:nvSpPr>
-          <p:cNvPr id="5" name="Text 2"/>
-          <p:cNvSpPr/>
-          <p:nvPr/>
-        </p:nvSpPr>
-        <p:spPr>
-          <a:xfrm>
-            <a:off x="5349240" y="1783080"/>
-            <a:ext cx="6522415" cy="4663440"/>
-          </a:xfrm>
-          <a:prstGeom prst="rect">
-            <a:avLst/>
-          </a:prstGeom>
-          <a:noFill/>
-          <a:ln/>
-        </p:spPr>
-        <p:txBody>
-          <a:bodyPr wrap="square" lIns="0" tIns="0" rIns="0" bIns="0" rtlCol="0" anchor="t"/>
-          <a:lstStyle/>
-          <a:p>
-            <a:pPr algn="l" marL="342900" indent="-342900">
-              <a:spcAft>
-                <a:spcPts val="800"/>
-              </a:spcAft>
-              <a:buSzPct val="100000"/>
-              <a:buChar char="•"/>
-            </a:pPr>
-            <a:r>
-              <a:rPr lang="en-US" sz="2000" dirty="0">
-                <a:solidFill>
-                  <a:srgbClr val="111111"/>
-                </a:solidFill>
-                <a:latin typeface="Calibri" pitchFamily="34" charset="0"/>
-                <a:ea typeface="Calibri" pitchFamily="34" charset="-122"/>
-                <a:cs typeface="Calibri" pitchFamily="34" charset="-120"/>
-              </a:rPr>
-              <a:t>Timing: Homework correction, plan, objectives 4 min | Recall, situation, action 6 min | 3 activities 12 min | Board summary (copying) 15 min | Evaluation, remediation 5 min | Homework, next lesson 3 min | Logbook 5 min</a:t>
-            </a:r>
-            <a:endParaRPr lang="en-US" sz="2000" dirty="0"/>
-          </a:p>
-          <a:p>
-            <a:pPr algn="l" marL="342900" indent="-342900">
-              <a:spcAft>
-                <a:spcPts val="800"/>
-              </a:spcAft>
-              <a:buSzPct val="100000"/>
-              <a:buChar char="•"/>
-            </a:pPr>
-            <a:r>
-              <a:rPr lang="en-US" sz="2000" dirty="0">
-                <a:solidFill>
-                  <a:srgbClr val="111111"/>
-                </a:solidFill>
-                <a:latin typeface="Calibri" pitchFamily="34" charset="0"/>
-                <a:ea typeface="Calibri" pitchFamily="34" charset="-122"/>
-                <a:cs typeface="Calibri" pitchFamily="34" charset="-120"/>
-              </a:rPr>
-              <a:t>Activity 3 is an animation (GIF): it plays automatically in slide-show mode.</a:t>
-            </a:r>
-            <a:endParaRPr lang="en-US" sz="2000" dirty="0"/>
-          </a:p>
-          <a:p>
-            <a:pPr algn="l" marL="342900" indent="-342900">
-              <a:spcAft>
-                <a:spcPts val="800"/>
-              </a:spcAft>
-              <a:buSzPct val="100000"/>
-              <a:buChar char="•"/>
-            </a:pPr>
-            <a:r>
-              <a:rPr lang="en-US" sz="2000" dirty="0">
-                <a:solidFill>
-                  <a:srgbClr val="111111"/>
-                </a:solidFill>
-                <a:latin typeface="Calibri" pitchFamily="34" charset="0"/>
-                <a:ea typeface="Calibri" pitchFamily="34" charset="-122"/>
-                <a:cs typeface="Calibri" pitchFamily="34" charset="-120"/>
-              </a:rPr>
-              <a:t>Without the projector (Activity 1): draw a V on the board.</a:t>
-            </a:r>
-            <a:endParaRPr lang="en-US" sz="2000" dirty="0"/>
-          </a:p>
-          <a:p>
-            <a:pPr algn="l" marL="342900" indent="-342900">
-              <a:spcAft>
-                <a:spcPts val="800"/>
-              </a:spcAft>
-              <a:buSzPct val="100000"/>
-              <a:buChar char="•"/>
-            </a:pPr>
-            <a:r>
-              <a:rPr lang="en-US" sz="2000" dirty="0">
-                <a:solidFill>
-                  <a:srgbClr val="111111"/>
-                </a:solidFill>
-                <a:latin typeface="Calibri" pitchFamily="34" charset="0"/>
-                <a:ea typeface="Calibri" pitchFamily="34" charset="-122"/>
-                <a:cs typeface="Calibri" pitchFamily="34" charset="-120"/>
-              </a:rPr>
-              <a:t>Without the projector (Activity 2): describe the Vina Falls near Ngaoundéré.</a:t>
-            </a:r>
-            <a:endParaRPr lang="en-US" sz="2000" dirty="0"/>
-          </a:p>
-          <a:p>
-            <a:pPr algn="l" marL="342900" indent="-342900">
-              <a:spcAft>
-                <a:spcPts val="800"/>
-              </a:spcAft>
-              <a:buSzPct val="100000"/>
-              <a:buChar char="•"/>
-            </a:pPr>
-            <a:r>
-              <a:rPr lang="en-US" sz="2000" dirty="0">
-                <a:solidFill>
-                  <a:srgbClr val="111111"/>
-                </a:solidFill>
-                <a:latin typeface="Calibri" pitchFamily="34" charset="0"/>
-                <a:ea typeface="Calibri" pitchFamily="34" charset="-122"/>
-                <a:cs typeface="Calibri" pitchFamily="34" charset="-120"/>
-              </a:rPr>
-              <a:t>Without the projector (Activity 3): draw the hard rock on top of soft rock.</a:t>
-            </a:r>
-            <a:endParaRPr lang="en-US" sz="2000" dirty="0"/>
-          </a:p>
-        </p:txBody>
-      </p:sp>
-      <p:sp>
-        <p:nvSpPr>
-          <p:cNvPr id="25" name="Slide Number Placeholder 0"/>
-          <p:cNvSpPr>
-            <a:spLocks noGrp="1"/>
-          </p:cNvSpPr>
-          <p:nvPr>
-            <p:ph type="sldNum" sz="quarter" idx="4294967295"/>
-          </p:nvPr>
-        </p:nvSpPr>
-        <p:spPr>
-          <a:xfrm>
-            <a:off x="27432" y="91440"/>
-            <a:ext cx="585216" cy="475488"/>
-          </a:xfrm>
-          <a:prstGeom prst="rect">
-            <a:avLst/>
-          </a:prstGeom>
-          <a:extLst>
-            <a:ext uri="{C572A759-6A51-4108-AA02-DFA0A04FC94B}">
-              <ma14:wrappingTextBoxFlag xmlns:ma14="http://schemas.microsoft.com/office/mac/drawingml/2011/main" val="0"/>
-            </a:ext>
-          </a:extLst>
-        </p:spPr>
-        <p:txBody>
-          <a:bodyPr/>
-          <a:lstStyle>
-            <a:lvl1pPr>
-              <a:defRPr sz="2000">
-                <a:solidFill>
-                  <a:srgbClr val="FFFFFF"/>
-                </a:solidFill>
-                <a:latin typeface="Calibri"/>
-                <a:ea typeface="Calibri"/>
-                <a:cs typeface="Calibri"/>
-              </a:defRPr>
-            </a:lvl1pPr>
-          </a:lstStyle>
-          <a:p>
-            <a:pPr algn="ctr"/>
-            <a:fld id="{F7021451-1387-4CA6-816F-3879F97B5CBC}" type="slidenum">
-              <a:rPr b="1" lang="en-US"/>
-              <a:t>45</a:t>
-            </a:fld>
-            <a:endParaRPr lang="en-US"/>
-          </a:p>
-        </p:txBody>
-      </p:sp>
-    </p:spTree>
-  </p:cSld>
-  <p:clrMapOvr>
-    <a:masterClrMapping/>
-  </p:clrMapOvr>
-</p:sld>
-</file>
-
-<file path=ppt/slides/slide46.xml><?xml version="1.0" encoding="utf-8"?>
-<p:sld xmlns:a="http://schemas.openxmlformats.org/drawingml/2006/main" xmlns:r="http://schemas.openxmlformats.org/officeDocument/2006/relationships" xmlns:p="http://schemas.openxmlformats.org/presentationml/2006/main">
-  <p:cSld name="Slide 46">
-    <p:spTree>
-      <p:nvGrpSpPr>
-        <p:cNvPr id="1" name=""/>
-        <p:cNvGrpSpPr/>
-        <p:nvPr/>
-      </p:nvGrpSpPr>
-      <p:grpSpPr>
-        <a:xfrm>
-          <a:off x="0" y="0"/>
-          <a:ext cx="0" cy="0"/>
-          <a:chOff x="0" y="0"/>
-          <a:chExt cx="0" cy="0"/>
-        </a:xfrm>
-      </p:grpSpPr>
-      <p:sp>
-        <p:nvSpPr>
-          <p:cNvPr id="2" name="Text 0"/>
-          <p:cNvSpPr/>
-          <p:nvPr/>
-        </p:nvSpPr>
-        <p:spPr>
-          <a:xfrm>
-            <a:off x="457200" y="713232"/>
-            <a:ext cx="11368735" cy="274320"/>
-          </a:xfrm>
-          <a:prstGeom prst="rect">
-            <a:avLst/>
-          </a:prstGeom>
-          <a:noFill/>
-          <a:ln/>
-        </p:spPr>
-        <p:txBody>
-          <a:bodyPr wrap="square" lIns="0" tIns="0" rIns="0" bIns="0" rtlCol="0" anchor="ctr"/>
-          <a:lstStyle/>
-          <a:p>
-            <a:pPr algn="r" indent="0" marL="0">
-              <a:buNone/>
-            </a:pPr>
-            <a:r>
-              <a:rPr lang="en-US" sz="1400" b="1" dirty="0">
-                <a:solidFill>
-                  <a:srgbClr val="1C3F6E"/>
-                </a:solidFill>
-                <a:latin typeface="Calibri" pitchFamily="34" charset="0"/>
-                <a:ea typeface="Calibri" pitchFamily="34" charset="-122"/>
-                <a:cs typeface="Calibri" pitchFamily="34" charset="-120"/>
-              </a:rPr>
-              <a:t>REFERENCES</a:t>
-            </a:r>
-            <a:endParaRPr lang="en-US" sz="1400" dirty="0"/>
-          </a:p>
-        </p:txBody>
-      </p:sp>
-      <p:pic>
-        <p:nvPicPr>
-          <p:cNvPr id="3" name="Image 0" descr="/home/claude/f4/img/minesec_sheet.png">    </p:cNvPr>
-          <p:cNvPicPr>
-            <a:picLocks noChangeAspect="1"/>
-          </p:cNvPicPr>
-          <p:nvPr/>
-        </p:nvPicPr>
-        <p:blipFill>
-          <a:blip r:embed="rId1"/>
-          <a:stretch>
-            <a:fillRect/>
-          </a:stretch>
-        </p:blipFill>
-        <p:spPr>
-          <a:xfrm>
-            <a:off x="0" y="658368"/>
-            <a:ext cx="5120640" cy="5833872"/>
-          </a:xfrm>
-          <a:prstGeom prst="rect">
-            <a:avLst/>
-          </a:prstGeom>
-        </p:spPr>
-      </p:pic>
-      <p:sp>
-        <p:nvSpPr>
-          <p:cNvPr id="4" name="Text 1"/>
-          <p:cNvSpPr/>
-          <p:nvPr/>
-        </p:nvSpPr>
-        <p:spPr>
-          <a:xfrm>
-            <a:off x="5349240" y="1005840"/>
-            <a:ext cx="6522415" cy="731520"/>
-          </a:xfrm>
-          <a:prstGeom prst="rect">
-            <a:avLst/>
-          </a:prstGeom>
-          <a:noFill/>
-          <a:ln/>
-        </p:spPr>
-        <p:txBody>
-          <a:bodyPr wrap="square" lIns="0" tIns="0" rIns="0" bIns="0" rtlCol="0" anchor="ctr">
-            <a:normAutofit/>
-          </a:bodyPr>
-          <a:lstStyle/>
-          <a:p>
-            <a:pPr algn="ctr" indent="0" marL="0">
-              <a:buNone/>
-            </a:pPr>
-            <a:r>
-              <a:rPr lang="en-US" sz="3600" b="1" dirty="0">
-                <a:solidFill>
-                  <a:srgbClr val="990011"/>
-                </a:solidFill>
-                <a:latin typeface="Times New Roman" pitchFamily="34" charset="0"/>
-                <a:ea typeface="Times New Roman" pitchFamily="34" charset="-122"/>
-                <a:cs typeface="Times New Roman" pitchFamily="34" charset="-120"/>
-              </a:rPr>
-              <a:t>References</a:t>
-            </a:r>
-            <a:endParaRPr lang="en-US" sz="3600" dirty="0"/>
-          </a:p>
-        </p:txBody>
-      </p:sp>
-      <p:sp>
-        <p:nvSpPr>
-          <p:cNvPr id="5" name="Text 2"/>
-          <p:cNvSpPr/>
-          <p:nvPr/>
-        </p:nvSpPr>
-        <p:spPr>
-          <a:xfrm>
-            <a:off x="5349240" y="1783080"/>
-            <a:ext cx="6522415" cy="4663440"/>
-          </a:xfrm>
-          <a:prstGeom prst="rect">
-            <a:avLst/>
-          </a:prstGeom>
-          <a:noFill/>
-          <a:ln/>
-        </p:spPr>
-        <p:txBody>
-          <a:bodyPr wrap="square" lIns="0" tIns="0" rIns="0" bIns="0" rtlCol="0" anchor="t"/>
-          <a:lstStyle/>
-          <a:p>
-            <a:pPr algn="l" marL="342900" indent="-342900">
-              <a:spcAft>
-                <a:spcPts val="800"/>
-              </a:spcAft>
-              <a:buSzPct val="100000"/>
-              <a:buChar char="•"/>
-            </a:pPr>
-            <a:r>
-              <a:rPr lang="en-US" sz="1800" dirty="0">
-                <a:solidFill>
-                  <a:srgbClr val="111111"/>
-                </a:solidFill>
-                <a:latin typeface="Calibri" pitchFamily="34" charset="0"/>
-                <a:ea typeface="Calibri" pitchFamily="34" charset="-122"/>
-                <a:cs typeface="Calibri" pitchFamily="34" charset="-120"/>
-              </a:rPr>
-              <a:t>National Geography Syllabus (MINESEC), Form 4 — Denudation Processes, Landforms and Impacts on Man.</a:t>
-            </a:r>
-            <a:endParaRPr lang="en-US" sz="1800" dirty="0"/>
-          </a:p>
-          <a:p>
-            <a:pPr algn="l" marL="342900" indent="-342900">
-              <a:spcAft>
-                <a:spcPts val="800"/>
-              </a:spcAft>
-              <a:buSzPct val="100000"/>
-              <a:buChar char="•"/>
-            </a:pPr>
-            <a:r>
-              <a:rPr lang="en-US" sz="1800" dirty="0">
-                <a:solidFill>
-                  <a:srgbClr val="111111"/>
-                </a:solidFill>
-                <a:latin typeface="Calibri" pitchFamily="34" charset="0"/>
-                <a:ea typeface="Calibri" pitchFamily="34" charset="-122"/>
-                <a:cs typeface="Calibri" pitchFamily="34" charset="-120"/>
-              </a:rPr>
-              <a:t>Teacher's lesson notes (Form 4), checked and corrected where necessary.</a:t>
-            </a:r>
-            <a:endParaRPr lang="en-US" sz="1800" dirty="0"/>
-          </a:p>
-          <a:p>
-            <a:pPr algn="l" marL="342900" indent="-342900">
-              <a:spcAft>
-                <a:spcPts val="800"/>
-              </a:spcAft>
-              <a:buSzPct val="100000"/>
-              <a:buChar char="•"/>
-            </a:pPr>
-            <a:r>
-              <a:rPr lang="en-US" sz="1800" dirty="0">
-                <a:solidFill>
-                  <a:srgbClr val="111111"/>
-                </a:solidFill>
-                <a:latin typeface="Calibri" pitchFamily="34" charset="0"/>
-                <a:ea typeface="Calibri" pitchFamily="34" charset="-122"/>
-                <a:cs typeface="Calibri" pitchFamily="34" charset="-120"/>
-              </a:rPr>
-              <a:t>Photo, Activity 2: “Ekom-Nkam waterfall” by jbdodane, CC BY-NC 2.0, via Flickr (https://www.flickr.com/photos/27998473@N02/11291226526)</a:t>
-            </a:r>
-            <a:endParaRPr lang="en-US" sz="1800" dirty="0"/>
-          </a:p>
-          <a:p>
-            <a:pPr algn="l" marL="342900" indent="-342900">
-              <a:spcAft>
-                <a:spcPts val="800"/>
-              </a:spcAft>
-              <a:buSzPct val="100000"/>
-              <a:buChar char="•"/>
-            </a:pPr>
-            <a:r>
-              <a:rPr lang="en-US" sz="1800" dirty="0">
-                <a:solidFill>
-                  <a:srgbClr val="111111"/>
-                </a:solidFill>
-                <a:latin typeface="Calibri" pitchFamily="34" charset="0"/>
-                <a:ea typeface="Calibri" pitchFamily="34" charset="-122"/>
-                <a:cs typeface="Calibri" pitchFamily="34" charset="-120"/>
-              </a:rPr>
-              <a:t>Diagrams and animations: drawn for this lesson (Geography Department).</a:t>
-            </a:r>
-            <a:endParaRPr lang="en-US" sz="1800" dirty="0"/>
-          </a:p>
-        </p:txBody>
-      </p:sp>
-      <p:sp>
-        <p:nvSpPr>
-          <p:cNvPr id="25" name="Slide Number Placeholder 0"/>
-          <p:cNvSpPr>
-            <a:spLocks noGrp="1"/>
-          </p:cNvSpPr>
-          <p:nvPr>
-            <p:ph type="sldNum" sz="quarter" idx="4294967295"/>
-          </p:nvPr>
-        </p:nvSpPr>
-        <p:spPr>
-          <a:xfrm>
-            <a:off x="27432" y="91440"/>
-            <a:ext cx="585216" cy="475488"/>
-          </a:xfrm>
-          <a:prstGeom prst="rect">
-            <a:avLst/>
-          </a:prstGeom>
-          <a:extLst>
-            <a:ext uri="{C572A759-6A51-4108-AA02-DFA0A04FC94B}">
-              <ma14:wrappingTextBoxFlag xmlns:ma14="http://schemas.microsoft.com/office/mac/drawingml/2011/main" val="0"/>
-            </a:ext>
-          </a:extLst>
-        </p:spPr>
-        <p:txBody>
-          <a:bodyPr/>
-          <a:lstStyle>
-            <a:lvl1pPr>
-              <a:defRPr sz="2000">
-                <a:solidFill>
-                  <a:srgbClr val="FFFFFF"/>
-                </a:solidFill>
-                <a:latin typeface="Calibri"/>
-                <a:ea typeface="Calibri"/>
-                <a:cs typeface="Calibri"/>
-              </a:defRPr>
-            </a:lvl1pPr>
-          </a:lstStyle>
-          <a:p>
-            <a:pPr algn="ctr"/>
-            <a:fld id="{F7021451-1387-4CA6-816F-3879F97B5CBC}" type="slidenum">
-              <a:rPr b="1" lang="en-US"/>
-              <a:t>46</a:t>
+              <a:t>49</a:t>
             </a:fld>
             <a:endParaRPr lang="en-US"/>
           </a:p>
@@ -18827,6 +19990,593 @@
             <a:fld id="{F7021451-1387-4CA6-816F-3879F97B5CBC}" type="slidenum">
               <a:rPr b="1" lang="en-US"/>
               <a:t>5</a:t>
+            </a:fld>
+            <a:endParaRPr lang="en-US"/>
+          </a:p>
+        </p:txBody>
+      </p:sp>
+    </p:spTree>
+  </p:cSld>
+  <p:clrMapOvr>
+    <a:masterClrMapping/>
+  </p:clrMapOvr>
+</p:sld>
+</file>
+
+<file path=ppt/slides/slide50.xml><?xml version="1.0" encoding="utf-8"?>
+<p:sld xmlns:a="http://schemas.openxmlformats.org/drawingml/2006/main" xmlns:r="http://schemas.openxmlformats.org/officeDocument/2006/relationships" xmlns:p="http://schemas.openxmlformats.org/presentationml/2006/main">
+  <p:cSld name="Slide 50">
+    <p:spTree>
+      <p:nvGrpSpPr>
+        <p:cNvPr id="1" name=""/>
+        <p:cNvGrpSpPr/>
+        <p:nvPr/>
+      </p:nvGrpSpPr>
+      <p:grpSpPr>
+        <a:xfrm>
+          <a:off x="0" y="0"/>
+          <a:ext cx="0" cy="0"/>
+          <a:chOff x="0" y="0"/>
+          <a:chExt cx="0" cy="0"/>
+        </a:xfrm>
+      </p:grpSpPr>
+      <p:sp>
+        <p:nvSpPr>
+          <p:cNvPr id="2" name="Text 0"/>
+          <p:cNvSpPr/>
+          <p:nvPr/>
+        </p:nvSpPr>
+        <p:spPr>
+          <a:xfrm>
+            <a:off x="457200" y="713232"/>
+            <a:ext cx="11368735" cy="274320"/>
+          </a:xfrm>
+          <a:prstGeom prst="rect">
+            <a:avLst/>
+          </a:prstGeom>
+          <a:noFill/>
+          <a:ln/>
+        </p:spPr>
+        <p:txBody>
+          <a:bodyPr wrap="square" lIns="0" tIns="0" rIns="0" bIns="0" rtlCol="0" anchor="ctr"/>
+          <a:lstStyle/>
+          <a:p>
+            <a:pPr algn="r" indent="0" marL="0">
+              <a:buNone/>
+            </a:pPr>
+            <a:r>
+              <a:rPr lang="en-US" sz="1400" b="1" dirty="0">
+                <a:solidFill>
+                  <a:srgbClr val="1C3F6E"/>
+                </a:solidFill>
+                <a:latin typeface="Calibri" pitchFamily="34" charset="0"/>
+                <a:ea typeface="Calibri" pitchFamily="34" charset="-122"/>
+                <a:cs typeface="Calibri" pitchFamily="34" charset="-120"/>
+              </a:rPr>
+              <a:t>TEACHER'S NOTE</a:t>
+            </a:r>
+            <a:endParaRPr lang="en-US" sz="1400" dirty="0"/>
+          </a:p>
+        </p:txBody>
+      </p:sp>
+      <p:pic>
+        <p:nvPicPr>
+          <p:cNvPr id="3" name="Image 0" descr="/home/claude/f4/img/minesec_sheet.png">    </p:cNvPr>
+          <p:cNvPicPr>
+            <a:picLocks noChangeAspect="1"/>
+          </p:cNvPicPr>
+          <p:nvPr/>
+        </p:nvPicPr>
+        <p:blipFill>
+          <a:blip r:embed="rId1"/>
+          <a:stretch>
+            <a:fillRect/>
+          </a:stretch>
+        </p:blipFill>
+        <p:spPr>
+          <a:xfrm>
+            <a:off x="0" y="658368"/>
+            <a:ext cx="5120640" cy="5833872"/>
+          </a:xfrm>
+          <a:prstGeom prst="rect">
+            <a:avLst/>
+          </a:prstGeom>
+        </p:spPr>
+      </p:pic>
+      <p:sp>
+        <p:nvSpPr>
+          <p:cNvPr id="4" name="Text 1"/>
+          <p:cNvSpPr/>
+          <p:nvPr/>
+        </p:nvSpPr>
+        <p:spPr>
+          <a:xfrm>
+            <a:off x="5349240" y="1005840"/>
+            <a:ext cx="6522415" cy="731520"/>
+          </a:xfrm>
+          <a:prstGeom prst="rect">
+            <a:avLst/>
+          </a:prstGeom>
+          <a:noFill/>
+          <a:ln/>
+        </p:spPr>
+        <p:txBody>
+          <a:bodyPr wrap="square" lIns="0" tIns="0" rIns="0" bIns="0" rtlCol="0" anchor="ctr">
+            <a:normAutofit/>
+          </a:bodyPr>
+          <a:lstStyle/>
+          <a:p>
+            <a:pPr algn="ctr" indent="0" marL="0">
+              <a:buNone/>
+            </a:pPr>
+            <a:r>
+              <a:rPr lang="en-US" sz="3600" b="1" dirty="0">
+                <a:solidFill>
+                  <a:srgbClr val="990011"/>
+                </a:solidFill>
+                <a:latin typeface="Times New Roman" pitchFamily="34" charset="0"/>
+                <a:ea typeface="Times New Roman" pitchFamily="34" charset="-122"/>
+                <a:cs typeface="Times New Roman" pitchFamily="34" charset="-120"/>
+              </a:rPr>
+              <a:t>Teacher's Note</a:t>
+            </a:r>
+            <a:endParaRPr lang="en-US" sz="3600" dirty="0"/>
+          </a:p>
+        </p:txBody>
+      </p:sp>
+      <p:sp>
+        <p:nvSpPr>
+          <p:cNvPr id="5" name="Text 2"/>
+          <p:cNvSpPr/>
+          <p:nvPr/>
+        </p:nvSpPr>
+        <p:spPr>
+          <a:xfrm>
+            <a:off x="5349240" y="1783080"/>
+            <a:ext cx="6522415" cy="4663440"/>
+          </a:xfrm>
+          <a:prstGeom prst="rect">
+            <a:avLst/>
+          </a:prstGeom>
+          <a:noFill/>
+          <a:ln/>
+        </p:spPr>
+        <p:txBody>
+          <a:bodyPr wrap="square" lIns="0" tIns="0" rIns="0" bIns="0" rtlCol="0" anchor="t"/>
+          <a:lstStyle/>
+          <a:p>
+            <a:pPr algn="l" marL="342900" indent="-342900">
+              <a:spcAft>
+                <a:spcPts val="800"/>
+              </a:spcAft>
+              <a:buSzPct val="100000"/>
+              <a:buChar char="•"/>
+            </a:pPr>
+            <a:r>
+              <a:rPr lang="en-US" sz="2000" dirty="0">
+                <a:solidFill>
+                  <a:srgbClr val="111111"/>
+                </a:solidFill>
+                <a:latin typeface="Calibri" pitchFamily="34" charset="0"/>
+                <a:ea typeface="Calibri" pitchFamily="34" charset="-122"/>
+                <a:cs typeface="Calibri" pitchFamily="34" charset="-120"/>
+              </a:rPr>
+              <a:t>Timing: Homework correction, plan, objectives 4 min | Recall, situation, action 6 min | 3 activities 12 min | Board summary (copying) 15 min | Evaluation, remediation 5 min | Homework, next lesson 3 min | Logbook 5 min</a:t>
+            </a:r>
+            <a:endParaRPr lang="en-US" sz="2000" dirty="0"/>
+          </a:p>
+          <a:p>
+            <a:pPr algn="l" marL="342900" indent="-342900">
+              <a:spcAft>
+                <a:spcPts val="800"/>
+              </a:spcAft>
+              <a:buSzPct val="100000"/>
+              <a:buChar char="•"/>
+            </a:pPr>
+            <a:r>
+              <a:rPr lang="en-US" sz="2000" dirty="0">
+                <a:solidFill>
+                  <a:srgbClr val="111111"/>
+                </a:solidFill>
+                <a:latin typeface="Calibri" pitchFamily="34" charset="0"/>
+                <a:ea typeface="Calibri" pitchFamily="34" charset="-122"/>
+                <a:cs typeface="Calibri" pitchFamily="34" charset="-120"/>
+              </a:rPr>
+              <a:t>Activity 3 is an animation (GIF): it plays automatically in slide-show mode.</a:t>
+            </a:r>
+            <a:endParaRPr lang="en-US" sz="2000" dirty="0"/>
+          </a:p>
+          <a:p>
+            <a:pPr algn="l" marL="342900" indent="-342900">
+              <a:spcAft>
+                <a:spcPts val="800"/>
+              </a:spcAft>
+              <a:buSzPct val="100000"/>
+              <a:buChar char="•"/>
+            </a:pPr>
+            <a:r>
+              <a:rPr lang="en-US" sz="2000" dirty="0">
+                <a:solidFill>
+                  <a:srgbClr val="111111"/>
+                </a:solidFill>
+                <a:latin typeface="Calibri" pitchFamily="34" charset="0"/>
+                <a:ea typeface="Calibri" pitchFamily="34" charset="-122"/>
+                <a:cs typeface="Calibri" pitchFamily="34" charset="-120"/>
+              </a:rPr>
+              <a:t>Without the projector (Activity 1): draw a V on the board.</a:t>
+            </a:r>
+            <a:endParaRPr lang="en-US" sz="2000" dirty="0"/>
+          </a:p>
+          <a:p>
+            <a:pPr algn="l" marL="342900" indent="-342900">
+              <a:spcAft>
+                <a:spcPts val="800"/>
+              </a:spcAft>
+              <a:buSzPct val="100000"/>
+              <a:buChar char="•"/>
+            </a:pPr>
+            <a:r>
+              <a:rPr lang="en-US" sz="2000" dirty="0">
+                <a:solidFill>
+                  <a:srgbClr val="111111"/>
+                </a:solidFill>
+                <a:latin typeface="Calibri" pitchFamily="34" charset="0"/>
+                <a:ea typeface="Calibri" pitchFamily="34" charset="-122"/>
+                <a:cs typeface="Calibri" pitchFamily="34" charset="-120"/>
+              </a:rPr>
+              <a:t>Without the projector (Activity 2): describe the Vina or Tello Falls.</a:t>
+            </a:r>
+            <a:endParaRPr lang="en-US" sz="2000" dirty="0"/>
+          </a:p>
+          <a:p>
+            <a:pPr algn="l" marL="342900" indent="-342900">
+              <a:spcAft>
+                <a:spcPts val="800"/>
+              </a:spcAft>
+              <a:buSzPct val="100000"/>
+              <a:buChar char="•"/>
+            </a:pPr>
+            <a:r>
+              <a:rPr lang="en-US" sz="2000" dirty="0">
+                <a:solidFill>
+                  <a:srgbClr val="111111"/>
+                </a:solidFill>
+                <a:latin typeface="Calibri" pitchFamily="34" charset="0"/>
+                <a:ea typeface="Calibri" pitchFamily="34" charset="-122"/>
+                <a:cs typeface="Calibri" pitchFamily="34" charset="-120"/>
+              </a:rPr>
+              <a:t>Without the projector (Activity 3): draw the waterfall at three dates.</a:t>
+            </a:r>
+            <a:endParaRPr lang="en-US" sz="2000" dirty="0"/>
+          </a:p>
+        </p:txBody>
+      </p:sp>
+      <p:sp>
+        <p:nvSpPr>
+          <p:cNvPr id="25" name="Slide Number Placeholder 0"/>
+          <p:cNvSpPr>
+            <a:spLocks noGrp="1"/>
+          </p:cNvSpPr>
+          <p:nvPr>
+            <p:ph type="sldNum" sz="quarter" idx="4294967295"/>
+          </p:nvPr>
+        </p:nvSpPr>
+        <p:spPr>
+          <a:xfrm>
+            <a:off x="27432" y="91440"/>
+            <a:ext cx="585216" cy="475488"/>
+          </a:xfrm>
+          <a:prstGeom prst="rect">
+            <a:avLst/>
+          </a:prstGeom>
+          <a:extLst>
+            <a:ext uri="{C572A759-6A51-4108-AA02-DFA0A04FC94B}">
+              <ma14:wrappingTextBoxFlag xmlns:ma14="http://schemas.microsoft.com/office/mac/drawingml/2011/main" val="0"/>
+            </a:ext>
+          </a:extLst>
+        </p:spPr>
+        <p:txBody>
+          <a:bodyPr/>
+          <a:lstStyle>
+            <a:lvl1pPr>
+              <a:defRPr sz="2000">
+                <a:solidFill>
+                  <a:srgbClr val="FFFFFF"/>
+                </a:solidFill>
+                <a:latin typeface="Calibri"/>
+                <a:ea typeface="Calibri"/>
+                <a:cs typeface="Calibri"/>
+              </a:defRPr>
+            </a:lvl1pPr>
+          </a:lstStyle>
+          <a:p>
+            <a:pPr algn="ctr"/>
+            <a:fld id="{F7021451-1387-4CA6-816F-3879F97B5CBC}" type="slidenum">
+              <a:rPr b="1" lang="en-US"/>
+              <a:t>50</a:t>
+            </a:fld>
+            <a:endParaRPr lang="en-US"/>
+          </a:p>
+        </p:txBody>
+      </p:sp>
+    </p:spTree>
+  </p:cSld>
+  <p:clrMapOvr>
+    <a:masterClrMapping/>
+  </p:clrMapOvr>
+</p:sld>
+</file>
+
+<file path=ppt/slides/slide51.xml><?xml version="1.0" encoding="utf-8"?>
+<p:sld xmlns:a="http://schemas.openxmlformats.org/drawingml/2006/main" xmlns:r="http://schemas.openxmlformats.org/officeDocument/2006/relationships" xmlns:p="http://schemas.openxmlformats.org/presentationml/2006/main">
+  <p:cSld name="Slide 51">
+    <p:spTree>
+      <p:nvGrpSpPr>
+        <p:cNvPr id="1" name=""/>
+        <p:cNvGrpSpPr/>
+        <p:nvPr/>
+      </p:nvGrpSpPr>
+      <p:grpSpPr>
+        <a:xfrm>
+          <a:off x="0" y="0"/>
+          <a:ext cx="0" cy="0"/>
+          <a:chOff x="0" y="0"/>
+          <a:chExt cx="0" cy="0"/>
+        </a:xfrm>
+      </p:grpSpPr>
+      <p:sp>
+        <p:nvSpPr>
+          <p:cNvPr id="2" name="Text 0"/>
+          <p:cNvSpPr/>
+          <p:nvPr/>
+        </p:nvSpPr>
+        <p:spPr>
+          <a:xfrm>
+            <a:off x="457200" y="713232"/>
+            <a:ext cx="11368735" cy="274320"/>
+          </a:xfrm>
+          <a:prstGeom prst="rect">
+            <a:avLst/>
+          </a:prstGeom>
+          <a:noFill/>
+          <a:ln/>
+        </p:spPr>
+        <p:txBody>
+          <a:bodyPr wrap="square" lIns="0" tIns="0" rIns="0" bIns="0" rtlCol="0" anchor="ctr"/>
+          <a:lstStyle/>
+          <a:p>
+            <a:pPr algn="r" indent="0" marL="0">
+              <a:buNone/>
+            </a:pPr>
+            <a:r>
+              <a:rPr lang="en-US" sz="1400" b="1" dirty="0">
+                <a:solidFill>
+                  <a:srgbClr val="1C3F6E"/>
+                </a:solidFill>
+                <a:latin typeface="Calibri" pitchFamily="34" charset="0"/>
+                <a:ea typeface="Calibri" pitchFamily="34" charset="-122"/>
+                <a:cs typeface="Calibri" pitchFamily="34" charset="-120"/>
+              </a:rPr>
+              <a:t>REFERENCES</a:t>
+            </a:r>
+            <a:endParaRPr lang="en-US" sz="1400" dirty="0"/>
+          </a:p>
+        </p:txBody>
+      </p:sp>
+      <p:pic>
+        <p:nvPicPr>
+          <p:cNvPr id="3" name="Image 0" descr="/home/claude/f4/img/minesec_sheet.png">    </p:cNvPr>
+          <p:cNvPicPr>
+            <a:picLocks noChangeAspect="1"/>
+          </p:cNvPicPr>
+          <p:nvPr/>
+        </p:nvPicPr>
+        <p:blipFill>
+          <a:blip r:embed="rId1"/>
+          <a:stretch>
+            <a:fillRect/>
+          </a:stretch>
+        </p:blipFill>
+        <p:spPr>
+          <a:xfrm>
+            <a:off x="0" y="658368"/>
+            <a:ext cx="5120640" cy="5833872"/>
+          </a:xfrm>
+          <a:prstGeom prst="rect">
+            <a:avLst/>
+          </a:prstGeom>
+        </p:spPr>
+      </p:pic>
+      <p:sp>
+        <p:nvSpPr>
+          <p:cNvPr id="4" name="Text 1"/>
+          <p:cNvSpPr/>
+          <p:nvPr/>
+        </p:nvSpPr>
+        <p:spPr>
+          <a:xfrm>
+            <a:off x="5349240" y="1005840"/>
+            <a:ext cx="6522415" cy="731520"/>
+          </a:xfrm>
+          <a:prstGeom prst="rect">
+            <a:avLst/>
+          </a:prstGeom>
+          <a:noFill/>
+          <a:ln/>
+        </p:spPr>
+        <p:txBody>
+          <a:bodyPr wrap="square" lIns="0" tIns="0" rIns="0" bIns="0" rtlCol="0" anchor="ctr">
+            <a:normAutofit/>
+          </a:bodyPr>
+          <a:lstStyle/>
+          <a:p>
+            <a:pPr algn="ctr" indent="0" marL="0">
+              <a:buNone/>
+            </a:pPr>
+            <a:r>
+              <a:rPr lang="en-US" sz="3600" b="1" dirty="0">
+                <a:solidFill>
+                  <a:srgbClr val="990011"/>
+                </a:solidFill>
+                <a:latin typeface="Times New Roman" pitchFamily="34" charset="0"/>
+                <a:ea typeface="Times New Roman" pitchFamily="34" charset="-122"/>
+                <a:cs typeface="Times New Roman" pitchFamily="34" charset="-120"/>
+              </a:rPr>
+              <a:t>References</a:t>
+            </a:r>
+            <a:endParaRPr lang="en-US" sz="3600" dirty="0"/>
+          </a:p>
+        </p:txBody>
+      </p:sp>
+      <p:sp>
+        <p:nvSpPr>
+          <p:cNvPr id="5" name="Text 2"/>
+          <p:cNvSpPr/>
+          <p:nvPr/>
+        </p:nvSpPr>
+        <p:spPr>
+          <a:xfrm>
+            <a:off x="5349240" y="1783080"/>
+            <a:ext cx="6522415" cy="4663440"/>
+          </a:xfrm>
+          <a:prstGeom prst="rect">
+            <a:avLst/>
+          </a:prstGeom>
+          <a:noFill/>
+          <a:ln/>
+        </p:spPr>
+        <p:txBody>
+          <a:bodyPr wrap="square" lIns="0" tIns="0" rIns="0" bIns="0" rtlCol="0" anchor="t"/>
+          <a:lstStyle/>
+          <a:p>
+            <a:pPr algn="l" marL="342900" indent="-342900">
+              <a:spcAft>
+                <a:spcPts val="800"/>
+              </a:spcAft>
+              <a:buSzPct val="100000"/>
+              <a:buChar char="•"/>
+            </a:pPr>
+            <a:r>
+              <a:rPr lang="en-US" sz="1800" dirty="0">
+                <a:solidFill>
+                  <a:srgbClr val="111111"/>
+                </a:solidFill>
+                <a:latin typeface="Calibri" pitchFamily="34" charset="0"/>
+                <a:ea typeface="Calibri" pitchFamily="34" charset="-122"/>
+                <a:cs typeface="Calibri" pitchFamily="34" charset="-120"/>
+              </a:rPr>
+              <a:t>National Geography Syllabus (MINESEC), Form 4 — Denudation Processes, Landforms and Impacts on Man.</a:t>
+            </a:r>
+            <a:endParaRPr lang="en-US" sz="1800" dirty="0"/>
+          </a:p>
+          <a:p>
+            <a:pPr algn="l" marL="342900" indent="-342900">
+              <a:spcAft>
+                <a:spcPts val="800"/>
+              </a:spcAft>
+              <a:buSzPct val="100000"/>
+              <a:buChar char="•"/>
+            </a:pPr>
+            <a:r>
+              <a:rPr lang="en-US" sz="1800" dirty="0">
+                <a:solidFill>
+                  <a:srgbClr val="111111"/>
+                </a:solidFill>
+                <a:latin typeface="Calibri" pitchFamily="34" charset="0"/>
+                <a:ea typeface="Calibri" pitchFamily="34" charset="-122"/>
+                <a:cs typeface="Calibri" pitchFamily="34" charset="-120"/>
+              </a:rPr>
+              <a:t>Teacher's lesson notes (Form 4), checked and corrected where necessary.</a:t>
+            </a:r>
+            <a:endParaRPr lang="en-US" sz="1800" dirty="0"/>
+          </a:p>
+          <a:p>
+            <a:pPr algn="l" marL="342900" indent="-342900">
+              <a:spcAft>
+                <a:spcPts val="800"/>
+              </a:spcAft>
+              <a:buSzPct val="100000"/>
+              <a:buChar char="•"/>
+            </a:pPr>
+            <a:r>
+              <a:rPr lang="en-US" sz="1800" dirty="0">
+                <a:solidFill>
+                  <a:srgbClr val="111111"/>
+                </a:solidFill>
+                <a:latin typeface="Calibri" pitchFamily="34" charset="0"/>
+                <a:ea typeface="Calibri" pitchFamily="34" charset="-122"/>
+                <a:cs typeface="Calibri" pitchFamily="34" charset="-120"/>
+              </a:rPr>
+              <a:t>Photo, Activity 2: “Ekom-Nkam waterfall” by jbdodane, CC BY-NC 2.0, via Flickr (https://www.flickr.com/photos/27998473@N02/11291226526)</a:t>
+            </a:r>
+            <a:endParaRPr lang="en-US" sz="1800" dirty="0"/>
+          </a:p>
+          <a:p>
+            <a:pPr algn="l" marL="342900" indent="-342900">
+              <a:spcAft>
+                <a:spcPts val="800"/>
+              </a:spcAft>
+              <a:buSzPct val="100000"/>
+              <a:buChar char="•"/>
+            </a:pPr>
+            <a:r>
+              <a:rPr lang="en-US" sz="1800" dirty="0">
+                <a:solidFill>
+                  <a:srgbClr val="111111"/>
+                </a:solidFill>
+                <a:latin typeface="Calibri" pitchFamily="34" charset="0"/>
+                <a:ea typeface="Calibri" pitchFamily="34" charset="-122"/>
+                <a:cs typeface="Calibri" pitchFamily="34" charset="-120"/>
+              </a:rPr>
+              <a:t>Diagrams and animations: drawn for this lesson (Geography Department).</a:t>
+            </a:r>
+            <a:endParaRPr lang="en-US" sz="1800" dirty="0"/>
+          </a:p>
+        </p:txBody>
+      </p:sp>
+      <p:sp>
+        <p:nvSpPr>
+          <p:cNvPr id="25" name="Slide Number Placeholder 0"/>
+          <p:cNvSpPr>
+            <a:spLocks noGrp="1"/>
+          </p:cNvSpPr>
+          <p:nvPr>
+            <p:ph type="sldNum" sz="quarter" idx="4294967295"/>
+          </p:nvPr>
+        </p:nvSpPr>
+        <p:spPr>
+          <a:xfrm>
+            <a:off x="27432" y="91440"/>
+            <a:ext cx="585216" cy="475488"/>
+          </a:xfrm>
+          <a:prstGeom prst="rect">
+            <a:avLst/>
+          </a:prstGeom>
+          <a:extLst>
+            <a:ext uri="{C572A759-6A51-4108-AA02-DFA0A04FC94B}">
+              <ma14:wrappingTextBoxFlag xmlns:ma14="http://schemas.microsoft.com/office/mac/drawingml/2011/main" val="0"/>
+            </a:ext>
+          </a:extLst>
+        </p:spPr>
+        <p:txBody>
+          <a:bodyPr/>
+          <a:lstStyle>
+            <a:lvl1pPr>
+              <a:defRPr sz="2000">
+                <a:solidFill>
+                  <a:srgbClr val="FFFFFF"/>
+                </a:solidFill>
+                <a:latin typeface="Calibri"/>
+                <a:ea typeface="Calibri"/>
+                <a:cs typeface="Calibri"/>
+              </a:defRPr>
+            </a:lvl1pPr>
+          </a:lstStyle>
+          <a:p>
+            <a:pPr algn="ctr"/>
+            <a:fld id="{F7021451-1387-4CA6-816F-3879F97B5CBC}" type="slidenum">
+              <a:rPr b="1" lang="en-US"/>
+              <a:t>51</a:t>
             </a:fld>
             <a:endParaRPr lang="en-US"/>
           </a:p>

--- a/lecons/F3/23_FORM4_LESSON19_Upper_Course.pptx
+++ b/lecons/F3/23_FORM4_LESSON19_Upper_Course.pptx
@@ -12377,7 +12377,7 @@
               <a:buNone/>
             </a:pPr>
             <a:r>
-              <a:rPr lang="en-US" sz="4000" b="1" dirty="0">
+              <a:rPr lang="en-US" sz="3200" b="1" dirty="0">
                 <a:solidFill>
                   <a:srgbClr val="111111"/>
                 </a:solidFill>
@@ -12387,7 +12387,7 @@
               </a:rPr>
               <a:t>Topic: Denudation Processes, Landforms and Impacts on Man</a:t>
             </a:r>
-            <a:endParaRPr lang="en-US" sz="4000" dirty="0"/>
+            <a:endParaRPr lang="en-US" sz="3200" dirty="0"/>
           </a:p>
           <a:p>
             <a:pPr algn="l" indent="0" marL="0">
@@ -12397,7 +12397,7 @@
               <a:buNone/>
             </a:pPr>
             <a:r>
-              <a:rPr lang="en-US" sz="4000" b="1" dirty="0">
+              <a:rPr lang="en-US" sz="3200" b="1" dirty="0">
                 <a:solidFill>
                   <a:srgbClr val="111111"/>
                 </a:solidFill>
@@ -12407,7 +12407,7 @@
               </a:rPr>
               <a:t>Sub-topic: The Work of Rivers on the Landscape and Impacts on Man</a:t>
             </a:r>
-            <a:endParaRPr lang="en-US" sz="4000" dirty="0"/>
+            <a:endParaRPr lang="en-US" sz="3200" dirty="0"/>
           </a:p>
           <a:p>
             <a:pPr algn="l" indent="0" marL="0">
@@ -12417,7 +12417,7 @@
               <a:buNone/>
             </a:pPr>
             <a:r>
-              <a:rPr lang="en-US" sz="4000" b="1" dirty="0">
+              <a:rPr lang="en-US" sz="3200" b="1" dirty="0">
                 <a:solidFill>
                   <a:srgbClr val="990011"/>
                 </a:solidFill>
@@ -12427,7 +12427,7 @@
               </a:rPr>
               <a:t>Lesson 19: The Upper Course of a River</a:t>
             </a:r>
-            <a:endParaRPr lang="en-US" sz="4000" dirty="0"/>
+            <a:endParaRPr lang="en-US" sz="3200" dirty="0"/>
           </a:p>
         </p:txBody>
       </p:sp>

--- a/lecons/F3/23_FORM4_LESSON19_Upper_Course.pptx
+++ b/lecons/F3/23_FORM4_LESSON19_Upper_Course.pptx
@@ -3456,7 +3456,7 @@
           <a:p>
             <a:r>
               <a:rPr lang="en-US" dirty="0"/>
-              <a:t>Before we start the new lesson, let us correct the homework I gave you at the end of Lesson 18: Action of Rivers on the Landscape. The question was: Find a photo or a video of the Vina Falls or the Tello Falls near Ngaoundéré, or of the Kola Gorges near Guider. Describe the river and its valley in three sentences. Take out your exercise books.</a:t>
+              <a:t>Before we start the new lesson, let us correct the homework I gave you at the end of Lesson 18: Action of Rivers on the Landscape. The question was: Name two landforms of the upper course of a river. Take out your exercise books.</a:t>
             </a:r>
             <a:endParaRPr lang="en-US" dirty="0"/>
           </a:p>
@@ -3984,7 +3984,7 @@
           <a:p>
             <a:r>
               <a:rPr lang="en-US" dirty="0"/>
-              <a:t>For your homework: Stand on the Benue Bridge in Garoua or look at a photo of it. Draw the river and its bends, and mark where the water seems fastest. We shall correct it at the beginning of our next lesson.</a:t>
+              <a:t>For your homework: Define a meander. We shall correct it at the beginning of our next lesson.</a:t>
             </a:r>
             <a:endParaRPr lang="en-US" dirty="0"/>
           </a:p>
@@ -4424,7 +4424,7 @@
           <a:p>
             <a:r>
               <a:rPr lang="en-US" dirty="0"/>
-              <a:t>Here is a good answer. Example: at the Vina Falls the river falls over a hard rock step into a deep pool. The valley is narrow with steep sides, and the water is fast and noisy. Compare it with your own answer and correct your work in red.</a:t>
+              <a:t>Here is a good answer. The V-shaped valley and the waterfall (also gorges, rapids and potholes). Compare it with your own answer and correct your work in red.</a:t>
             </a:r>
             <a:endParaRPr lang="en-US" dirty="0"/>
           </a:p>
@@ -14992,7 +14992,7 @@
         <p:spPr>
           <a:xfrm>
             <a:off x="0" y="658368"/>
-            <a:ext cx="3840480" cy="5833872"/>
+            <a:ext cx="5120640" cy="5833872"/>
           </a:xfrm>
           <a:prstGeom prst="rect">
             <a:avLst/>
@@ -15007,8 +15007,8 @@
         </p:nvSpPr>
         <p:spPr>
           <a:xfrm>
-            <a:off x="4069080" y="1005840"/>
-            <a:ext cx="7802575" cy="731520"/>
+            <a:off x="5349240" y="1005840"/>
+            <a:ext cx="6522415" cy="731520"/>
           </a:xfrm>
           <a:prstGeom prst="rect">
             <a:avLst/>
@@ -15048,8 +15048,8 @@
         </p:nvSpPr>
         <p:spPr>
           <a:xfrm>
-            <a:off x="4069080" y="1783080"/>
-            <a:ext cx="7802575" cy="4663440"/>
+            <a:off x="5349240" y="1783080"/>
+            <a:ext cx="6522415" cy="4663440"/>
           </a:xfrm>
           <a:prstGeom prst="rect">
             <a:avLst/>
@@ -15096,7 +15096,7 @@
                 <a:ea typeface="Times New Roman" pitchFamily="34" charset="-122"/>
                 <a:cs typeface="Times New Roman" pitchFamily="34" charset="-120"/>
               </a:rPr>
-              <a:t>Find a photo or a video of the Vina Falls or the Tello Falls near Ngaoundéré, or of the Kola Gorges near Guider. Describe the river and its valley in three sentences.</a:t>
+              <a:t>Name two landforms of the upper course of a river.</a:t>
             </a:r>
             <a:endParaRPr lang="en-US" sz="4000" dirty="0"/>
           </a:p>
@@ -16456,7 +16456,7 @@
                 <a:ea typeface="Times New Roman" pitchFamily="34" charset="-122"/>
                 <a:cs typeface="Times New Roman" pitchFamily="34" charset="-120"/>
               </a:rPr>
-              <a:t>Stand on the Benue Bridge in Garoua or look at a photo of it. Draw the river and its bends, and mark where the water seems fastest.</a:t>
+              <a:t>Define a meander.</a:t>
             </a:r>
             <a:endParaRPr lang="en-US" sz="4000" dirty="0"/>
           </a:p>
@@ -19396,7 +19396,7 @@
                           <a:ea typeface="Calibri" pitchFamily="34" charset="-122"/>
                           <a:cs typeface="Calibri" pitchFamily="34" charset="-120"/>
                         </a:rPr>
-                        <a:t>Stand on the Benue Bridge in Garoua or look at a photo of it. Draw the river and its bends, and mark where the water seems fastest.</a:t>
+                        <a:t>Define a meander.</a:t>
                       </a:r>
                       <a:endParaRPr lang="en-US" sz="1600" dirty="0">
                         <a:latin typeface="Calibri" charset="0"/>
@@ -19941,7 +19941,7 @@
                 <a:ea typeface="Times New Roman" pitchFamily="34" charset="-122"/>
                 <a:cs typeface="Times New Roman" pitchFamily="34" charset="-120"/>
               </a:rPr>
-              <a:t>Example: at the Vina Falls the river falls over a hard rock step into a deep pool. The valley is narrow with steep sides, and the water is fast and noisy.</a:t>
+              <a:t>The V-shaped valley and the waterfall (also gorges, rapids and potholes).</a:t>
             </a:r>
             <a:endParaRPr lang="en-US" sz="4000" dirty="0"/>
           </a:p>
